--- a/qsbg_smart_tour_emerald_dark.pptx
+++ b/qsbg_smart_tour_emerald_dark.pptx
@@ -6,17 +6,18 @@
   </p:sldMasterIdLst>
   <p:sldIdLst>
     <p:sldId id="256" r:id="rId7"/>
-    <p:sldId id="257" r:id="rId9"/>
-    <p:sldId id="258" r:id="rId10"/>
-    <p:sldId id="259" r:id="rId11"/>
-    <p:sldId id="260" r:id="rId12"/>
-    <p:sldId id="261" r:id="rId13"/>
-    <p:sldId id="262" r:id="rId14"/>
-    <p:sldId id="263" r:id="rId15"/>
-    <p:sldId id="264" r:id="rId16"/>
-    <p:sldId id="265" r:id="rId17"/>
-    <p:sldId id="266" r:id="rId18"/>
-    <p:sldId id="267" r:id="rId19"/>
+    <p:sldId id="257" r:id="rId8"/>
+    <p:sldId id="258" r:id="rId9"/>
+    <p:sldId id="259" r:id="rId10"/>
+    <p:sldId id="260" r:id="rId11"/>
+    <p:sldId id="261" r:id="rId12"/>
+    <p:sldId id="262" r:id="rId13"/>
+    <p:sldId id="263" r:id="rId14"/>
+    <p:sldId id="264" r:id="rId15"/>
+    <p:sldId id="265" r:id="rId16"/>
+    <p:sldId id="266" r:id="rId17"/>
+    <p:sldId id="267" r:id="rId18"/>
+    <p:sldId id="268" r:id="rId19"/>
   </p:sldIdLst>
   <p:sldSz cx="12191695" cy="6858000" type="screen4x3"/>
   <p:notesSz cx="6858000" cy="9144000"/>
@@ -513,7 +514,7 @@
           <a:lstStyle/>
           <a:p>
             <a:r>
-              <a:t>สคริปต์บทพูดหน้าปก (1.0 นาที):</a:t>
+              <a:t>สคริปต์พูดหน้าปก (1.0 นาที):</a:t>
             </a:r>
           </a:p>
           <a:p>
@@ -526,10 +527,9 @@
               <a:t>ในวันนี้ผมมีความยินดีอย่างยิ่งที่จะนำเสนอ 'Smart Electric Tour Bus Management System Design: โครงการออกแบบและพัฒนาระบบจัดการรถนำเที่ยวไฟฟ้า สวนพฤกษศาสตร์สมเด็จพระนางเจ้าสิริกิติ์ จังหวัดเชียงใหม่'</a:t>
             </a:r>
           </a:p>
-          <a:p/>
-          <a:p>
-            <a:r>
-              <a:t>โครงการนี้เป็นการผสานสองหัวใจสำคัญเข้าด้วยกัน นั่นคือ 'การท่องเที่ยวสีเขียว (Green Tourism)' ด้วยยานยนต์ไฟฟ้า EV 100% ควบคู่กับ 'Smart Tourism Platform' เพื่อยกระดับประสบการณ์การท่องเที่ยวเชิงนิเวศและการอนุรักษ์ธรรมชาติในพื้นที่ 6,500 ไร่ สู่มาตรฐานสวนพฤกษศาสตร์ระดับโลกอย่างยั่งยืนครับ</a:t>
+          <a:p>
+            <a:r>
+              <a:t>ภาพที่ท่านเห็นทางขวามือคือรถนำเที่ยวไฟฟ้าจริงทั้ง 3 คันที่จะนำมาให้บริการในพื้นที่ 6,500 ไร่ โครงการนี้คือการผสานการท่องเที่ยวสีเขียว Green EV 100% ควบคู่กับ Smart Tourism Platform ยกระดับสวนพฤกษศาสตร์สู่ระดับสากลครับ</a:t>
             </a:r>
           </a:p>
         </p:txBody>
@@ -599,27 +599,12 @@
           <a:lstStyle/>
           <a:p>
             <a:r>
-              <a:t>สคริปต์บทพูดหน้าที่ 10 : แผนการดำเนินงาน 9 เดือน (1.0 นาที):</a:t>
-            </a:r>
-          </a:p>
-          <a:p>
-            <a:r>
-              <a:t>แผนการดำเนินงานแบ่งเป็น 3 ระยะอย่างชัดเจน:</a:t>
-            </a:r>
-          </a:p>
-          <a:p>
-            <a:r>
-              <a:t>- Phase 1 (เดือนที่ 1-3) Core Foundation: ออกแบบฐานข้อมูล, พัฒนา API, ตู้ Kiosk, เชื่อมต่อ Payment Gateway และ Driver App บนแท็บเล็ต</a:t>
-            </a:r>
-          </a:p>
-          <a:p>
-            <a:r>
-              <a:t>- Phase 2 (เดือนที่ 4-6) Realtime &amp; Mobile: ติดตั้ง WebSocket Server, พัฒนา Mobile App (iOS/Android) และทดสอบระบบ Live Tracking บนพื้นที่จริง 6 สถานี</a:t>
-            </a:r>
-          </a:p>
-          <a:p>
-            <a:r>
-              <a:t>- Phase 3 (เดือนที่ 7-9) Advanced Features: เปิดระบบ Push Notification, Analytics Dashboard สำหรับผู้บริหาร, เปิดระบบจองออนไลน์ล่วงหน้า จัดอบรมบุคลากร และส่งมอบงานสมบูรณ์ครับ</a:t>
+              <a:t>สคริปต์พูดหน้าที่ 10 : เทคโนโลยีที่เลือกใช้ (1.5 นาที):</a:t>
+            </a:r>
+          </a:p>
+          <a:p>
+            <a:r>
+              <a:t>Tech Stack ระดับ Enterprise: Frontend ใช้ Next.js และ React Native Backend ใช้ Node.js + Fastify และ Socket.io สตรีม GPS Database ใช้ PostgreSQL, Redis และ TimescaleDB และวางระบบบน Docker / Kubernetes บน Cloud การันตี Uptime 99.9% พร้อมรับนักท่องเที่ยวช่วงเทศกาลครับ</a:t>
             </a:r>
           </a:p>
         </p:txBody>
@@ -689,32 +674,12 @@
           <a:lstStyle/>
           <a:p>
             <a:r>
-              <a:t>สคริปต์บทพูดหน้าที่ 11 : ประโยชน์ที่คาดว่าจะได้รับ (1.5 นาที):</a:t>
-            </a:r>
-          </a:p>
-          <a:p>
-            <a:r>
-              <a:t>ผลประโยชน์และความคุ้มค่าเกิดขึ้นใน 4 มิติ:</a:t>
-            </a:r>
-          </a:p>
-          <a:p>
-            <a:r>
-              <a:t>1. นักท่องเที่ยว: ได้รับความสะดวกสบาย ซื้อตั๋วง่าย ทราบเวลารถชัดเจน สัมผัสธรรมชาติที่เงียบสงบ</a:t>
-            </a:r>
-          </a:p>
-          <a:p>
-            <a:r>
-              <a:t>2. เจ้าหน้าที่ &amp; คนขับ: สแกนตรวจตั๋วรวดเร็ว ทราบจำนวนคนรอสถานีถัดไป ลดภาระงานและความขัดแย้งหน้างาน</a:t>
-            </a:r>
-          </a:p>
-          <a:p>
-            <a:r>
-              <a:t>3. ผู้บริหาร: มี Data-Driven Dashboard เห็นข้อมูลสถิติเชิงลึกและรายได้อย่างโปร่งใส 100% นำไปวางแผนพัฒนาสวนฯ ได้อย่างแม่นยำ</a:t>
-            </a:r>
-          </a:p>
-          <a:p>
-            <a:r>
-              <a:t>4. สิ่งแวดล้อม: ลดการปล่อยคาร์บอนด้วยรถ EV 100% ไร้เสียง ไร้ควัน ยกระดับสวนพฤกษศาสตร์ไทยสู่มาตรฐานสากลครับ</a:t>
+              <a:t>สคริปต์พูดหน้าที่ 11 : แผนการดำเนินงาน 9 เดือน (1.0 นาที):</a:t>
+            </a:r>
+          </a:p>
+          <a:p>
+            <a:r>
+              <a:t>แผนงาน 9 เดือนแบ่ง 3 ระยะ: Phase 1 (ด.1-3) วางรากฐาน ฐานข้อมูล ตู้ Kiosk และ Driver App Phase 2 (ด.4-6) พัฒนาระบบเรียลไทม์ Mobile App และทดสอบบนพื้นที่จริง 6 สถานี และ Phase 3 (ด.7-9) Notification, Analytics Dashboard อบรมบุคลากร และส่งมอบงานสมบูรณ์ครับ</a:t>
             </a:r>
           </a:p>
         </p:txBody>
@@ -784,23 +749,87 @@
           <a:lstStyle/>
           <a:p>
             <a:r>
-              <a:t>สคริปต์บทพูดหน้าที่ 12 : บทสรุปและการถาม-ตอบ (1.0 นาที):</a:t>
-            </a:r>
-          </a:p>
-          <a:p>
-            <a:r>
-              <a:t>โดยสรุปแล้ว โครงการออกแบบและพัฒนาระบบจัดการรถนำเที่ยวไฟฟ้า สวนพฤกษศาสตร์สมเด็จพระนางเจ้าสิริกิติ์ คือการผสานรวมพลังงานสะอาดเข้ากับนวัตกรรมดิจิทัล เพื่อสร้างอนาคตสีเขียวที่ยั่งยืนอย่างแท้จริง</a:t>
-            </a:r>
-          </a:p>
-          <a:p/>
-          <a:p>
-            <a:r>
-              <a:t>ทางทีมงานมีความพร้อมที่จะเริ่มดำเนินงานตามแผนงาน Phase 1 ทันทีครับ</a:t>
-            </a:r>
-          </a:p>
-          <a:p>
-            <a:r>
-              <a:t>ผมขอขอบพระคุณท่านประธานและคณะกรรมการทุกท่านเป็นอย่างสูง และยินดีรับฟังข้อเสนอแนะรวมถึงตอบข้อซักถามครับ ขอบคุณครับ</a:t>
+              <a:t>สคริปต์พูดหน้าที่ 12 : ประโยชน์และคุณค่าที่ได้รับ (1.5 นาที):</a:t>
+            </a:r>
+          </a:p>
+          <a:p>
+            <a:r>
+              <a:t>ความคุ้มค่าเกิดขึ้นใน 4 มิติ: นักท่องเที่ยวสะดวกสบาย เจ้าหน้าที่ทำงานง่ายขึ้น ผู้บริหารมี Real-time Dashboard ข้อมูลสถิติเชิงลึก และด้านสิ่งแวดล้อม (ดังภาพจุดชาร์จ EV Charger จริง) การเปลี่ยนมาใช้รถ EV 100% ช่วยลดมลพิษ ปกป้องระบบนิเวศในพื้นที่ 6,500 ไร่อย่างยั่งยืนครับ</a:t>
+            </a:r>
+          </a:p>
+        </p:txBody>
+      </p:sp>
+      <p:sp>
+        <p:nvSpPr>
+          <p:cNvPr id="4" name="Slide Number Placeholder 3"/>
+          <p:cNvSpPr>
+            <a:spLocks noGrp="1"/>
+          </p:cNvSpPr>
+          <p:nvPr>
+            <p:ph type="sldNum" idx="5" sz="quarter"/>
+          </p:nvPr>
+        </p:nvSpPr>
+        <p:spPr/>
+      </p:sp>
+    </p:spTree>
+  </p:cSld>
+  <p:clrMapOvr>
+    <a:masterClrMapping/>
+  </p:clrMapOvr>
+</p:notes>
+</file>
+
+<file path=ppt/notesSlides/notesSlide13.xml><?xml version="1.0" encoding="utf-8"?>
+<p:notes xmlns:a="http://schemas.openxmlformats.org/drawingml/2006/main" xmlns:p="http://schemas.openxmlformats.org/presentationml/2006/main" xmlns:r="http://schemas.openxmlformats.org/officeDocument/2006/relationships">
+  <p:cSld>
+    <p:spTree>
+      <p:nvGrpSpPr>
+        <p:cNvPr id="1" name=""/>
+        <p:cNvGrpSpPr/>
+        <p:nvPr/>
+      </p:nvGrpSpPr>
+      <p:grpSpPr>
+        <a:xfrm>
+          <a:off x="0" y="0"/>
+          <a:ext cx="0" cy="0"/>
+          <a:chOff x="0" y="0"/>
+          <a:chExt cx="0" cy="0"/>
+        </a:xfrm>
+      </p:grpSpPr>
+      <p:sp>
+        <p:nvSpPr>
+          <p:cNvPr id="2" name="Slide Image Placeholder 1"/>
+          <p:cNvSpPr>
+            <a:spLocks noGrp="1"/>
+          </p:cNvSpPr>
+          <p:nvPr>
+            <p:ph type="sldImg" idx="2"/>
+          </p:nvPr>
+        </p:nvSpPr>
+        <p:spPr/>
+      </p:sp>
+      <p:sp>
+        <p:nvSpPr>
+          <p:cNvPr id="3" name="Notes Placeholder 2"/>
+          <p:cNvSpPr>
+            <a:spLocks noGrp="1"/>
+          </p:cNvSpPr>
+          <p:nvPr>
+            <p:ph type="body" idx="3" sz="quarter"/>
+          </p:nvPr>
+        </p:nvSpPr>
+        <p:spPr/>
+        <p:txBody>
+          <a:bodyPr/>
+          <a:lstStyle/>
+          <a:p>
+            <a:r>
+              <a:t>สคริปต์พูดหน้าที่ 13 : บทสรุปและการถาม-ตอบ (1.0 นาที):</a:t>
+            </a:r>
+          </a:p>
+          <a:p>
+            <a:r>
+              <a:t>โครงการพัฒนาระบบจัดการรถนำเที่ยวไฟฟ้า สวนพฤกษศาสตร์สมเด็จพระนางเจ้าสิริกิติ์ คือการผสานเทคโนโลยีเข้ากับธรรมชาติอย่างลงตัว ทีมงานพร้อมเดินหน้าตามแผนงาน Phase 1 ทันทีครับ ขอขอบพระคุณคณะกรรมการทุกท่าน และยินดีรับฟังข้อเสนอแนะรวมถึงตอบข้อซักถามครับ ขอบคุณครับ</a:t>
             </a:r>
           </a:p>
         </p:txBody>
@@ -870,33 +899,12 @@
           <a:lstStyle/>
           <a:p>
             <a:r>
-              <a:t>สคริปต์บทพูดหน้าที่ 2 : บริบทและปัญหาเดิม (1.5 นาที):</a:t>
-            </a:r>
-          </a:p>
-          <a:p>
-            <a:r>
-              <a:t>สวนพฤกษศาสตร์สมเด็จพระนางเจ้าสิริกิติ์ อำเภอแม่ริม มีพื้นที่กว้างใหญ่ถึง 6,500 ไร่ มีแลนด์มาร์กสำคัญระดับประเทศ เช่น Canopy Walkway ทางเดินเรือนยอดไม้, กลุ่มเรือนกระจกเฉลิมพระเกียรติ และพิพิธภัณฑ์ธรรมชาติวิทยา</a:t>
-            </a:r>
-          </a:p>
-          <a:p/>
-          <a:p>
-            <a:r>
-              <a:t>แต่ในปัจจุบันเราเผชิญปัญหาหลัก 3 ประการ:</a:t>
-            </a:r>
-          </a:p>
-          <a:p>
-            <a:r>
-              <a:t>1. มลพิษและเสียง: เดิมใช้รถนำเที่ยวเครื่องยนต์สันดาปเพียง 2 คัน มีเสียงดังและปล่อยควันไอเสียรบกวนบรรยากาศธรรมชาติ</a:t>
-            </a:r>
-          </a:p>
-          <a:p>
-            <a:r>
-              <a:t>2. ขาดระบบติดตาม: นักท่องเที่ยวไม่ทราบเวลารถที่จะมาถึงสถานี (No ETA) ทำให้ต้องรอคอยอย่างไร้จุดหมาย เกิดความแออัดสะสม</a:t>
-            </a:r>
-          </a:p>
-          <a:p>
-            <a:r>
-              <a:t>3. ขาดฐานข้อมูลเชิงระบบ: ผู้บริหารไม่มีข้อมูลสถิติดิจิทัลเชิงพื้นที่ ทำให้ไม่สามารถวิเคราะห์และวางแผนการเดินรถได้อย่างตรงจุดครับ</a:t>
+              <a:t>สคริปต์พูดหน้าที่ 2 : บริบทและปัญหาเดิม (1.5 นาที):</a:t>
+            </a:r>
+          </a:p>
+          <a:p>
+            <a:r>
+              <a:t>สวนพฤกษศาสตร์สมเด็จพระนางเจ้าสิริกิติ์ มีพื้นที่กว้างถึง 6,500 ไร่ แต่เดิมเรามีข้อจำกัด 3 ข้อ: 1. รถสันดาปเดิม 2 คัน มีเสียงดังและปล่อยควันไอเสีย 2. นักท่องเที่ยวไม่ทราบเวลาที่รถจะมาถึงสถานี (No ETA) ทำให้รอคอยอย่างไร้จุดหมาย และ 3. ขาดข้อมูลสถิติดิจิทัลเชิงพื้นที่ ทำให้ผู้บริหารวางแผนได้ยาก นี่จึงเป็นที่มาของโครงการนี้ครับ</a:t>
             </a:r>
           </a:p>
         </p:txBody>
@@ -966,28 +974,12 @@
           <a:lstStyle/>
           <a:p>
             <a:r>
-              <a:t>สคริปต์บทพูดหน้าที่ 3 : วิสัยทัศน์และวัตถุประสงค์ (1.5 นาที):</a:t>
-            </a:r>
-          </a:p>
-          <a:p>
-            <a:r>
-              <a:t>วิสัยทัศน์ของโครงการคือ 'เปลี่ยนผ่านสู่ รถนำเที่ยวไฟฟ้า (EV) เพื่อพลังงานสะอาด พร้อมยกระดับสู่ Smart Tourism Ecosystem อย่างครบวงจร'</a:t>
-            </a:r>
-          </a:p>
-          <a:p/>
-          <a:p>
-            <a:r>
-              <a:t>โดยกำหนด 2 วัตถุประสงค์หลัก:</a:t>
-            </a:r>
-          </a:p>
-          <a:p>
-            <a:r>
-              <a:t>1. ออกแบบระบบ (System Design): วิเคราะห์และออกแบบระบบจัดการข้อมูลสารสนเทศรถนำเที่ยวไฟฟ้า เพื่อการบริหารจัดการเชิงพื้นที่ที่แม่นยำและมีประสิทธิภาพสูงสุด</a:t>
-            </a:r>
-          </a:p>
-          <a:p>
-            <a:r>
-              <a:t>2. พัฒนาแพลตฟอร์ม (App Development): พัฒนาแอปพลิเคชันเพื่อเพิ่มความสะดวกสบายแบบไร้รอยต่อ (Seamless Experience) ให้แก่นักท่องเที่ยว เจ้าหน้าที่ และผู้บริหารครับ</a:t>
+              <a:t>สคริปต์พูดหน้าที่ 3 : วิสัยทัศน์และวัตถุประสงค์ (1.5 นาที):</a:t>
+            </a:r>
+          </a:p>
+          <a:p>
+            <a:r>
+              <a:t>วิสัยทัศน์คือเปลี่ยนผ่านสู่รถนำเที่ยวไฟฟ้า EV 100% พร้อมสร้าง Smart Tourism Ecosystem อย่างครบวงจร โดยมี 2 วัตถุประสงค์หลัก คือ 1. ออกแบบระบบสารสนเทศ และ 2. พัฒนาแอปพลิเคชันจัดการรถนำเที่ยวครบวงจร ภาพทางขวามือคือตัวรถ EV จริงที่เปิดโล่งสัมผัสธรรมชาติ ไร้ควัน ไร้เสียง พร้อมติดตั้งแท็บเล็ตดิจิทัลครับ</a:t>
             </a:r>
           </a:p>
         </p:txBody>
@@ -1057,32 +1049,12 @@
           <a:lstStyle/>
           <a:p>
             <a:r>
-              <a:t>สคริปต์บทพูดหน้าที่ 4 : ภาพรวมสถาปัตยกรรมระบบ (1.5 นาที):</a:t>
-            </a:r>
-          </a:p>
-          <a:p>
-            <a:r>
-              <a:t>เราได้วางสถาปัตยกรรมระบบเป็น 4 ชั้น (4-Tier Architecture) ตามมาตรฐานสากล:</a:t>
-            </a:r>
-          </a:p>
-          <a:p>
-            <a:r>
-              <a:t>- ชั้นที่ 1 Frontend / ช่องทางลูกค้า: รองรับ Web App (จองออนไลน์), Mobile App (iOS/Android), ตู้ Kiosk ประจำสถานี และ Driver App บนแท็บเล็ตคนขับ</a:t>
-            </a:r>
-          </a:p>
-          <a:p>
-            <a:r>
-              <a:t>- ชั้นที่ 2 API Gateway &amp; Backend Services: แยกบริการอย่างเป็นสัดส่วน ทั้ง Ticket Service, Bus Tracking, Station Service สำหรับ 6 สถานี และ Payment Service</a:t>
-            </a:r>
-          </a:p>
-          <a:p>
-            <a:r>
-              <a:t>- ชั้นที่ 3 Realtime &amp; IoT Layer: เชื่อมโยงอุปกรณ์ GPS บนรถ EV ทั้ง 3 คัน ส่งพิกัดผ่าน WebSocket ทุก 5 วินาที พร้อมระบบ QR/RFID Scanner</a:t>
-            </a:r>
-          </a:p>
-          <a:p>
-            <a:r>
-              <a:t>- ชั้นที่ 4 Database &amp; Storage: ใช้ PostgreSQL เป็นฐานข้อมูลหลัก และใช้ TimescaleDB สำหรับจัดเก็บพิกัด Time-series GPS นับล้านเรคคอร์ดได้อย่างรวดเร็วครับ</a:t>
+              <a:t>สคริปต์พูดหน้าที่ 4 : สถาปัตยกรรมระบบ 4 ชั้น (1.5 นาที):</a:t>
+            </a:r>
+          </a:p>
+          <a:p>
+            <a:r>
+              <a:t>เราออกแบบระบบเป็น 4 ชั้น: Layer 1 Frontend รองรับ Web, Mobile, Kiosk และแท็บเล็ตคนขับ Layer 2 Backend แยก Microservices ชัดเจน Layer 3 Realtime &amp; IoT สตรีมพิกัด GPS จากรถ 3 คัน ทุก 5 วินาที และ Layer 4 Data แยก PostgreSQL และ TimescaleDB สำหรับ Big Data พิกัด GPS ครับ</a:t>
             </a:r>
           </a:p>
         </p:txBody>
@@ -1152,32 +1124,12 @@
           <a:lstStyle/>
           <a:p>
             <a:r>
-              <a:t>สคริปต์บทพูดหน้าที่ 5 : ประสบการณ์การซื้อตั๋วอัจฉริยะ (1.5 นาที):</a:t>
-            </a:r>
-          </a:p>
-          <a:p>
-            <a:r>
-              <a:t>ระบบจำหน่ายตั๋ว e-Ticket แบ่งเป็น 4 ขั้นตอนที่สะดวกและปลอดภัย:</a:t>
-            </a:r>
-          </a:p>
-          <a:p>
-            <a:r>
-              <a:t>1. เลือกและซื้อ (Select): นักท่องเที่ยวเลือกประเภทตั๋วผ่าน Web, Mobile App หรือกดซื้อที่ตู้ Kiosk หน้าสถานี</a:t>
-            </a:r>
-          </a:p>
-          <a:p>
-            <a:r>
-              <a:t>2. ชำระเงิน (Pay): รองรับ QR PromptPay ตามมาตรฐาน EMVCo ทุกธนาคาร, บัตรเครดิต หรือเงินสดที่ Kiosk</a:t>
-            </a:r>
-          </a:p>
-          <a:p>
-            <a:r>
-              <a:t>3. ออก e-Ticket (Receive): ระบบสร้าง One-Time QR Code ส่งเข้า App, SMS หรือสลิปพิมพ์ พร้อมบันทึกสถานะ 'ยังไม่ใช้'</a:t>
-            </a:r>
-          </a:p>
-          <a:p>
-            <a:r>
-              <a:t>4. สแกนขึ้นรถ (Ride): คนขับใช้แท็บเล็ตประจำรถสแกน QR Code ตรวจสอบสิทธิ์ใน 1 วินาที ตัดสิทธิ์เป็น 'ใช้แล้ว' ทันที ป้องกันการนำกลับมาใช้ซ้ำ 100% ครับ</a:t>
+              <a:t>สคริปต์พูดหน้าที่ 5 : e-Ticket Flow 5 ขั้นตอน (1.5 นาที):</a:t>
+            </a:r>
+          </a:p>
+          <a:p>
+            <a:r>
+              <a:t>กระบวนการซื้อตั๋ว 5 ขั้นตอน: 1. เลือกซื้อตั๋วผ่านแอป/เว็บ/Kiosk 2. ชำระเงินผ่าน PromptPay QR EMVCo 3. ระบบสร้าง One-Time QR Code 4. ผู้โดยสารเปิดตั๋วบนมือถือ และ 5. สแกน Check-in บนรถ คนขับใช้แท็บเล็ตตรวจ 1 วินาที ตัดสิทธิ์ทันที ป้องกันการนำกลับมาใช้ซ้ำ 100% ครับ</a:t>
             </a:r>
           </a:p>
         </p:txBody>
@@ -1247,27 +1199,12 @@
           <a:lstStyle/>
           <a:p>
             <a:r>
-              <a:t>สคริปต์บทพูดหน้าที่ 6 : ระบบติดตามรถและสถานีวนลูป (1.5 นาที):</a:t>
-            </a:r>
-          </a:p>
-          <a:p>
-            <a:r>
-              <a:t>การเดินรถจัดเป็น Loop วนรอบ 6 สถานีหลัก ครอบคลุมไฮไลต์ของสวนฯ ทั้งหมด:</a:t>
-            </a:r>
-          </a:p>
-          <a:p>
-            <a:r>
-              <a:t>- IoT GPS: ติดตั้งบนรถนำเที่ยวทั้ง 3 คัน ส่งพิกัดตำแหน่งเข้า Backend ทุกๆ 5 วินาทีผ่าน WebSocket</a:t>
-            </a:r>
-          </a:p>
-          <a:p>
-            <a:r>
-              <a:t>- Location Engine &amp; Geofencing: มีรั้วพิกัดเสมือนรอบสถานี ตรวจจับเมื่อรถเข้าจอดหรือออกจากสถานีอัตโนมัติ</a:t>
-            </a:r>
-          </a:p>
-          <a:p>
-            <a:r>
-              <a:t>- Dynamic ETA Calculator: คำนวณความเร็วและระยะทาง ประเมินเวลารถจะมาถึงแต่ละสถานีแบบเรียลไทม์ เช่น หน้าจอบอกว่าอีก 3 นาทีหรือ 8 นาทีรถจะมาถึง ทำให้นักท่องเที่ยววางแผนเวลาได้ ไม่ต้องยืนรออย่างไร้จุดหมายครับ</a:t>
+              <a:t>สคริปต์พูดหน้าที่ 6 : Payment Gateway Integration Flow (1.5 นาที):</a:t>
+            </a:r>
+          </a:p>
+          <a:p>
+            <a:r>
+              <a:t>สถาปัตยกรรมชำระเงินเชื่อมต่อ Gateway ชั้นนำ (Omise/2C2P) รองรับ PromptPay QR จุดสำคัญคือระบบ Webhook Callback ตรวจสอบ Digital Signature ป้องกัน Fake Order และมีกฎ 10-Minute Auto-Expiry หากไม่ชำระใน 10 นาที ระบบจะตัดคำสั่งซื้อและคืนที่นั่งให้ผู้อื่นทันทีครับ</a:t>
             </a:r>
           </a:p>
         </p:txBody>
@@ -1337,22 +1274,12 @@
           <a:lstStyle/>
           <a:p>
             <a:r>
-              <a:t>สคริปต์บทพูดหน้าที่ 7 : การบริหารจัดการคิวอัจฉริยะ (1.0 นาที):</a:t>
-            </a:r>
-          </a:p>
-          <a:p>
-            <a:r>
-              <a:t>ระบบบริหารคิวมี 2 กลไกสำคัญ:</a:t>
-            </a:r>
-          </a:p>
-          <a:p>
-            <a:r>
-              <a:t>1. Smart Queue Balancing &amp; Seat Capacity: คำนวณจำนวนที่นั่งว่างบนรถเทียบกับคิวรอในแต่ละสถานี หากพบจุดใดมีผู้โดยสารตกค้างสะสม ระบบจะแจ้งเตือนให้จัดรถเสริมไปรับทันที</a:t>
-            </a:r>
-          </a:p>
-          <a:p>
-            <a:r>
-              <a:t>2. Proactive Push Notification: นักท่องเที่ยวสามารถเดินชมธรรมชาติ ถ่ายรูป หรือจิบกาแฟได้อย่างสบายใจ เพราะระบบจะส่ง Push Notification ผ่าน Mobile App หรือ LINE เตือนล่วงหน้าเมื่อรถใกล้ถึงสถานีในระยะ 3 นาทีครับ</a:t>
+              <a:t>สคริปต์พูดหน้าที่ 7 : ระบบติดตามรถและสถานีวนลูป (1.5 นาที):</a:t>
+            </a:r>
+          </a:p>
+          <a:p>
+            <a:r>
+              <a:t>เราจัดเดินรถวนลูป 6 สถานีหลัก รถ EV ทั้ง 3 คันมีแท็บเล็ตติดตั้งในห้องโดยสาร (ดังภาพจริงขวามือ) ส่งพิกัด GPS ทุก 5 วินาที มีระบบ Geofencing รับรู้การเข้าออกสถานี และ Dynamic ETA คำนวณเวลาถึงสถานีแบบสดๆ นักท่องเที่ยวจึงวางแผนเวลาได้ ไม่ต้องยืนรออย่างไร้จุดหมายครับ</a:t>
             </a:r>
           </a:p>
         </p:txBody>
@@ -1422,22 +1349,12 @@
           <a:lstStyle/>
           <a:p>
             <a:r>
-              <a:t>สคริปต์บทพูดหน้าที่ 8 : ระบบแนะนำแหล่งท่องเที่ยวตามพิกัด (1.0 นาที):</a:t>
-            </a:r>
-          </a:p>
-          <a:p>
-            <a:r>
-              <a:t>เพื่อส่งเสริมการเป็นแหล่งเรียนรู้พฤกษศาสตร์ เราได้นำเทคโนโลยี Geofence Virtual Beacon มาประยุกต์ใช้:</a:t>
-            </a:r>
-          </a:p>
-          <a:p>
-            <a:r>
-              <a:t>- เมื่อรถหรือนักท่องเที่ยวเดินทางเข้าสู่รั้วพิกัดของจุดท่องเที่ยวสำคัญ เช่น Canopy Walkway หรือเรือนกระจก ระบบจะส่งข้อมูล แนะนำพันธุ์ไม้เด่น และประวัติความเป็นมาเด้งขึ้นบนมือถืออัตโนมัติ</a:t>
-            </a:r>
-          </a:p>
-          <a:p>
-            <a:r>
-              <a:t>- พร้อมระบบ Audio Guide เปิดเสียงบรรยายให้นักท่องเที่ยวรับฟัง เสมือนมีมัคคุเทศก์ส่วนตัวคอยนำทางตลอดเส้นทางครับ</a:t>
+              <a:t>สคริปต์พูดหน้าที่ 8 : การบริหารคิวอัจฉริยะและการแจ้งเตือน (1.0 นาที):</a:t>
+            </a:r>
+          </a:p>
+          <a:p>
+            <a:r>
+              <a:t>ระบบมี Smart Queue Balancing คำนวณที่นั่งว่างเทียบกับคิวรอ หากสถานีไหนคนแน่นจะแจ้งเตือนให้จัดรถเสริมทันที และมี Proactive Push Notification แจ้งเตือนเตือนล่วงหน้าเมื่อรถใกล้ถึงสถานีในระยะ 3 นาที นักท่องเที่ยวจึงเดินชมพรรณไม้ ถ่ายรูป หรือจิบกาแฟได้อย่างสบายใจครับ</a:t>
             </a:r>
           </a:p>
         </p:txBody>
@@ -1507,32 +1424,12 @@
           <a:lstStyle/>
           <a:p>
             <a:r>
-              <a:t>สคริปต์บทพูดหน้าที่ 9 : เทคโนโลยีที่เลือกใช้ (1.5 นาที):</a:t>
-            </a:r>
-          </a:p>
-          <a:p>
-            <a:r>
-              <a:t>เราเลือกใช้ Technology Stack ระดับ Enterprise:</a:t>
-            </a:r>
-          </a:p>
-          <a:p>
-            <a:r>
-              <a:t>- Frontend: Next.js สำหรับ Web &amp; Admin Dashboard และ React Native สำหรับ Mobile App และ Driver App</a:t>
-            </a:r>
-          </a:p>
-          <a:p>
-            <a:r>
-              <a:t>- Backend: Node.js + Fastify Throughput สูง กินทรัพยากรต่ำ, Socket.io Server สำหรับสตรีมพิกัด GPS, Bull Queue สำหรับงานเบื้องหลัง และ JWT สำหรับความปลอดภัย</a:t>
-            </a:r>
-          </a:p>
-          <a:p>
-            <a:r>
-              <a:t>- Database: PostgreSQL, Redis Cache และ TimescaleDB สำหรับ Big Data พิกัด GPS</a:t>
-            </a:r>
-          </a:p>
-          <a:p>
-            <a:r>
-              <a:t>- Infrastructure: Docker / Kubernetes ติดตั้งบน AWS / GCP Cloud การันตี Uptime 99.9% พร้อม CI/CD GitHub Actions ครับ</a:t>
+              <a:t>สคริปต์พูดหน้าที่ 9 : ระบบแนะนำแหล่งท่องเที่ยวตามพิกัด (1.0 นาที):</a:t>
+            </a:r>
+          </a:p>
+          <a:p>
+            <a:r>
+              <a:t>เราใช้ Geofencing สร้างรั้วพิกัดเสมือนรอบแลนด์มาร์ก เช่น Canopy Walkway หรือกลุ่มเรือนกระจก เมื่อรถหรือนักท่องเที่ยวเข้าสู่พื้นที่ ข้อมูลแนะนำพันธุ์ไม้เด่น ประวัติความเป็นมา และ Audio Guide จะเด้งขึ้นบนมือถืออัตโนมัติ เสมือนมีมัคคุเทศก์ส่วนตัวตลอดเส้นทางครับ</a:t>
             </a:r>
           </a:p>
         </p:txBody>
@@ -4540,7 +4437,7 @@
       <p:grpSpPr/>
       <p:pic>
         <p:nvPicPr>
-          <p:cNvPr id="2" name="Picture 1" descr="slide_01.jpg"/>
+          <p:cNvPr id="2" name="Picture 1" descr="dark_topographic_bg.jpg"/>
           <p:cNvPicPr>
             <a:picLocks noChangeAspect="1"/>
           </p:cNvPicPr>
@@ -4562,6 +4459,247 @@
           </a:prstGeom>
         </p:spPr>
       </p:pic>
+      <p:sp>
+        <p:nvSpPr>
+          <p:cNvPr id="3" name="Rounded Rectangle 2"/>
+          <p:cNvSpPr/>
+          <p:nvPr/>
+        </p:nvSpPr>
+        <p:spPr>
+          <a:xfrm>
+            <a:off x="731520" y="731520"/>
+            <a:ext cx="6217920" cy="5394960"/>
+          </a:xfrm>
+          <a:prstGeom prst="roundRect">
+            <a:avLst/>
+          </a:prstGeom>
+          <a:solidFill>
+            <a:srgbClr val="0E261C"/>
+          </a:solidFill>
+          <a:ln w="19050">
+            <a:solidFill>
+              <a:srgbClr val="52B788"/>
+            </a:solidFill>
+          </a:ln>
+        </p:spPr>
+        <p:style>
+          <a:lnRef idx="1">
+            <a:schemeClr val="accent1"/>
+          </a:lnRef>
+          <a:fillRef idx="3">
+            <a:schemeClr val="accent1"/>
+          </a:fillRef>
+          <a:effectRef idx="2">
+            <a:schemeClr val="accent1"/>
+          </a:effectRef>
+          <a:fontRef idx="minor">
+            <a:schemeClr val="lt1"/>
+          </a:fontRef>
+        </p:style>
+        <p:txBody>
+          <a:bodyPr rtlCol="0" anchor="ctr" wrap="square" lIns="365760" rIns="365760" tIns="365760"/>
+          <a:lstStyle/>
+          <a:p>
+            <a:pPr algn="ctr">
+              <a:spcAft>
+                <a:spcPts val="1600"/>
+              </a:spcAft>
+              <a:defRPr sz="1200" b="1">
+                <a:solidFill>
+                  <a:srgbClr val="6EE7B7"/>
+                </a:solidFill>
+                <a:latin typeface="Prompt"/>
+              </a:defRPr>
+            </a:pPr>
+            <a:r>
+              <a:t>SMART &amp; GREEN BOTANICAL GARDEN | QSBG INNOVATION</a:t>
+            </a:r>
+          </a:p>
+          <a:p>
+            <a:pPr>
+              <a:spcAft>
+                <a:spcPts val="1000"/>
+              </a:spcAft>
+              <a:defRPr sz="3200" b="1">
+                <a:solidFill>
+                  <a:srgbClr val="FFFFFF"/>
+                </a:solidFill>
+                <a:latin typeface="Prompt"/>
+              </a:defRPr>
+            </a:pPr>
+            <a:r>
+              <a:t>Smart Electric Tour Bus</a:t>
+            </a:r>
+            <a:br/>
+            <a:r>
+              <a:t>Management System Design</a:t>
+            </a:r>
+          </a:p>
+          <a:p>
+            <a:pPr>
+              <a:spcAft>
+                <a:spcPts val="1400"/>
+              </a:spcAft>
+              <a:defRPr sz="1600" b="1">
+                <a:solidFill>
+                  <a:srgbClr val="A7F3D0"/>
+                </a:solidFill>
+                <a:latin typeface="Prompt"/>
+              </a:defRPr>
+            </a:pPr>
+            <a:r>
+              <a:t>ยกระดับการท่องเที่ยวสีเขียวสู่อัจฉริยะ เพื่อสวนพฤกษศาสตร์ระดับโลก</a:t>
+            </a:r>
+          </a:p>
+          <a:p>
+            <a:pPr>
+              <a:spcAft>
+                <a:spcPts val="1800"/>
+              </a:spcAft>
+              <a:defRPr sz="1300">
+                <a:solidFill>
+                  <a:srgbClr val="E2E8F0"/>
+                </a:solidFill>
+                <a:latin typeface="Sarabun"/>
+              </a:defRPr>
+            </a:pPr>
+            <a:r>
+              <a:t>การผสานสองหัวใจสำคัญ: ยานยนต์ไฟฟ้า (EV 100%) พลังงานสะอาด ไร้ควัน ไร้เสียง ควบคู่กับ Smart Tourism Platform (e-Ticket, Live GPS Tracking, Smart Queue Balancing และ Real-time Analytics) สวนพฤกษศาสตร์สมเด็จพระนางเจ้าสิริกิติ์ จังหวัดเชียงใหม่</a:t>
+            </a:r>
+          </a:p>
+          <a:p>
+            <a:pPr>
+              <a:defRPr sz="1200" b="1">
+                <a:solidFill>
+                  <a:srgbClr val="F59E0B"/>
+                </a:solidFill>
+                <a:latin typeface="Prompt"/>
+              </a:defRPr>
+            </a:pPr>
+            <a:r>
+              <a:t>แผนพัฒนา 3 ระยะ (9 เดือน)  |  Zero Emission 100%  |  พื้นที่ 6,500 ไร่</a:t>
+            </a:r>
+          </a:p>
+        </p:txBody>
+      </p:sp>
+      <p:sp>
+        <p:nvSpPr>
+          <p:cNvPr id="4" name="Rounded Rectangle 3"/>
+          <p:cNvSpPr/>
+          <p:nvPr/>
+        </p:nvSpPr>
+        <p:spPr>
+          <a:xfrm>
+            <a:off x="7132320" y="731520"/>
+            <a:ext cx="4327855" cy="5394960"/>
+          </a:xfrm>
+          <a:prstGeom prst="roundRect">
+            <a:avLst/>
+          </a:prstGeom>
+          <a:solidFill>
+            <a:srgbClr val="0E261C"/>
+          </a:solidFill>
+          <a:ln w="19050">
+            <a:solidFill>
+              <a:srgbClr val="52B788"/>
+            </a:solidFill>
+          </a:ln>
+        </p:spPr>
+        <p:style>
+          <a:lnRef idx="1">
+            <a:schemeClr val="accent1"/>
+          </a:lnRef>
+          <a:fillRef idx="3">
+            <a:schemeClr val="accent1"/>
+          </a:fillRef>
+          <a:effectRef idx="2">
+            <a:schemeClr val="accent1"/>
+          </a:effectRef>
+          <a:fontRef idx="minor">
+            <a:schemeClr val="lt1"/>
+          </a:fontRef>
+        </p:style>
+        <p:txBody>
+          <a:bodyPr rtlCol="0" anchor="ctr"/>
+          <a:lstStyle/>
+          <a:p>
+            <a:pPr algn="ctr"/>
+          </a:p>
+        </p:txBody>
+      </p:sp>
+      <p:pic>
+        <p:nvPicPr>
+          <p:cNvPr id="5" name="Picture 4" descr="ev_fleet_3_carts.jpg"/>
+          <p:cNvPicPr>
+            <a:picLocks noChangeAspect="1"/>
+          </p:cNvPicPr>
+          <p:nvPr/>
+        </p:nvPicPr>
+        <p:blipFill>
+          <a:blip r:embed="rId3"/>
+          <a:stretch>
+            <a:fillRect/>
+          </a:stretch>
+        </p:blipFill>
+        <p:spPr>
+          <a:xfrm>
+            <a:off x="7315200" y="1005840"/>
+            <a:ext cx="3962095" cy="3840480"/>
+          </a:xfrm>
+          <a:prstGeom prst="rect">
+            <a:avLst/>
+          </a:prstGeom>
+        </p:spPr>
+      </p:pic>
+      <p:sp>
+        <p:nvSpPr>
+          <p:cNvPr id="6" name="TextBox 5"/>
+          <p:cNvSpPr txBox="1"/>
+          <p:nvPr/>
+        </p:nvSpPr>
+        <p:spPr>
+          <a:xfrm>
+            <a:off x="7315200" y="4937760"/>
+            <a:ext cx="3962095" cy="1005840"/>
+          </a:xfrm>
+          <a:prstGeom prst="rect">
+            <a:avLst/>
+          </a:prstGeom>
+          <a:noFill/>
+        </p:spPr>
+        <p:txBody>
+          <a:bodyPr wrap="square" lIns="0" rIns="0" tIns="0" bIns="0">
+            <a:spAutoFit/>
+          </a:bodyPr>
+          <a:lstStyle/>
+          <a:p>
+            <a:pPr>
+              <a:defRPr sz="1300" b="1">
+                <a:solidFill>
+                  <a:srgbClr val="6EE7B7"/>
+                </a:solidFill>
+                <a:latin typeface="Prompt"/>
+              </a:defRPr>
+            </a:pPr>
+            <a:r>
+              <a:t>ยานพาหนะจริงประจำโครงการ:</a:t>
+            </a:r>
+          </a:p>
+          <a:p>
+            <a:pPr>
+              <a:defRPr sz="1200">
+                <a:solidFill>
+                  <a:srgbClr val="E2E8F0"/>
+                </a:solidFill>
+                <a:latin typeface="Sarabun"/>
+              </a:defRPr>
+            </a:pPr>
+            <a:r>
+              <a:t>รถนำเที่ยวไฟฟ้า 3 คัน ให้บริการวนรอบ 6 สถานีหลัก ในพื้นที่สวนพฤกษศาสตร์ฯ 6,500 ไร่</a:t>
+            </a:r>
+          </a:p>
+        </p:txBody>
+      </p:sp>
     </p:spTree>
   </p:cSld>
   <p:clrMapOvr>
@@ -4582,7 +4720,7 @@
       <p:grpSpPr/>
       <p:pic>
         <p:nvPicPr>
-          <p:cNvPr id="2" name="Picture 1" descr="slide_10.jpg"/>
+          <p:cNvPr id="2" name="Picture 1" descr="dark_topographic_bg.jpg"/>
           <p:cNvPicPr>
             <a:picLocks noChangeAspect="1"/>
           </p:cNvPicPr>
@@ -4604,6 +4742,537 @@
           </a:prstGeom>
         </p:spPr>
       </p:pic>
+      <p:sp>
+        <p:nvSpPr>
+          <p:cNvPr id="3" name="Rounded Rectangle 2"/>
+          <p:cNvSpPr/>
+          <p:nvPr/>
+        </p:nvSpPr>
+        <p:spPr>
+          <a:xfrm>
+            <a:off x="731520" y="365760"/>
+            <a:ext cx="3200400" cy="320040"/>
+          </a:xfrm>
+          <a:prstGeom prst="roundRect">
+            <a:avLst/>
+          </a:prstGeom>
+          <a:solidFill>
+            <a:srgbClr val="123024"/>
+          </a:solidFill>
+          <a:ln w="12700">
+            <a:solidFill>
+              <a:srgbClr val="52B788"/>
+            </a:solidFill>
+          </a:ln>
+        </p:spPr>
+        <p:style>
+          <a:lnRef idx="1">
+            <a:schemeClr val="accent1"/>
+          </a:lnRef>
+          <a:fillRef idx="3">
+            <a:schemeClr val="accent1"/>
+          </a:fillRef>
+          <a:effectRef idx="2">
+            <a:schemeClr val="accent1"/>
+          </a:effectRef>
+          <a:fontRef idx="minor">
+            <a:schemeClr val="lt1"/>
+          </a:fontRef>
+        </p:style>
+        <p:txBody>
+          <a:bodyPr rtlCol="0" anchor="ctr" wrap="square" lIns="0" rIns="0" tIns="0" bIns="0"/>
+          <a:lstStyle/>
+          <a:p>
+            <a:pPr algn="ctr">
+              <a:defRPr sz="1100" b="1">
+                <a:solidFill>
+                  <a:srgbClr val="6EE7B7"/>
+                </a:solidFill>
+                <a:latin typeface="Prompt"/>
+              </a:defRPr>
+            </a:pPr>
+            <a:r>
+              <a:t>TECHNOLOGY</a:t>
+            </a:r>
+          </a:p>
+        </p:txBody>
+      </p:sp>
+      <p:sp>
+        <p:nvSpPr>
+          <p:cNvPr id="4" name="TextBox 3"/>
+          <p:cNvSpPr txBox="1"/>
+          <p:nvPr/>
+        </p:nvSpPr>
+        <p:spPr>
+          <a:xfrm>
+            <a:off x="731520" y="685800"/>
+            <a:ext cx="10728655" cy="868680"/>
+          </a:xfrm>
+          <a:prstGeom prst="rect">
+            <a:avLst/>
+          </a:prstGeom>
+          <a:noFill/>
+        </p:spPr>
+        <p:txBody>
+          <a:bodyPr wrap="square" lIns="0" rIns="0" tIns="0" bIns="0">
+            <a:spAutoFit/>
+          </a:bodyPr>
+          <a:lstStyle/>
+          <a:p>
+            <a:pPr>
+              <a:spcAft>
+                <a:spcPts val="300"/>
+              </a:spcAft>
+              <a:defRPr sz="2600" b="1">
+                <a:solidFill>
+                  <a:srgbClr val="FFFFFF"/>
+                </a:solidFill>
+                <a:latin typeface="Prompt"/>
+              </a:defRPr>
+            </a:pPr>
+            <a:r>
+              <a:t>เทคโนโลยีและโครงสร้างพื้นฐาน (Technology Stack)</a:t>
+            </a:r>
+          </a:p>
+          <a:p>
+            <a:pPr>
+              <a:defRPr sz="1400">
+                <a:solidFill>
+                  <a:srgbClr val="A7F3D0"/>
+                </a:solidFill>
+                <a:latin typeface="Sarabun"/>
+              </a:defRPr>
+            </a:pPr>
+            <a:r>
+              <a:t>คัดเลือกเทคโนโลยีระดับ Enterprise เพื่อความรวดเร็ว เสถียร และรองรับการขยายตัว</a:t>
+            </a:r>
+          </a:p>
+        </p:txBody>
+      </p:sp>
+      <p:sp>
+        <p:nvSpPr>
+          <p:cNvPr id="5" name="Rounded Rectangle 4"/>
+          <p:cNvSpPr/>
+          <p:nvPr/>
+        </p:nvSpPr>
+        <p:spPr>
+          <a:xfrm>
+            <a:off x="731520" y="1691640"/>
+            <a:ext cx="5257800" cy="2148840"/>
+          </a:xfrm>
+          <a:prstGeom prst="roundRect">
+            <a:avLst/>
+          </a:prstGeom>
+          <a:solidFill>
+            <a:srgbClr val="0E261C"/>
+          </a:solidFill>
+          <a:ln w="19050">
+            <a:solidFill>
+              <a:srgbClr val="52B788"/>
+            </a:solidFill>
+          </a:ln>
+        </p:spPr>
+        <p:style>
+          <a:lnRef idx="1">
+            <a:schemeClr val="accent1"/>
+          </a:lnRef>
+          <a:fillRef idx="3">
+            <a:schemeClr val="accent1"/>
+          </a:fillRef>
+          <a:effectRef idx="2">
+            <a:schemeClr val="accent1"/>
+          </a:effectRef>
+          <a:fontRef idx="minor">
+            <a:schemeClr val="lt1"/>
+          </a:fontRef>
+        </p:style>
+        <p:txBody>
+          <a:bodyPr rtlCol="0" anchor="ctr" wrap="square" lIns="256032" rIns="256032" tIns="182880"/>
+          <a:lstStyle/>
+          <a:p>
+            <a:pPr algn="ctr">
+              <a:spcAft>
+                <a:spcPts val="800"/>
+              </a:spcAft>
+              <a:defRPr sz="1700" b="1">
+                <a:solidFill>
+                  <a:srgbClr val="6EE7B7"/>
+                </a:solidFill>
+                <a:latin typeface="Prompt"/>
+              </a:defRPr>
+            </a:pPr>
+            <a:r>
+              <a:t>Frontend &amp; Mobile</a:t>
+            </a:r>
+          </a:p>
+          <a:p>
+            <a:pPr>
+              <a:spcAft>
+                <a:spcPts val="400"/>
+              </a:spcAft>
+              <a:defRPr sz="1200">
+                <a:solidFill>
+                  <a:srgbClr val="E2E8F0"/>
+                </a:solidFill>
+                <a:latin typeface="Sarabun"/>
+              </a:defRPr>
+            </a:pPr>
+            <a:r>
+              <a:t>• Next.js: เว็บแอปและ Admin Dashboard โหลดเร็ว รองรับ SEO และจัดการง่าย</a:t>
+            </a:r>
+          </a:p>
+          <a:p>
+            <a:pPr>
+              <a:spcAft>
+                <a:spcPts val="400"/>
+              </a:spcAft>
+              <a:defRPr sz="1200">
+                <a:solidFill>
+                  <a:srgbClr val="E2E8F0"/>
+                </a:solidFill>
+                <a:latin typeface="Sarabun"/>
+              </a:defRPr>
+            </a:pPr>
+            <a:r>
+              <a:t>• React Native: Mobile App (iOS / Android) และ Driver App ประสิทธิภาพสูง</a:t>
+            </a:r>
+          </a:p>
+          <a:p>
+            <a:pPr>
+              <a:spcAft>
+                <a:spcPts val="400"/>
+              </a:spcAft>
+              <a:defRPr sz="1200">
+                <a:solidFill>
+                  <a:srgbClr val="E2E8F0"/>
+                </a:solidFill>
+                <a:latin typeface="Sarabun"/>
+              </a:defRPr>
+            </a:pPr>
+            <a:r>
+              <a:t>• Tailwind CSS: UI โมเดิร์น Responsive รองรับทุกขนาดหน้าจออย่างสวยงาม</a:t>
+            </a:r>
+          </a:p>
+        </p:txBody>
+      </p:sp>
+      <p:sp>
+        <p:nvSpPr>
+          <p:cNvPr id="6" name="Rounded Rectangle 5"/>
+          <p:cNvSpPr/>
+          <p:nvPr/>
+        </p:nvSpPr>
+        <p:spPr>
+          <a:xfrm>
+            <a:off x="6199632" y="1691640"/>
+            <a:ext cx="5257800" cy="2148840"/>
+          </a:xfrm>
+          <a:prstGeom prst="roundRect">
+            <a:avLst/>
+          </a:prstGeom>
+          <a:solidFill>
+            <a:srgbClr val="0E261C"/>
+          </a:solidFill>
+          <a:ln w="19050">
+            <a:solidFill>
+              <a:srgbClr val="52B788"/>
+            </a:solidFill>
+          </a:ln>
+        </p:spPr>
+        <p:style>
+          <a:lnRef idx="1">
+            <a:schemeClr val="accent1"/>
+          </a:lnRef>
+          <a:fillRef idx="3">
+            <a:schemeClr val="accent1"/>
+          </a:fillRef>
+          <a:effectRef idx="2">
+            <a:schemeClr val="accent1"/>
+          </a:effectRef>
+          <a:fontRef idx="minor">
+            <a:schemeClr val="lt1"/>
+          </a:fontRef>
+        </p:style>
+        <p:txBody>
+          <a:bodyPr rtlCol="0" anchor="ctr" wrap="square" lIns="256032" rIns="256032" tIns="182880"/>
+          <a:lstStyle/>
+          <a:p>
+            <a:pPr algn="ctr">
+              <a:spcAft>
+                <a:spcPts val="800"/>
+              </a:spcAft>
+              <a:defRPr sz="1700" b="1">
+                <a:solidFill>
+                  <a:srgbClr val="6EE7B7"/>
+                </a:solidFill>
+                <a:latin typeface="Prompt"/>
+              </a:defRPr>
+            </a:pPr>
+            <a:r>
+              <a:t>Backend &amp; Streaming</a:t>
+            </a:r>
+          </a:p>
+          <a:p>
+            <a:pPr>
+              <a:spcAft>
+                <a:spcPts val="400"/>
+              </a:spcAft>
+              <a:defRPr sz="1200">
+                <a:solidFill>
+                  <a:srgbClr val="E2E8F0"/>
+                </a:solidFill>
+                <a:latin typeface="Sarabun"/>
+              </a:defRPr>
+            </a:pPr>
+            <a:r>
+              <a:t>• Node.js + Fastify: API Server ประสิทธิภาพสูง Throughput ระดับสูง กินทรัพยากรต่ำ</a:t>
+            </a:r>
+          </a:p>
+          <a:p>
+            <a:pPr>
+              <a:spcAft>
+                <a:spcPts val="400"/>
+              </a:spcAft>
+              <a:defRPr sz="1200">
+                <a:solidFill>
+                  <a:srgbClr val="E2E8F0"/>
+                </a:solidFill>
+                <a:latin typeface="Sarabun"/>
+              </a:defRPr>
+            </a:pPr>
+            <a:r>
+              <a:t>• Socket.io Server: Real-time Two-way Streaming สำหรับพิกัด GPS และคิวรถ</a:t>
+            </a:r>
+          </a:p>
+          <a:p>
+            <a:pPr>
+              <a:spcAft>
+                <a:spcPts val="400"/>
+              </a:spcAft>
+              <a:defRPr sz="1200">
+                <a:solidFill>
+                  <a:srgbClr val="E2E8F0"/>
+                </a:solidFill>
+                <a:latin typeface="Sarabun"/>
+              </a:defRPr>
+            </a:pPr>
+            <a:r>
+              <a:t>• Bull Queue &amp; JWT: จัดการคิวงานเบื้องหลังและการยืนยันสิทธิ์ความปลอดภัยสูงสุด</a:t>
+            </a:r>
+          </a:p>
+        </p:txBody>
+      </p:sp>
+      <p:sp>
+        <p:nvSpPr>
+          <p:cNvPr id="7" name="Rounded Rectangle 6"/>
+          <p:cNvSpPr/>
+          <p:nvPr/>
+        </p:nvSpPr>
+        <p:spPr>
+          <a:xfrm>
+            <a:off x="731520" y="4023360"/>
+            <a:ext cx="5257800" cy="2148840"/>
+          </a:xfrm>
+          <a:prstGeom prst="roundRect">
+            <a:avLst/>
+          </a:prstGeom>
+          <a:solidFill>
+            <a:srgbClr val="0E261C"/>
+          </a:solidFill>
+          <a:ln w="19050">
+            <a:solidFill>
+              <a:srgbClr val="52B788"/>
+            </a:solidFill>
+          </a:ln>
+        </p:spPr>
+        <p:style>
+          <a:lnRef idx="1">
+            <a:schemeClr val="accent1"/>
+          </a:lnRef>
+          <a:fillRef idx="3">
+            <a:schemeClr val="accent1"/>
+          </a:fillRef>
+          <a:effectRef idx="2">
+            <a:schemeClr val="accent1"/>
+          </a:effectRef>
+          <a:fontRef idx="minor">
+            <a:schemeClr val="lt1"/>
+          </a:fontRef>
+        </p:style>
+        <p:txBody>
+          <a:bodyPr rtlCol="0" anchor="ctr" wrap="square" lIns="256032" rIns="256032" tIns="182880"/>
+          <a:lstStyle/>
+          <a:p>
+            <a:pPr algn="ctr">
+              <a:spcAft>
+                <a:spcPts val="800"/>
+              </a:spcAft>
+              <a:defRPr sz="1700" b="1">
+                <a:solidFill>
+                  <a:srgbClr val="6EE7B7"/>
+                </a:solidFill>
+                <a:latin typeface="Prompt"/>
+              </a:defRPr>
+            </a:pPr>
+            <a:r>
+              <a:t>Database &amp; Time-series</a:t>
+            </a:r>
+          </a:p>
+          <a:p>
+            <a:pPr>
+              <a:spcAft>
+                <a:spcPts val="400"/>
+              </a:spcAft>
+              <a:defRPr sz="1200">
+                <a:solidFill>
+                  <a:srgbClr val="E2E8F0"/>
+                </a:solidFill>
+                <a:latin typeface="Sarabun"/>
+              </a:defRPr>
+            </a:pPr>
+            <a:r>
+              <a:t>• PostgreSQL: ฐานข้อมูลหลัก จัดเก็บข้อมูลผู้ใช้, สิทธิ์ตั๋ว และธุรกรรมทางการเงิน</a:t>
+            </a:r>
+          </a:p>
+          <a:p>
+            <a:pPr>
+              <a:spcAft>
+                <a:spcPts val="400"/>
+              </a:spcAft>
+              <a:defRPr sz="1200">
+                <a:solidFill>
+                  <a:srgbClr val="E2E8F0"/>
+                </a:solidFill>
+                <a:latin typeface="Sarabun"/>
+              </a:defRPr>
+            </a:pPr>
+            <a:r>
+              <a:t>• TimescaleDB: Time-series Extension จัดเก็บ Big Data พิกัด GPS ได้นับล้านเรคคอร์ด</a:t>
+            </a:r>
+          </a:p>
+          <a:p>
+            <a:pPr>
+              <a:spcAft>
+                <a:spcPts val="400"/>
+              </a:spcAft>
+              <a:defRPr sz="1200">
+                <a:solidFill>
+                  <a:srgbClr val="E2E8F0"/>
+                </a:solidFill>
+                <a:latin typeface="Sarabun"/>
+              </a:defRPr>
+            </a:pPr>
+            <a:r>
+              <a:t>• Redis: In-memory Cache และจัดการ Session ความเร็วระดับมิลลิวินาที</a:t>
+            </a:r>
+          </a:p>
+        </p:txBody>
+      </p:sp>
+      <p:sp>
+        <p:nvSpPr>
+          <p:cNvPr id="8" name="Rounded Rectangle 7"/>
+          <p:cNvSpPr/>
+          <p:nvPr/>
+        </p:nvSpPr>
+        <p:spPr>
+          <a:xfrm>
+            <a:off x="6199632" y="4023360"/>
+            <a:ext cx="5257800" cy="2148840"/>
+          </a:xfrm>
+          <a:prstGeom prst="roundRect">
+            <a:avLst/>
+          </a:prstGeom>
+          <a:solidFill>
+            <a:srgbClr val="0E261C"/>
+          </a:solidFill>
+          <a:ln w="19050">
+            <a:solidFill>
+              <a:srgbClr val="52B788"/>
+            </a:solidFill>
+          </a:ln>
+        </p:spPr>
+        <p:style>
+          <a:lnRef idx="1">
+            <a:schemeClr val="accent1"/>
+          </a:lnRef>
+          <a:fillRef idx="3">
+            <a:schemeClr val="accent1"/>
+          </a:fillRef>
+          <a:effectRef idx="2">
+            <a:schemeClr val="accent1"/>
+          </a:effectRef>
+          <a:fontRef idx="minor">
+            <a:schemeClr val="lt1"/>
+          </a:fontRef>
+        </p:style>
+        <p:txBody>
+          <a:bodyPr rtlCol="0" anchor="ctr" wrap="square" lIns="256032" rIns="256032" tIns="182880"/>
+          <a:lstStyle/>
+          <a:p>
+            <a:pPr algn="ctr">
+              <a:spcAft>
+                <a:spcPts val="800"/>
+              </a:spcAft>
+              <a:defRPr sz="1700" b="1">
+                <a:solidFill>
+                  <a:srgbClr val="6EE7B7"/>
+                </a:solidFill>
+                <a:latin typeface="Prompt"/>
+              </a:defRPr>
+            </a:pPr>
+            <a:r>
+              <a:t>Infrastructure &amp; DevOps</a:t>
+            </a:r>
+          </a:p>
+          <a:p>
+            <a:pPr>
+              <a:spcAft>
+                <a:spcPts val="400"/>
+              </a:spcAft>
+              <a:defRPr sz="1200">
+                <a:solidFill>
+                  <a:srgbClr val="E2E8F0"/>
+                </a:solidFill>
+                <a:latin typeface="Sarabun"/>
+              </a:defRPr>
+            </a:pPr>
+            <a:r>
+              <a:t>• Docker &amp; Kubernetes: Containerize ปรับสเกลรองรับนักท่องเที่ยวช่วงเทศกาล</a:t>
+            </a:r>
+          </a:p>
+          <a:p>
+            <a:pPr>
+              <a:spcAft>
+                <a:spcPts val="400"/>
+              </a:spcAft>
+              <a:defRPr sz="1200">
+                <a:solidFill>
+                  <a:srgbClr val="E2E8F0"/>
+                </a:solidFill>
+                <a:latin typeface="Sarabun"/>
+              </a:defRPr>
+            </a:pPr>
+            <a:r>
+              <a:t>• AWS / GCP Cloud: การันตี Uptime สูง 99.9% ปลอดภัยตามมาตรฐานสากล</a:t>
+            </a:r>
+          </a:p>
+          <a:p>
+            <a:pPr>
+              <a:spcAft>
+                <a:spcPts val="400"/>
+              </a:spcAft>
+              <a:defRPr sz="1200">
+                <a:solidFill>
+                  <a:srgbClr val="E2E8F0"/>
+                </a:solidFill>
+                <a:latin typeface="Sarabun"/>
+              </a:defRPr>
+            </a:pPr>
+            <a:r>
+              <a:t>• GitHub Actions: CI/CD Pipeline ทดสอบและอัปเดตระบบอัตโนมัติอย่างราบรื่น</a:t>
+            </a:r>
+          </a:p>
+        </p:txBody>
+      </p:sp>
     </p:spTree>
   </p:cSld>
   <p:clrMapOvr>
@@ -4624,7 +5293,7 @@
       <p:grpSpPr/>
       <p:pic>
         <p:nvPicPr>
-          <p:cNvPr id="2" name="Picture 1" descr="slide_11.jpg"/>
+          <p:cNvPr id="2" name="Picture 1" descr="dark_topographic_bg.jpg"/>
           <p:cNvPicPr>
             <a:picLocks noChangeAspect="1"/>
           </p:cNvPicPr>
@@ -4646,6 +5315,653 @@
           </a:prstGeom>
         </p:spPr>
       </p:pic>
+      <p:sp>
+        <p:nvSpPr>
+          <p:cNvPr id="3" name="Rounded Rectangle 2"/>
+          <p:cNvSpPr/>
+          <p:nvPr/>
+        </p:nvSpPr>
+        <p:spPr>
+          <a:xfrm>
+            <a:off x="731520" y="365760"/>
+            <a:ext cx="3200400" cy="320040"/>
+          </a:xfrm>
+          <a:prstGeom prst="roundRect">
+            <a:avLst/>
+          </a:prstGeom>
+          <a:solidFill>
+            <a:srgbClr val="123024"/>
+          </a:solidFill>
+          <a:ln w="12700">
+            <a:solidFill>
+              <a:srgbClr val="52B788"/>
+            </a:solidFill>
+          </a:ln>
+        </p:spPr>
+        <p:style>
+          <a:lnRef idx="1">
+            <a:schemeClr val="accent1"/>
+          </a:lnRef>
+          <a:fillRef idx="3">
+            <a:schemeClr val="accent1"/>
+          </a:fillRef>
+          <a:effectRef idx="2">
+            <a:schemeClr val="accent1"/>
+          </a:effectRef>
+          <a:fontRef idx="minor">
+            <a:schemeClr val="lt1"/>
+          </a:fontRef>
+        </p:style>
+        <p:txBody>
+          <a:bodyPr rtlCol="0" anchor="ctr" wrap="square" lIns="0" rIns="0" tIns="0" bIns="0"/>
+          <a:lstStyle/>
+          <a:p>
+            <a:pPr algn="ctr">
+              <a:defRPr sz="1100" b="1">
+                <a:solidFill>
+                  <a:srgbClr val="6EE7B7"/>
+                </a:solidFill>
+                <a:latin typeface="Prompt"/>
+              </a:defRPr>
+            </a:pPr>
+            <a:r>
+              <a:t>ROADMAP</a:t>
+            </a:r>
+          </a:p>
+        </p:txBody>
+      </p:sp>
+      <p:sp>
+        <p:nvSpPr>
+          <p:cNvPr id="4" name="TextBox 3"/>
+          <p:cNvSpPr txBox="1"/>
+          <p:nvPr/>
+        </p:nvSpPr>
+        <p:spPr>
+          <a:xfrm>
+            <a:off x="731520" y="685800"/>
+            <a:ext cx="10728655" cy="868680"/>
+          </a:xfrm>
+          <a:prstGeom prst="rect">
+            <a:avLst/>
+          </a:prstGeom>
+          <a:noFill/>
+        </p:spPr>
+        <p:txBody>
+          <a:bodyPr wrap="square" lIns="0" rIns="0" tIns="0" bIns="0">
+            <a:spAutoFit/>
+          </a:bodyPr>
+          <a:lstStyle/>
+          <a:p>
+            <a:pPr>
+              <a:spcAft>
+                <a:spcPts val="300"/>
+              </a:spcAft>
+              <a:defRPr sz="2600" b="1">
+                <a:solidFill>
+                  <a:srgbClr val="FFFFFF"/>
+                </a:solidFill>
+                <a:latin typeface="Prompt"/>
+              </a:defRPr>
+            </a:pPr>
+            <a:r>
+              <a:t>แผนการดำเนินงานโครงการ (Roadmap 9 เดือน)</a:t>
+            </a:r>
+          </a:p>
+          <a:p>
+            <a:pPr>
+              <a:defRPr sz="1400">
+                <a:solidFill>
+                  <a:srgbClr val="A7F3D0"/>
+                </a:solidFill>
+                <a:latin typeface="Sarabun"/>
+              </a:defRPr>
+            </a:pPr>
+            <a:r>
+              <a:t>แบ่งการพัฒนาเป็น 3 ระยะอย่างเป็นระบบ เพื่อส่งมอบผลงานที่สมบูรณ์ตรงเวลา</a:t>
+            </a:r>
+          </a:p>
+        </p:txBody>
+      </p:sp>
+      <p:sp>
+        <p:nvSpPr>
+          <p:cNvPr id="5" name="Rounded Rectangle 4"/>
+          <p:cNvSpPr/>
+          <p:nvPr/>
+        </p:nvSpPr>
+        <p:spPr>
+          <a:xfrm>
+            <a:off x="731520" y="1691640"/>
+            <a:ext cx="3429000" cy="4480560"/>
+          </a:xfrm>
+          <a:prstGeom prst="roundRect">
+            <a:avLst/>
+          </a:prstGeom>
+          <a:solidFill>
+            <a:srgbClr val="0E261C"/>
+          </a:solidFill>
+          <a:ln w="19050">
+            <a:solidFill>
+              <a:srgbClr val="38BDF8"/>
+            </a:solidFill>
+          </a:ln>
+        </p:spPr>
+        <p:style>
+          <a:lnRef idx="1">
+            <a:schemeClr val="accent1"/>
+          </a:lnRef>
+          <a:fillRef idx="3">
+            <a:schemeClr val="accent1"/>
+          </a:fillRef>
+          <a:effectRef idx="2">
+            <a:schemeClr val="accent1"/>
+          </a:effectRef>
+          <a:fontRef idx="minor">
+            <a:schemeClr val="lt1"/>
+          </a:fontRef>
+        </p:style>
+        <p:txBody>
+          <a:bodyPr rtlCol="0" anchor="ctr" wrap="square" lIns="256032" rIns="256032" tIns="256032"/>
+          <a:lstStyle/>
+          <a:p>
+            <a:pPr algn="ctr">
+              <a:defRPr sz="1700" b="1">
+                <a:solidFill>
+                  <a:srgbClr val="38BDF8"/>
+                </a:solidFill>
+                <a:latin typeface="Prompt"/>
+              </a:defRPr>
+            </a:pPr>
+            <a:r>
+              <a:t>PHASE 1 (เดือน 1-3)</a:t>
+            </a:r>
+          </a:p>
+          <a:p>
+            <a:pPr>
+              <a:defRPr sz="1800" b="1">
+                <a:solidFill>
+                  <a:srgbClr val="FFFFFF"/>
+                </a:solidFill>
+                <a:latin typeface="Prompt"/>
+              </a:defRPr>
+            </a:pPr>
+            <a:r>
+              <a:t>Core Foundation</a:t>
+            </a:r>
+          </a:p>
+          <a:p>
+            <a:pPr>
+              <a:spcAft>
+                <a:spcPts val="1400"/>
+              </a:spcAft>
+              <a:defRPr sz="1100">
+                <a:solidFill>
+                  <a:srgbClr val="A7F3D0"/>
+                </a:solidFill>
+                <a:latin typeface="Prompt"/>
+              </a:defRPr>
+            </a:pPr>
+            <a:r>
+              <a:t>รากฐานระบบ &amp; การเงิน</a:t>
+            </a:r>
+          </a:p>
+          <a:p>
+            <a:pPr>
+              <a:spcAft>
+                <a:spcPts val="700"/>
+              </a:spcAft>
+              <a:defRPr sz="1250">
+                <a:solidFill>
+                  <a:srgbClr val="E2E8F0"/>
+                </a:solidFill>
+                <a:latin typeface="Sarabun"/>
+              </a:defRPr>
+            </a:pPr>
+            <a:r>
+              <a:t>• ออกแบบ DB Schema &amp; สถาปัตยกรรมระบบ</a:t>
+            </a:r>
+          </a:p>
+          <a:p>
+            <a:pPr>
+              <a:spcAft>
+                <a:spcPts val="700"/>
+              </a:spcAft>
+              <a:defRPr sz="1250">
+                <a:solidFill>
+                  <a:srgbClr val="E2E8F0"/>
+                </a:solidFill>
+                <a:latin typeface="Sarabun"/>
+              </a:defRPr>
+            </a:pPr>
+            <a:r>
+              <a:t>• พัฒนา Backend API (Ticket, Station, Auth)</a:t>
+            </a:r>
+          </a:p>
+          <a:p>
+            <a:pPr>
+              <a:spcAft>
+                <a:spcPts val="700"/>
+              </a:spcAft>
+              <a:defRPr sz="1250">
+                <a:solidFill>
+                  <a:srgbClr val="E2E8F0"/>
+                </a:solidFill>
+                <a:latin typeface="Sarabun"/>
+              </a:defRPr>
+            </a:pPr>
+            <a:r>
+              <a:t>• พัฒนา Admin Dashboard จัดการสถานีและรถ</a:t>
+            </a:r>
+          </a:p>
+          <a:p>
+            <a:pPr>
+              <a:spcAft>
+                <a:spcPts val="700"/>
+              </a:spcAft>
+              <a:defRPr sz="1250">
+                <a:solidFill>
+                  <a:srgbClr val="E2E8F0"/>
+                </a:solidFill>
+                <a:latin typeface="Sarabun"/>
+              </a:defRPr>
+            </a:pPr>
+            <a:r>
+              <a:t>• พัฒนา Kiosk UI สำหรับซื้อตั๋วหน้าสถานี</a:t>
+            </a:r>
+          </a:p>
+          <a:p>
+            <a:pPr>
+              <a:spcAft>
+                <a:spcPts val="700"/>
+              </a:spcAft>
+              <a:defRPr sz="1250">
+                <a:solidFill>
+                  <a:srgbClr val="E2E8F0"/>
+                </a:solidFill>
+                <a:latin typeface="Sarabun"/>
+              </a:defRPr>
+            </a:pPr>
+            <a:r>
+              <a:t>• เชื่อมต่อ Payment Gateway (PromptPay QR/บัตร)</a:t>
+            </a:r>
+          </a:p>
+          <a:p>
+            <a:pPr>
+              <a:spcAft>
+                <a:spcPts val="700"/>
+              </a:spcAft>
+              <a:defRPr sz="1250">
+                <a:solidFill>
+                  <a:srgbClr val="E2E8F0"/>
+                </a:solidFill>
+                <a:latin typeface="Sarabun"/>
+              </a:defRPr>
+            </a:pPr>
+            <a:r>
+              <a:t>• พัฒนา Driver App (Tablet GPS) เบื้องต้น</a:t>
+            </a:r>
+          </a:p>
+        </p:txBody>
+      </p:sp>
+      <p:sp>
+        <p:nvSpPr>
+          <p:cNvPr id="6" name="Rounded Rectangle 5"/>
+          <p:cNvSpPr/>
+          <p:nvPr/>
+        </p:nvSpPr>
+        <p:spPr>
+          <a:xfrm>
+            <a:off x="4389120" y="1691640"/>
+            <a:ext cx="3429000" cy="4480560"/>
+          </a:xfrm>
+          <a:prstGeom prst="roundRect">
+            <a:avLst/>
+          </a:prstGeom>
+          <a:solidFill>
+            <a:srgbClr val="0E261C"/>
+          </a:solidFill>
+          <a:ln w="19050">
+            <a:solidFill>
+              <a:srgbClr val="52B788"/>
+            </a:solidFill>
+          </a:ln>
+        </p:spPr>
+        <p:style>
+          <a:lnRef idx="1">
+            <a:schemeClr val="accent1"/>
+          </a:lnRef>
+          <a:fillRef idx="3">
+            <a:schemeClr val="accent1"/>
+          </a:fillRef>
+          <a:effectRef idx="2">
+            <a:schemeClr val="accent1"/>
+          </a:effectRef>
+          <a:fontRef idx="minor">
+            <a:schemeClr val="lt1"/>
+          </a:fontRef>
+        </p:style>
+        <p:txBody>
+          <a:bodyPr rtlCol="0" anchor="ctr" wrap="square" lIns="256032" rIns="256032" tIns="256032"/>
+          <a:lstStyle/>
+          <a:p>
+            <a:pPr algn="ctr">
+              <a:defRPr sz="1700" b="1">
+                <a:solidFill>
+                  <a:srgbClr val="52B788"/>
+                </a:solidFill>
+                <a:latin typeface="Prompt"/>
+              </a:defRPr>
+            </a:pPr>
+            <a:r>
+              <a:t>PHASE 2 (เดือน 4-6)</a:t>
+            </a:r>
+          </a:p>
+          <a:p>
+            <a:pPr>
+              <a:defRPr sz="1800" b="1">
+                <a:solidFill>
+                  <a:srgbClr val="FFFFFF"/>
+                </a:solidFill>
+                <a:latin typeface="Prompt"/>
+              </a:defRPr>
+            </a:pPr>
+            <a:r>
+              <a:t>Realtime &amp; Mobile</a:t>
+            </a:r>
+          </a:p>
+          <a:p>
+            <a:pPr>
+              <a:spcAft>
+                <a:spcPts val="1400"/>
+              </a:spcAft>
+              <a:defRPr sz="1100">
+                <a:solidFill>
+                  <a:srgbClr val="A7F3D0"/>
+                </a:solidFill>
+                <a:latin typeface="Prompt"/>
+              </a:defRPr>
+            </a:pPr>
+            <a:r>
+              <a:t>ระบบเรียลไทม์ &amp; แอปพลิเคชัน</a:t>
+            </a:r>
+          </a:p>
+          <a:p>
+            <a:pPr>
+              <a:spcAft>
+                <a:spcPts val="700"/>
+              </a:spcAft>
+              <a:defRPr sz="1250">
+                <a:solidFill>
+                  <a:srgbClr val="E2E8F0"/>
+                </a:solidFill>
+                <a:latin typeface="Sarabun"/>
+              </a:defRPr>
+            </a:pPr>
+            <a:r>
+              <a:t>• ติดตั้ง WebSocket Server สำหรับ Live Tracking</a:t>
+            </a:r>
+          </a:p>
+          <a:p>
+            <a:pPr>
+              <a:spcAft>
+                <a:spcPts val="700"/>
+              </a:spcAft>
+              <a:defRPr sz="1250">
+                <a:solidFill>
+                  <a:srgbClr val="E2E8F0"/>
+                </a:solidFill>
+                <a:latin typeface="Sarabun"/>
+              </a:defRPr>
+            </a:pPr>
+            <a:r>
+              <a:t>• พัฒนา Mobile App (iOS + Android) เต็มรูปแบบ</a:t>
+            </a:r>
+          </a:p>
+          <a:p>
+            <a:pPr>
+              <a:spcAft>
+                <a:spcPts val="700"/>
+              </a:spcAft>
+              <a:defRPr sz="1250">
+                <a:solidFill>
+                  <a:srgbClr val="E2E8F0"/>
+                </a:solidFill>
+                <a:latin typeface="Sarabun"/>
+              </a:defRPr>
+            </a:pPr>
+            <a:r>
+              <a:t>• พัฒนาระบบ Queue Management &amp; Balancing</a:t>
+            </a:r>
+          </a:p>
+          <a:p>
+            <a:pPr>
+              <a:spcAft>
+                <a:spcPts val="700"/>
+              </a:spcAft>
+              <a:defRPr sz="1250">
+                <a:solidFill>
+                  <a:srgbClr val="E2E8F0"/>
+                </a:solidFill>
+                <a:latin typeface="Sarabun"/>
+              </a:defRPr>
+            </a:pPr>
+            <a:r>
+              <a:t>• เชื่อมต่อ Geofence ทดสอบ Loop 6 สถานี</a:t>
+            </a:r>
+          </a:p>
+          <a:p>
+            <a:pPr>
+              <a:spcAft>
+                <a:spcPts val="700"/>
+              </a:spcAft>
+              <a:defRPr sz="1250">
+                <a:solidFill>
+                  <a:srgbClr val="E2E8F0"/>
+                </a:solidFill>
+                <a:latin typeface="Sarabun"/>
+              </a:defRPr>
+            </a:pPr>
+            <a:r>
+              <a:t>• ทดสอบสแกน QR Check-in บนรถนำเที่ยวจริง</a:t>
+            </a:r>
+          </a:p>
+          <a:p>
+            <a:pPr>
+              <a:spcAft>
+                <a:spcPts val="700"/>
+              </a:spcAft>
+              <a:defRPr sz="1250">
+                <a:solidFill>
+                  <a:srgbClr val="E2E8F0"/>
+                </a:solidFill>
+                <a:latin typeface="Sarabun"/>
+              </a:defRPr>
+            </a:pPr>
+            <a:r>
+              <a:t>• ทดสอบความเสถียรของสัญญาณในสวน 6,500 ไร่</a:t>
+            </a:r>
+          </a:p>
+        </p:txBody>
+      </p:sp>
+      <p:sp>
+        <p:nvSpPr>
+          <p:cNvPr id="7" name="Rounded Rectangle 6"/>
+          <p:cNvSpPr/>
+          <p:nvPr/>
+        </p:nvSpPr>
+        <p:spPr>
+          <a:xfrm>
+            <a:off x="8046720" y="1691640"/>
+            <a:ext cx="3429000" cy="4480560"/>
+          </a:xfrm>
+          <a:prstGeom prst="roundRect">
+            <a:avLst/>
+          </a:prstGeom>
+          <a:solidFill>
+            <a:srgbClr val="0E261C"/>
+          </a:solidFill>
+          <a:ln w="19050">
+            <a:solidFill>
+              <a:srgbClr val="F59E0B"/>
+            </a:solidFill>
+          </a:ln>
+        </p:spPr>
+        <p:style>
+          <a:lnRef idx="1">
+            <a:schemeClr val="accent1"/>
+          </a:lnRef>
+          <a:fillRef idx="3">
+            <a:schemeClr val="accent1"/>
+          </a:fillRef>
+          <a:effectRef idx="2">
+            <a:schemeClr val="accent1"/>
+          </a:effectRef>
+          <a:fontRef idx="minor">
+            <a:schemeClr val="lt1"/>
+          </a:fontRef>
+        </p:style>
+        <p:txBody>
+          <a:bodyPr rtlCol="0" anchor="ctr" wrap="square" lIns="256032" rIns="256032" tIns="256032"/>
+          <a:lstStyle/>
+          <a:p>
+            <a:pPr algn="ctr">
+              <a:defRPr sz="1700" b="1">
+                <a:solidFill>
+                  <a:srgbClr val="F59E0B"/>
+                </a:solidFill>
+                <a:latin typeface="Prompt"/>
+              </a:defRPr>
+            </a:pPr>
+            <a:r>
+              <a:t>PHASE 3 (เดือน 7-9)</a:t>
+            </a:r>
+          </a:p>
+          <a:p>
+            <a:pPr>
+              <a:defRPr sz="1800" b="1">
+                <a:solidFill>
+                  <a:srgbClr val="FFFFFF"/>
+                </a:solidFill>
+                <a:latin typeface="Prompt"/>
+              </a:defRPr>
+            </a:pPr>
+            <a:r>
+              <a:t>Advanced &amp; Rollout</a:t>
+            </a:r>
+          </a:p>
+          <a:p>
+            <a:pPr>
+              <a:spcAft>
+                <a:spcPts val="1400"/>
+              </a:spcAft>
+              <a:defRPr sz="1100">
+                <a:solidFill>
+                  <a:srgbClr val="A7F3D0"/>
+                </a:solidFill>
+                <a:latin typeface="Prompt"/>
+              </a:defRPr>
+            </a:pPr>
+            <a:r>
+              <a:t>ฟังก์ชันขั้นสูง &amp; ส่งมอบงาน</a:t>
+            </a:r>
+          </a:p>
+          <a:p>
+            <a:pPr>
+              <a:spcAft>
+                <a:spcPts val="700"/>
+              </a:spcAft>
+              <a:defRPr sz="1250">
+                <a:solidFill>
+                  <a:srgbClr val="E2E8F0"/>
+                </a:solidFill>
+                <a:latin typeface="Sarabun"/>
+              </a:defRPr>
+            </a:pPr>
+            <a:r>
+              <a:t>• เปิดระบบ Push Notification (LINE / Push / SMS)</a:t>
+            </a:r>
+          </a:p>
+          <a:p>
+            <a:pPr>
+              <a:spcAft>
+                <a:spcPts val="700"/>
+              </a:spcAft>
+              <a:defRPr sz="1250">
+                <a:solidFill>
+                  <a:srgbClr val="E2E8F0"/>
+                </a:solidFill>
+                <a:latin typeface="Sarabun"/>
+              </a:defRPr>
+            </a:pPr>
+            <a:r>
+              <a:t>• พัฒนาระบบ Real-time Analytics Dashboard</a:t>
+            </a:r>
+          </a:p>
+          <a:p>
+            <a:pPr>
+              <a:spcAft>
+                <a:spcPts val="700"/>
+              </a:spcAft>
+              <a:defRPr sz="1250">
+                <a:solidFill>
+                  <a:srgbClr val="E2E8F0"/>
+                </a:solidFill>
+                <a:latin typeface="Sarabun"/>
+              </a:defRPr>
+            </a:pPr>
+            <a:r>
+              <a:t>• เปิดระบบจองออนไลน์ล่วงหน้า (Online Booking)</a:t>
+            </a:r>
+          </a:p>
+          <a:p>
+            <a:pPr>
+              <a:spcAft>
+                <a:spcPts val="700"/>
+              </a:spcAft>
+              <a:defRPr sz="1250">
+                <a:solidFill>
+                  <a:srgbClr val="E2E8F0"/>
+                </a:solidFill>
+                <a:latin typeface="Sarabun"/>
+              </a:defRPr>
+            </a:pPr>
+            <a:r>
+              <a:t>• จัดทำคู่มือการใช้งานระบบทุกกลุ่มผู้ใช้</a:t>
+            </a:r>
+          </a:p>
+          <a:p>
+            <a:pPr>
+              <a:spcAft>
+                <a:spcPts val="700"/>
+              </a:spcAft>
+              <a:defRPr sz="1250">
+                <a:solidFill>
+                  <a:srgbClr val="E2E8F0"/>
+                </a:solidFill>
+                <a:latin typeface="Sarabun"/>
+              </a:defRPr>
+            </a:pPr>
+            <a:r>
+              <a:t>• ฝึกอบรมเจ้าหน้าที่ประจำสถานีและคนขับรถ</a:t>
+            </a:r>
+          </a:p>
+          <a:p>
+            <a:pPr>
+              <a:spcAft>
+                <a:spcPts val="700"/>
+              </a:spcAft>
+              <a:defRPr sz="1250">
+                <a:solidFill>
+                  <a:srgbClr val="E2E8F0"/>
+                </a:solidFill>
+                <a:latin typeface="Sarabun"/>
+              </a:defRPr>
+            </a:pPr>
+            <a:r>
+              <a:t>• ทดสอบระบบสมบูรณ์ และส่งมอบงานโครงการ</a:t>
+            </a:r>
+          </a:p>
+        </p:txBody>
+      </p:sp>
     </p:spTree>
   </p:cSld>
   <p:clrMapOvr>
@@ -4666,7 +5982,7 @@
       <p:grpSpPr/>
       <p:pic>
         <p:nvPicPr>
-          <p:cNvPr id="2" name="Picture 1" descr="slide_12.jpg"/>
+          <p:cNvPr id="2" name="Picture 1" descr="dark_topographic_bg.jpg"/>
           <p:cNvPicPr>
             <a:picLocks noChangeAspect="1"/>
           </p:cNvPicPr>
@@ -4688,6 +6004,651 @@
           </a:prstGeom>
         </p:spPr>
       </p:pic>
+      <p:sp>
+        <p:nvSpPr>
+          <p:cNvPr id="3" name="Rounded Rectangle 2"/>
+          <p:cNvSpPr/>
+          <p:nvPr/>
+        </p:nvSpPr>
+        <p:spPr>
+          <a:xfrm>
+            <a:off x="731520" y="365760"/>
+            <a:ext cx="3200400" cy="320040"/>
+          </a:xfrm>
+          <a:prstGeom prst="roundRect">
+            <a:avLst/>
+          </a:prstGeom>
+          <a:solidFill>
+            <a:srgbClr val="123024"/>
+          </a:solidFill>
+          <a:ln w="12700">
+            <a:solidFill>
+              <a:srgbClr val="52B788"/>
+            </a:solidFill>
+          </a:ln>
+        </p:spPr>
+        <p:style>
+          <a:lnRef idx="1">
+            <a:schemeClr val="accent1"/>
+          </a:lnRef>
+          <a:fillRef idx="3">
+            <a:schemeClr val="accent1"/>
+          </a:fillRef>
+          <a:effectRef idx="2">
+            <a:schemeClr val="accent1"/>
+          </a:effectRef>
+          <a:fontRef idx="minor">
+            <a:schemeClr val="lt1"/>
+          </a:fontRef>
+        </p:style>
+        <p:txBody>
+          <a:bodyPr rtlCol="0" anchor="ctr" wrap="square" lIns="0" rIns="0" tIns="0" bIns="0"/>
+          <a:lstStyle/>
+          <a:p>
+            <a:pPr algn="ctr">
+              <a:defRPr sz="1100" b="1">
+                <a:solidFill>
+                  <a:srgbClr val="6EE7B7"/>
+                </a:solidFill>
+                <a:latin typeface="Prompt"/>
+              </a:defRPr>
+            </a:pPr>
+            <a:r>
+              <a:t>IMPACT &amp; VALUE</a:t>
+            </a:r>
+          </a:p>
+        </p:txBody>
+      </p:sp>
+      <p:sp>
+        <p:nvSpPr>
+          <p:cNvPr id="4" name="TextBox 3"/>
+          <p:cNvSpPr txBox="1"/>
+          <p:nvPr/>
+        </p:nvSpPr>
+        <p:spPr>
+          <a:xfrm>
+            <a:off x="731520" y="685800"/>
+            <a:ext cx="10728655" cy="868680"/>
+          </a:xfrm>
+          <a:prstGeom prst="rect">
+            <a:avLst/>
+          </a:prstGeom>
+          <a:noFill/>
+        </p:spPr>
+        <p:txBody>
+          <a:bodyPr wrap="square" lIns="0" rIns="0" tIns="0" bIns="0">
+            <a:spAutoFit/>
+          </a:bodyPr>
+          <a:lstStyle/>
+          <a:p>
+            <a:pPr>
+              <a:spcAft>
+                <a:spcPts val="300"/>
+              </a:spcAft>
+              <a:defRPr sz="2600" b="1">
+                <a:solidFill>
+                  <a:srgbClr val="FFFFFF"/>
+                </a:solidFill>
+                <a:latin typeface="Prompt"/>
+              </a:defRPr>
+            </a:pPr>
+            <a:r>
+              <a:t>คุณค่าและประโยชน์ที่คาดว่าจะได้รับ</a:t>
+            </a:r>
+          </a:p>
+          <a:p>
+            <a:pPr>
+              <a:defRPr sz="1400">
+                <a:solidFill>
+                  <a:srgbClr val="A7F3D0"/>
+                </a:solidFill>
+                <a:latin typeface="Sarabun"/>
+              </a:defRPr>
+            </a:pPr>
+            <a:r>
+              <a:t>การสร้างผลกระทบเชิงบวกอย่างครอบคลุมต่อทุกภาคส่วนที่เกี่ยวข้อง</a:t>
+            </a:r>
+          </a:p>
+        </p:txBody>
+      </p:sp>
+      <p:sp>
+        <p:nvSpPr>
+          <p:cNvPr id="5" name="Rounded Rectangle 4"/>
+          <p:cNvSpPr/>
+          <p:nvPr/>
+        </p:nvSpPr>
+        <p:spPr>
+          <a:xfrm>
+            <a:off x="731520" y="1691640"/>
+            <a:ext cx="5257800" cy="2148840"/>
+          </a:xfrm>
+          <a:prstGeom prst="roundRect">
+            <a:avLst/>
+          </a:prstGeom>
+          <a:solidFill>
+            <a:srgbClr val="0E261C"/>
+          </a:solidFill>
+          <a:ln w="19050">
+            <a:solidFill>
+              <a:srgbClr val="52B788"/>
+            </a:solidFill>
+          </a:ln>
+        </p:spPr>
+        <p:style>
+          <a:lnRef idx="1">
+            <a:schemeClr val="accent1"/>
+          </a:lnRef>
+          <a:fillRef idx="3">
+            <a:schemeClr val="accent1"/>
+          </a:fillRef>
+          <a:effectRef idx="2">
+            <a:schemeClr val="accent1"/>
+          </a:effectRef>
+          <a:fontRef idx="minor">
+            <a:schemeClr val="lt1"/>
+          </a:fontRef>
+        </p:style>
+        <p:txBody>
+          <a:bodyPr rtlCol="0" anchor="ctr" wrap="square" lIns="256032" rIns="256032" tIns="164592"/>
+          <a:lstStyle/>
+          <a:p>
+            <a:pPr algn="ctr">
+              <a:spcAft>
+                <a:spcPts val="600"/>
+              </a:spcAft>
+              <a:defRPr sz="1700" b="1">
+                <a:solidFill>
+                  <a:srgbClr val="52B788"/>
+                </a:solidFill>
+                <a:latin typeface="Prompt"/>
+              </a:defRPr>
+            </a:pPr>
+            <a:r>
+              <a:t>นักท่องเที่ยว (Tourists)</a:t>
+            </a:r>
+          </a:p>
+          <a:p>
+            <a:pPr>
+              <a:spcAft>
+                <a:spcPts val="300"/>
+              </a:spcAft>
+              <a:defRPr sz="1200">
+                <a:solidFill>
+                  <a:srgbClr val="E2E8F0"/>
+                </a:solidFill>
+                <a:latin typeface="Sarabun"/>
+              </a:defRPr>
+            </a:pPr>
+            <a:r>
+              <a:t>• ซื้อตั๋วสะดวกทุกช่องทาง ไม่ต้องต่อแถวยาว</a:t>
+            </a:r>
+          </a:p>
+          <a:p>
+            <a:pPr>
+              <a:spcAft>
+                <a:spcPts val="300"/>
+              </a:spcAft>
+              <a:defRPr sz="1200">
+                <a:solidFill>
+                  <a:srgbClr val="E2E8F0"/>
+                </a:solidFill>
+                <a:latin typeface="Sarabun"/>
+              </a:defRPr>
+            </a:pPr>
+            <a:r>
+              <a:t>• ทราบเวลารถมาถึงล่วงหน้า ลดความเครียดในการรอคอย</a:t>
+            </a:r>
+          </a:p>
+          <a:p>
+            <a:pPr>
+              <a:spcAft>
+                <a:spcPts val="300"/>
+              </a:spcAft>
+              <a:defRPr sz="1200">
+                <a:solidFill>
+                  <a:srgbClr val="E2E8F0"/>
+                </a:solidFill>
+                <a:latin typeface="Sarabun"/>
+              </a:defRPr>
+            </a:pPr>
+            <a:r>
+              <a:t>• ได้รับความรู้พันธุ์ไม้ตลอดเส้นทางผ่านระบบ Geofences</a:t>
+            </a:r>
+          </a:p>
+          <a:p>
+            <a:pPr>
+              <a:spcAft>
+                <a:spcPts val="300"/>
+              </a:spcAft>
+              <a:defRPr sz="1200">
+                <a:solidFill>
+                  <a:srgbClr val="E2E8F0"/>
+                </a:solidFill>
+                <a:latin typeface="Sarabun"/>
+              </a:defRPr>
+            </a:pPr>
+            <a:r>
+              <a:t>• สัมผัสธรรมชาติที่เงียบสงบ ปราศจากควันพิษ</a:t>
+            </a:r>
+          </a:p>
+        </p:txBody>
+      </p:sp>
+      <p:sp>
+        <p:nvSpPr>
+          <p:cNvPr id="6" name="Rounded Rectangle 5"/>
+          <p:cNvSpPr/>
+          <p:nvPr/>
+        </p:nvSpPr>
+        <p:spPr>
+          <a:xfrm>
+            <a:off x="6199632" y="1691640"/>
+            <a:ext cx="5257800" cy="2148840"/>
+          </a:xfrm>
+          <a:prstGeom prst="roundRect">
+            <a:avLst/>
+          </a:prstGeom>
+          <a:solidFill>
+            <a:srgbClr val="0E261C"/>
+          </a:solidFill>
+          <a:ln w="19050">
+            <a:solidFill>
+              <a:srgbClr val="38BDF8"/>
+            </a:solidFill>
+          </a:ln>
+        </p:spPr>
+        <p:style>
+          <a:lnRef idx="1">
+            <a:schemeClr val="accent1"/>
+          </a:lnRef>
+          <a:fillRef idx="3">
+            <a:schemeClr val="accent1"/>
+          </a:fillRef>
+          <a:effectRef idx="2">
+            <a:schemeClr val="accent1"/>
+          </a:effectRef>
+          <a:fontRef idx="minor">
+            <a:schemeClr val="lt1"/>
+          </a:fontRef>
+        </p:style>
+        <p:txBody>
+          <a:bodyPr rtlCol="0" anchor="ctr" wrap="square" lIns="256032" rIns="256032" tIns="164592"/>
+          <a:lstStyle/>
+          <a:p>
+            <a:pPr algn="ctr">
+              <a:spcAft>
+                <a:spcPts val="600"/>
+              </a:spcAft>
+              <a:defRPr sz="1700" b="1">
+                <a:solidFill>
+                  <a:srgbClr val="38BDF8"/>
+                </a:solidFill>
+                <a:latin typeface="Prompt"/>
+              </a:defRPr>
+            </a:pPr>
+            <a:r>
+              <a:t>เจ้าหน้าที่ &amp; คนขับรถ (Staff &amp; Drivers)</a:t>
+            </a:r>
+          </a:p>
+          <a:p>
+            <a:pPr>
+              <a:spcAft>
+                <a:spcPts val="300"/>
+              </a:spcAft>
+              <a:defRPr sz="1200">
+                <a:solidFill>
+                  <a:srgbClr val="E2E8F0"/>
+                </a:solidFill>
+                <a:latin typeface="Sarabun"/>
+              </a:defRPr>
+            </a:pPr>
+            <a:r>
+              <a:t>• ตรวจสอบตั๋วด้วย Tablet ภายใน 1 วินาที ป้องกันตั๋วซ้ำ</a:t>
+            </a:r>
+          </a:p>
+          <a:p>
+            <a:pPr>
+              <a:spcAft>
+                <a:spcPts val="300"/>
+              </a:spcAft>
+              <a:defRPr sz="1200">
+                <a:solidFill>
+                  <a:srgbClr val="E2E8F0"/>
+                </a:solidFill>
+                <a:latin typeface="Sarabun"/>
+              </a:defRPr>
+            </a:pPr>
+            <a:r>
+              <a:t>• ทราบจำนวนผู้โดยสารในสถานีถัดไปล่วงหน้า จัดการรถได้ง่าย</a:t>
+            </a:r>
+          </a:p>
+          <a:p>
+            <a:pPr>
+              <a:spcAft>
+                <a:spcPts val="300"/>
+              </a:spcAft>
+              <a:defRPr sz="1200">
+                <a:solidFill>
+                  <a:srgbClr val="E2E8F0"/>
+                </a:solidFill>
+                <a:latin typeface="Sarabun"/>
+              </a:defRPr>
+            </a:pPr>
+            <a:r>
+              <a:t>• ลดความแออัดและลดความขัดแย้งในการจัดคิวหน้างาน</a:t>
+            </a:r>
+          </a:p>
+          <a:p>
+            <a:pPr>
+              <a:spcAft>
+                <a:spcPts val="300"/>
+              </a:spcAft>
+              <a:defRPr sz="1200">
+                <a:solidFill>
+                  <a:srgbClr val="E2E8F0"/>
+                </a:solidFill>
+                <a:latin typeface="Sarabun"/>
+              </a:defRPr>
+            </a:pPr>
+            <a:r>
+              <a:t>• มีเครื่องมือดิจิทัลที่ทันสมัยช่วยให้การทำงานคล่องตัว</a:t>
+            </a:r>
+          </a:p>
+        </p:txBody>
+      </p:sp>
+      <p:sp>
+        <p:nvSpPr>
+          <p:cNvPr id="7" name="Rounded Rectangle 6"/>
+          <p:cNvSpPr/>
+          <p:nvPr/>
+        </p:nvSpPr>
+        <p:spPr>
+          <a:xfrm>
+            <a:off x="731520" y="4023360"/>
+            <a:ext cx="5257800" cy="2148840"/>
+          </a:xfrm>
+          <a:prstGeom prst="roundRect">
+            <a:avLst/>
+          </a:prstGeom>
+          <a:solidFill>
+            <a:srgbClr val="0E261C"/>
+          </a:solidFill>
+          <a:ln w="19050">
+            <a:solidFill>
+              <a:srgbClr val="6EE7B7"/>
+            </a:solidFill>
+          </a:ln>
+        </p:spPr>
+        <p:style>
+          <a:lnRef idx="1">
+            <a:schemeClr val="accent1"/>
+          </a:lnRef>
+          <a:fillRef idx="3">
+            <a:schemeClr val="accent1"/>
+          </a:fillRef>
+          <a:effectRef idx="2">
+            <a:schemeClr val="accent1"/>
+          </a:effectRef>
+          <a:fontRef idx="minor">
+            <a:schemeClr val="lt1"/>
+          </a:fontRef>
+        </p:style>
+        <p:txBody>
+          <a:bodyPr rtlCol="0" anchor="ctr" wrap="square" lIns="256032" rIns="256032" tIns="164592"/>
+          <a:lstStyle/>
+          <a:p>
+            <a:pPr algn="ctr">
+              <a:spcAft>
+                <a:spcPts val="600"/>
+              </a:spcAft>
+              <a:defRPr sz="1700" b="1">
+                <a:solidFill>
+                  <a:srgbClr val="6EE7B7"/>
+                </a:solidFill>
+                <a:latin typeface="Prompt"/>
+              </a:defRPr>
+            </a:pPr>
+            <a:r>
+              <a:t>ผู้บริหารและองค์กร (Management)</a:t>
+            </a:r>
+          </a:p>
+          <a:p>
+            <a:pPr>
+              <a:spcAft>
+                <a:spcPts val="300"/>
+              </a:spcAft>
+              <a:defRPr sz="1200">
+                <a:solidFill>
+                  <a:srgbClr val="E2E8F0"/>
+                </a:solidFill>
+                <a:latin typeface="Sarabun"/>
+              </a:defRPr>
+            </a:pPr>
+            <a:r>
+              <a:t>• Real-time Dashboard ติดตามสถานะการเดินรถและรายได้ทันที</a:t>
+            </a:r>
+          </a:p>
+          <a:p>
+            <a:pPr>
+              <a:spcAft>
+                <a:spcPts val="300"/>
+              </a:spcAft>
+              <a:defRPr sz="1200">
+                <a:solidFill>
+                  <a:srgbClr val="E2E8F0"/>
+                </a:solidFill>
+                <a:latin typeface="Sarabun"/>
+              </a:defRPr>
+            </a:pPr>
+            <a:r>
+              <a:t>• มีข้อมูลสถิติเชิงพื้นที่นำไปวางแผนพัฒนาสวนฯ ได้อย่างแม่นยำ</a:t>
+            </a:r>
+          </a:p>
+          <a:p>
+            <a:pPr>
+              <a:spcAft>
+                <a:spcPts val="300"/>
+              </a:spcAft>
+              <a:defRPr sz="1200">
+                <a:solidFill>
+                  <a:srgbClr val="E2E8F0"/>
+                </a:solidFill>
+                <a:latin typeface="Sarabun"/>
+              </a:defRPr>
+            </a:pPr>
+            <a:r>
+              <a:t>• ตรวจสอบยอดจำหน่ายตั๋วได้อย่างโปร่งใส 100%</a:t>
+            </a:r>
+          </a:p>
+          <a:p>
+            <a:pPr>
+              <a:spcAft>
+                <a:spcPts val="300"/>
+              </a:spcAft>
+              <a:defRPr sz="1200">
+                <a:solidFill>
+                  <a:srgbClr val="E2E8F0"/>
+                </a:solidFill>
+                <a:latin typeface="Sarabun"/>
+              </a:defRPr>
+            </a:pPr>
+            <a:r>
+              <a:t>• ยกระดับภาพลักษณ์สู่ Smart Botanical Garden สากล</a:t>
+            </a:r>
+          </a:p>
+        </p:txBody>
+      </p:sp>
+      <p:sp>
+        <p:nvSpPr>
+          <p:cNvPr id="8" name="Rounded Rectangle 7"/>
+          <p:cNvSpPr/>
+          <p:nvPr/>
+        </p:nvSpPr>
+        <p:spPr>
+          <a:xfrm>
+            <a:off x="6199632" y="4023360"/>
+            <a:ext cx="5257800" cy="2148840"/>
+          </a:xfrm>
+          <a:prstGeom prst="roundRect">
+            <a:avLst/>
+          </a:prstGeom>
+          <a:solidFill>
+            <a:srgbClr val="0E261C"/>
+          </a:solidFill>
+          <a:ln w="19050">
+            <a:solidFill>
+              <a:srgbClr val="F59E0B"/>
+            </a:solidFill>
+          </a:ln>
+        </p:spPr>
+        <p:style>
+          <a:lnRef idx="1">
+            <a:schemeClr val="accent1"/>
+          </a:lnRef>
+          <a:fillRef idx="3">
+            <a:schemeClr val="accent1"/>
+          </a:fillRef>
+          <a:effectRef idx="2">
+            <a:schemeClr val="accent1"/>
+          </a:effectRef>
+          <a:fontRef idx="minor">
+            <a:schemeClr val="lt1"/>
+          </a:fontRef>
+        </p:style>
+        <p:txBody>
+          <a:bodyPr rtlCol="0" anchor="ctr"/>
+          <a:lstStyle/>
+          <a:p>
+            <a:pPr algn="ctr"/>
+          </a:p>
+        </p:txBody>
+      </p:sp>
+      <p:pic>
+        <p:nvPicPr>
+          <p:cNvPr id="9" name="Picture 8" descr="ev_charger_station.jpg"/>
+          <p:cNvPicPr>
+            <a:picLocks noChangeAspect="1"/>
+          </p:cNvPicPr>
+          <p:nvPr/>
+        </p:nvPicPr>
+        <p:blipFill>
+          <a:blip r:embed="rId3"/>
+          <a:stretch>
+            <a:fillRect/>
+          </a:stretch>
+        </p:blipFill>
+        <p:spPr>
+          <a:xfrm>
+            <a:off x="9784080" y="4114800"/>
+            <a:ext cx="1508760" cy="1965960"/>
+          </a:xfrm>
+          <a:prstGeom prst="rect">
+            <a:avLst/>
+          </a:prstGeom>
+        </p:spPr>
+      </p:pic>
+      <p:sp>
+        <p:nvSpPr>
+          <p:cNvPr id="10" name="TextBox 9"/>
+          <p:cNvSpPr txBox="1"/>
+          <p:nvPr/>
+        </p:nvSpPr>
+        <p:spPr>
+          <a:xfrm>
+            <a:off x="6400800" y="4114800"/>
+            <a:ext cx="3291840" cy="1920240"/>
+          </a:xfrm>
+          <a:prstGeom prst="rect">
+            <a:avLst/>
+          </a:prstGeom>
+          <a:noFill/>
+        </p:spPr>
+        <p:txBody>
+          <a:bodyPr wrap="square" lIns="0" rIns="0" tIns="0" bIns="0">
+            <a:spAutoFit/>
+          </a:bodyPr>
+          <a:lstStyle/>
+          <a:p>
+            <a:pPr>
+              <a:spcAft>
+                <a:spcPts val="400"/>
+              </a:spcAft>
+              <a:defRPr sz="1550" b="1">
+                <a:solidFill>
+                  <a:srgbClr val="F59E0B"/>
+                </a:solidFill>
+                <a:latin typeface="Prompt"/>
+              </a:defRPr>
+            </a:pPr>
+            <a:r>
+              <a:t>สิ่งแวดล้อมและความยั่งยืน (Environment)</a:t>
+            </a:r>
+          </a:p>
+          <a:p>
+            <a:pPr>
+              <a:spcAft>
+                <a:spcPts val="200"/>
+              </a:spcAft>
+              <a:defRPr sz="1150">
+                <a:solidFill>
+                  <a:srgbClr val="E2E8F0"/>
+                </a:solidFill>
+                <a:latin typeface="Sarabun"/>
+              </a:defRPr>
+            </a:pPr>
+            <a:r>
+              <a:t>• ลดการปล่อยคาร์บอนด้วยรถ EV 100% ไร้เสียง ไร้ควัน</a:t>
+            </a:r>
+          </a:p>
+          <a:p>
+            <a:pPr>
+              <a:spcAft>
+                <a:spcPts val="200"/>
+              </a:spcAft>
+              <a:defRPr sz="1150">
+                <a:solidFill>
+                  <a:srgbClr val="E2E8F0"/>
+                </a:solidFill>
+                <a:latin typeface="Sarabun"/>
+              </a:defRPr>
+            </a:pPr>
+            <a:r>
+              <a:t>• ปกป้องระบบนิเวศพฤกษศาสตร์ในพื้นที่ 6,500 ไร่</a:t>
+            </a:r>
+          </a:p>
+          <a:p>
+            <a:pPr>
+              <a:spcAft>
+                <a:spcPts val="200"/>
+              </a:spcAft>
+              <a:defRPr sz="1150">
+                <a:solidFill>
+                  <a:srgbClr val="E2E8F0"/>
+                </a:solidFill>
+                <a:latin typeface="Sarabun"/>
+              </a:defRPr>
+            </a:pPr>
+            <a:r>
+              <a:t>• จุดชาร์จพลังงานสะอาด EV Tram Charger ในพื้นที่</a:t>
+            </a:r>
+          </a:p>
+          <a:p>
+            <a:pPr>
+              <a:spcAft>
+                <a:spcPts val="200"/>
+              </a:spcAft>
+              <a:defRPr sz="1150">
+                <a:solidFill>
+                  <a:srgbClr val="E2E8F0"/>
+                </a:solidFill>
+                <a:latin typeface="Sarabun"/>
+              </a:defRPr>
+            </a:pPr>
+            <a:r>
+              <a:t>• ยกระดับสู่มาตรฐานการท่องเที่ยวสีเขียวระดับสากล</a:t>
+            </a:r>
+          </a:p>
+        </p:txBody>
+      </p:sp>
     </p:spTree>
   </p:cSld>
   <p:clrMapOvr>
@@ -4696,7 +6657,7 @@
 </p:sld>
 </file>
 
-<file path=ppt/slides/slide2.xml><?xml version="1.0" encoding="utf-8"?>
+<file path=ppt/slides/slide13.xml><?xml version="1.0" encoding="utf-8"?>
 <p:sld xmlns:a="http://schemas.openxmlformats.org/drawingml/2006/main" xmlns:p="http://schemas.openxmlformats.org/presentationml/2006/main" xmlns:r="http://schemas.openxmlformats.org/officeDocument/2006/relationships">
   <p:cSld>
     <p:spTree>
@@ -4708,7 +6669,7 @@
       <p:grpSpPr/>
       <p:pic>
         <p:nvPicPr>
-          <p:cNvPr id="2" name="Picture 1" descr="slide_02.jpg"/>
+          <p:cNvPr id="2" name="Picture 1" descr="dark_topographic_bg.jpg"/>
           <p:cNvPicPr>
             <a:picLocks noChangeAspect="1"/>
           </p:cNvPicPr>
@@ -4730,6 +6691,113 @@
           </a:prstGeom>
         </p:spPr>
       </p:pic>
+      <p:sp>
+        <p:nvSpPr>
+          <p:cNvPr id="3" name="Rounded Rectangle 2"/>
+          <p:cNvSpPr/>
+          <p:nvPr/>
+        </p:nvSpPr>
+        <p:spPr>
+          <a:xfrm>
+            <a:off x="1097280" y="1097280"/>
+            <a:ext cx="9997135" cy="4663440"/>
+          </a:xfrm>
+          <a:prstGeom prst="roundRect">
+            <a:avLst/>
+          </a:prstGeom>
+          <a:solidFill>
+            <a:srgbClr val="0E261C"/>
+          </a:solidFill>
+          <a:ln w="19050">
+            <a:solidFill>
+              <a:srgbClr val="52B788"/>
+            </a:solidFill>
+          </a:ln>
+        </p:spPr>
+        <p:style>
+          <a:lnRef idx="1">
+            <a:schemeClr val="accent1"/>
+          </a:lnRef>
+          <a:fillRef idx="3">
+            <a:schemeClr val="accent1"/>
+          </a:fillRef>
+          <a:effectRef idx="2">
+            <a:schemeClr val="accent1"/>
+          </a:effectRef>
+          <a:fontRef idx="minor">
+            <a:schemeClr val="lt1"/>
+          </a:fontRef>
+        </p:style>
+        <p:txBody>
+          <a:bodyPr rtlCol="0" anchor="ctr" wrap="square" lIns="548640" rIns="548640" tIns="548640"/>
+          <a:lstStyle/>
+          <a:p>
+            <a:pPr algn="ctr">
+              <a:spcAft>
+                <a:spcPts val="2000"/>
+              </a:spcAft>
+              <a:defRPr sz="1400" b="1">
+                <a:solidFill>
+                  <a:srgbClr val="6EE7B7"/>
+                </a:solidFill>
+                <a:latin typeface="Prompt"/>
+              </a:defRPr>
+            </a:pPr>
+            <a:r>
+              <a:t>SMART &amp; GREEN BOTANICAL GARDEN | FUTURE OF QSBG</a:t>
+            </a:r>
+          </a:p>
+          <a:p>
+            <a:pPr algn="ctr">
+              <a:spcAft>
+                <a:spcPts val="1800"/>
+              </a:spcAft>
+              <a:defRPr sz="3200" b="1">
+                <a:solidFill>
+                  <a:srgbClr val="FFFFFF"/>
+                </a:solidFill>
+                <a:latin typeface="Prompt"/>
+              </a:defRPr>
+            </a:pPr>
+            <a:r>
+              <a:t>การผสานรวมรถนำเที่ยวไฟฟ้า (EV)</a:t>
+            </a:r>
+            <a:br/>
+            <a:r>
+              <a:t>และ Smart Tourism Platform เพื่ออนาคตสีเขียวที่ยั่งยืน</a:t>
+            </a:r>
+          </a:p>
+          <a:p>
+            <a:pPr algn="ctr">
+              <a:spcAft>
+                <a:spcPts val="2600"/>
+              </a:spcAft>
+              <a:defRPr sz="1500">
+                <a:solidFill>
+                  <a:srgbClr val="E2E8F0"/>
+                </a:solidFill>
+                <a:latin typeface="Sarabun"/>
+              </a:defRPr>
+            </a:pPr>
+            <a:r>
+              <a:t>โครงการพัฒนาระบบจัดการรถนำเที่ยวไฟฟ้า สวนพฤกษศาสตร์สมเด็จพระนางเจ้าสิริกิติ์ พร้อมเดินหน้าตามแผนงาน Phase 1 ทันที เพื่อส่งมอบระบบที่สมบูรณ์แบบ ทั้งการบริการ การบริหารจัดการ และการอนุรักษ์สิ่งแวดล้อมอย่างยั่งยืน</a:t>
+            </a:r>
+          </a:p>
+          <a:p>
+            <a:pPr algn="ctr">
+              <a:defRPr sz="2200" b="1">
+                <a:solidFill>
+                  <a:srgbClr val="F59E0B"/>
+                </a:solidFill>
+                <a:latin typeface="Prompt"/>
+              </a:defRPr>
+            </a:pPr>
+            <a:r>
+              <a:t>ขอขอบพระคุณคณะกรรมการทุกท่าน  |  ช่วงถาม - ตอบ (Q &amp; A)</a:t>
+            </a:r>
+          </a:p>
+        </p:txBody>
+      </p:sp>
     </p:spTree>
   </p:cSld>
   <p:clrMapOvr>
@@ -4738,7 +6806,7 @@
 </p:sld>
 </file>
 
-<file path=ppt/slides/slide3.xml><?xml version="1.0" encoding="utf-8"?>
+<file path=ppt/slides/slide2.xml><?xml version="1.0" encoding="utf-8"?>
 <p:sld xmlns:a="http://schemas.openxmlformats.org/drawingml/2006/main" xmlns:p="http://schemas.openxmlformats.org/presentationml/2006/main" xmlns:r="http://schemas.openxmlformats.org/officeDocument/2006/relationships">
   <p:cSld>
     <p:spTree>
@@ -4750,7 +6818,7 @@
       <p:grpSpPr/>
       <p:pic>
         <p:nvPicPr>
-          <p:cNvPr id="2" name="Picture 1" descr="slide_03.jpg"/>
+          <p:cNvPr id="2" name="Picture 1" descr="dark_topographic_bg.jpg"/>
           <p:cNvPicPr>
             <a:picLocks noChangeAspect="1"/>
           </p:cNvPicPr>
@@ -4772,6 +6840,566 @@
           </a:prstGeom>
         </p:spPr>
       </p:pic>
+      <p:sp>
+        <p:nvSpPr>
+          <p:cNvPr id="3" name="Rounded Rectangle 2"/>
+          <p:cNvSpPr/>
+          <p:nvPr/>
+        </p:nvSpPr>
+        <p:spPr>
+          <a:xfrm>
+            <a:off x="731520" y="365760"/>
+            <a:ext cx="3200400" cy="320040"/>
+          </a:xfrm>
+          <a:prstGeom prst="roundRect">
+            <a:avLst/>
+          </a:prstGeom>
+          <a:solidFill>
+            <a:srgbClr val="123024"/>
+          </a:solidFill>
+          <a:ln w="12700">
+            <a:solidFill>
+              <a:srgbClr val="52B788"/>
+            </a:solidFill>
+          </a:ln>
+        </p:spPr>
+        <p:style>
+          <a:lnRef idx="1">
+            <a:schemeClr val="accent1"/>
+          </a:lnRef>
+          <a:fillRef idx="3">
+            <a:schemeClr val="accent1"/>
+          </a:fillRef>
+          <a:effectRef idx="2">
+            <a:schemeClr val="accent1"/>
+          </a:effectRef>
+          <a:fontRef idx="minor">
+            <a:schemeClr val="lt1"/>
+          </a:fontRef>
+        </p:style>
+        <p:txBody>
+          <a:bodyPr rtlCol="0" anchor="ctr" wrap="square" lIns="0" rIns="0" tIns="0" bIns="0"/>
+          <a:lstStyle/>
+          <a:p>
+            <a:pPr algn="ctr">
+              <a:defRPr sz="1100" b="1">
+                <a:solidFill>
+                  <a:srgbClr val="6EE7B7"/>
+                </a:solidFill>
+                <a:latin typeface="Prompt"/>
+              </a:defRPr>
+            </a:pPr>
+            <a:r>
+              <a:t>CONTEXT &amp; CHALLENGES</a:t>
+            </a:r>
+          </a:p>
+        </p:txBody>
+      </p:sp>
+      <p:sp>
+        <p:nvSpPr>
+          <p:cNvPr id="4" name="TextBox 3"/>
+          <p:cNvSpPr txBox="1"/>
+          <p:nvPr/>
+        </p:nvSpPr>
+        <p:spPr>
+          <a:xfrm>
+            <a:off x="731520" y="685800"/>
+            <a:ext cx="10728655" cy="868680"/>
+          </a:xfrm>
+          <a:prstGeom prst="rect">
+            <a:avLst/>
+          </a:prstGeom>
+          <a:noFill/>
+        </p:spPr>
+        <p:txBody>
+          <a:bodyPr wrap="square" lIns="0" rIns="0" tIns="0" bIns="0">
+            <a:spAutoFit/>
+          </a:bodyPr>
+          <a:lstStyle/>
+          <a:p>
+            <a:pPr>
+              <a:spcAft>
+                <a:spcPts val="300"/>
+              </a:spcAft>
+              <a:defRPr sz="2600" b="1">
+                <a:solidFill>
+                  <a:srgbClr val="FFFFFF"/>
+                </a:solidFill>
+                <a:latin typeface="Prompt"/>
+              </a:defRPr>
+            </a:pPr>
+            <a:r>
+              <a:t>ที่มา ปัญหา และความจำเป็นของโครงการ</a:t>
+            </a:r>
+          </a:p>
+          <a:p>
+            <a:pPr>
+              <a:defRPr sz="1400">
+                <a:solidFill>
+                  <a:srgbClr val="A7F3D0"/>
+                </a:solidFill>
+                <a:latin typeface="Sarabun"/>
+              </a:defRPr>
+            </a:pPr>
+            <a:r>
+              <a:t>ความท้าทายในการบริหารจัดการและการให้บริการนักท่องเที่ยวในปัจจุบัน</a:t>
+            </a:r>
+          </a:p>
+        </p:txBody>
+      </p:sp>
+      <p:sp>
+        <p:nvSpPr>
+          <p:cNvPr id="5" name="Rounded Rectangle 4"/>
+          <p:cNvSpPr/>
+          <p:nvPr/>
+        </p:nvSpPr>
+        <p:spPr>
+          <a:xfrm>
+            <a:off x="731520" y="1691640"/>
+            <a:ext cx="3429000" cy="4480560"/>
+          </a:xfrm>
+          <a:prstGeom prst="roundRect">
+            <a:avLst/>
+          </a:prstGeom>
+          <a:solidFill>
+            <a:srgbClr val="0E261C"/>
+          </a:solidFill>
+          <a:ln w="19050">
+            <a:solidFill>
+              <a:srgbClr val="52B788"/>
+            </a:solidFill>
+          </a:ln>
+        </p:spPr>
+        <p:style>
+          <a:lnRef idx="1">
+            <a:schemeClr val="accent1"/>
+          </a:lnRef>
+          <a:fillRef idx="3">
+            <a:schemeClr val="accent1"/>
+          </a:fillRef>
+          <a:effectRef idx="2">
+            <a:schemeClr val="accent1"/>
+          </a:effectRef>
+          <a:fontRef idx="minor">
+            <a:schemeClr val="lt1"/>
+          </a:fontRef>
+        </p:style>
+        <p:txBody>
+          <a:bodyPr rtlCol="0" anchor="ctr" wrap="square" lIns="256032" rIns="256032" tIns="256032"/>
+          <a:lstStyle/>
+          <a:p>
+            <a:pPr algn="ctr">
+              <a:spcAft>
+                <a:spcPts val="400"/>
+              </a:spcAft>
+              <a:defRPr sz="2800" b="1">
+                <a:solidFill>
+                  <a:srgbClr val="52B788"/>
+                </a:solidFill>
+                <a:latin typeface="Prompt"/>
+              </a:defRPr>
+            </a:pPr>
+            <a:r>
+              <a:t>01</a:t>
+            </a:r>
+          </a:p>
+          <a:p>
+            <a:pPr>
+              <a:defRPr sz="1800" b="1">
+                <a:solidFill>
+                  <a:srgbClr val="FFFFFF"/>
+                </a:solidFill>
+                <a:latin typeface="Prompt"/>
+              </a:defRPr>
+            </a:pPr>
+            <a:r>
+              <a:t>พื้นที่กว้างใหญ่ &amp; รถจำกัด</a:t>
+            </a:r>
+          </a:p>
+          <a:p>
+            <a:pPr>
+              <a:spcAft>
+                <a:spcPts val="1200"/>
+              </a:spcAft>
+              <a:defRPr sz="1050">
+                <a:solidFill>
+                  <a:srgbClr val="6EE7B7"/>
+                </a:solidFill>
+                <a:latin typeface="Prompt"/>
+              </a:defRPr>
+            </a:pPr>
+            <a:r>
+              <a:t>PHYSICAL &amp; CAPACITY BOTTLENECK</a:t>
+            </a:r>
+          </a:p>
+          <a:p>
+            <a:pPr>
+              <a:spcAft>
+                <a:spcPts val="800"/>
+              </a:spcAft>
+              <a:defRPr sz="1300">
+                <a:solidFill>
+                  <a:srgbClr val="E2E8F0"/>
+                </a:solidFill>
+                <a:latin typeface="Sarabun"/>
+              </a:defRPr>
+            </a:pPr>
+            <a:r>
+              <a:t>• พื้นที่สวนกว้างขวางถึง 6,500 ไร่ มีความลาดชันสูง</a:t>
+            </a:r>
+          </a:p>
+          <a:p>
+            <a:pPr>
+              <a:spcAft>
+                <a:spcPts val="800"/>
+              </a:spcAft>
+              <a:defRPr sz="1300">
+                <a:solidFill>
+                  <a:srgbClr val="E2E8F0"/>
+                </a:solidFill>
+                <a:latin typeface="Sarabun"/>
+              </a:defRPr>
+            </a:pPr>
+            <a:r>
+              <a:t>• จุดท่องเที่ยวสำคัญกระจายตัว: Canopy Walkway, กลุ่มเรือนกระจก, พิพิธภัณฑ์ธรรมชาติวิทยา</a:t>
+            </a:r>
+          </a:p>
+          <a:p>
+            <a:pPr>
+              <a:spcAft>
+                <a:spcPts val="800"/>
+              </a:spcAft>
+              <a:defRPr sz="1300">
+                <a:solidFill>
+                  <a:srgbClr val="E2E8F0"/>
+                </a:solidFill>
+                <a:latin typeface="Sarabun"/>
+              </a:defRPr>
+            </a:pPr>
+            <a:r>
+              <a:t>• เดิมใช้รถเครื่องยนต์สันดาปเพียง 2 คัน ไม่เพียงพอต่อปริมาณนักท่องเที่ยวในฤดูกาลท่องเที่ยว</a:t>
+            </a:r>
+          </a:p>
+          <a:p>
+            <a:pPr>
+              <a:spcAft>
+                <a:spcPts val="800"/>
+              </a:spcAft>
+              <a:defRPr sz="1300">
+                <a:solidFill>
+                  <a:srgbClr val="E2E8F0"/>
+                </a:solidFill>
+                <a:latin typeface="Sarabun"/>
+              </a:defRPr>
+            </a:pPr>
+            <a:r>
+              <a:t>• มีเสียงดังและปล่อยควันไอเสียรบกวนบรรยากาศธรรมชาติ</a:t>
+            </a:r>
+          </a:p>
+        </p:txBody>
+      </p:sp>
+      <p:sp>
+        <p:nvSpPr>
+          <p:cNvPr id="6" name="Rounded Rectangle 5"/>
+          <p:cNvSpPr/>
+          <p:nvPr/>
+        </p:nvSpPr>
+        <p:spPr>
+          <a:xfrm>
+            <a:off x="4389120" y="1691640"/>
+            <a:ext cx="3429000" cy="4480560"/>
+          </a:xfrm>
+          <a:prstGeom prst="roundRect">
+            <a:avLst/>
+          </a:prstGeom>
+          <a:solidFill>
+            <a:srgbClr val="0E261C"/>
+          </a:solidFill>
+          <a:ln w="19050">
+            <a:solidFill>
+              <a:srgbClr val="38BDF8"/>
+            </a:solidFill>
+          </a:ln>
+        </p:spPr>
+        <p:style>
+          <a:lnRef idx="1">
+            <a:schemeClr val="accent1"/>
+          </a:lnRef>
+          <a:fillRef idx="3">
+            <a:schemeClr val="accent1"/>
+          </a:fillRef>
+          <a:effectRef idx="2">
+            <a:schemeClr val="accent1"/>
+          </a:effectRef>
+          <a:fontRef idx="minor">
+            <a:schemeClr val="lt1"/>
+          </a:fontRef>
+        </p:style>
+        <p:txBody>
+          <a:bodyPr rtlCol="0" anchor="ctr" wrap="square" lIns="256032" rIns="256032" tIns="256032"/>
+          <a:lstStyle/>
+          <a:p>
+            <a:pPr algn="ctr">
+              <a:spcAft>
+                <a:spcPts val="400"/>
+              </a:spcAft>
+              <a:defRPr sz="2800" b="1">
+                <a:solidFill>
+                  <a:srgbClr val="38BDF8"/>
+                </a:solidFill>
+                <a:latin typeface="Prompt"/>
+              </a:defRPr>
+            </a:pPr>
+            <a:r>
+              <a:t>02</a:t>
+            </a:r>
+          </a:p>
+          <a:p>
+            <a:pPr>
+              <a:defRPr sz="1800" b="1">
+                <a:solidFill>
+                  <a:srgbClr val="FFFFFF"/>
+                </a:solidFill>
+                <a:latin typeface="Prompt"/>
+              </a:defRPr>
+            </a:pPr>
+            <a:r>
+              <a:t>ไร้ระบบติดตามและคิวสะสม</a:t>
+            </a:r>
+          </a:p>
+          <a:p>
+            <a:pPr>
+              <a:spcAft>
+                <a:spcPts val="1200"/>
+              </a:spcAft>
+              <a:defRPr sz="1050">
+                <a:solidFill>
+                  <a:srgbClr val="6EE7B7"/>
+                </a:solidFill>
+                <a:latin typeface="Prompt"/>
+              </a:defRPr>
+            </a:pPr>
+            <a:r>
+              <a:t>LACK OF REAL-TIME VISIBILITY</a:t>
+            </a:r>
+          </a:p>
+          <a:p>
+            <a:pPr>
+              <a:spcAft>
+                <a:spcPts val="800"/>
+              </a:spcAft>
+              <a:defRPr sz="1300">
+                <a:solidFill>
+                  <a:srgbClr val="E2E8F0"/>
+                </a:solidFill>
+                <a:latin typeface="Sarabun"/>
+              </a:defRPr>
+            </a:pPr>
+            <a:r>
+              <a:t>• นักท่องเที่ยวไม่ทราบเวลาที่รถจะมาถึงสถานี (No ETA)</a:t>
+            </a:r>
+          </a:p>
+          <a:p>
+            <a:pPr>
+              <a:spcAft>
+                <a:spcPts val="800"/>
+              </a:spcAft>
+              <a:defRPr sz="1300">
+                <a:solidFill>
+                  <a:srgbClr val="E2E8F0"/>
+                </a:solidFill>
+                <a:latin typeface="Sarabun"/>
+              </a:defRPr>
+            </a:pPr>
+            <a:r>
+              <a:t>• เกิดการรอคอยอย่างไร้จุดหมาย และความแออัดสะสมหนาแน่นในบางสถานี</a:t>
+            </a:r>
+          </a:p>
+          <a:p>
+            <a:pPr>
+              <a:spcAft>
+                <a:spcPts val="800"/>
+              </a:spcAft>
+              <a:defRPr sz="1300">
+                <a:solidFill>
+                  <a:srgbClr val="E2E8F0"/>
+                </a:solidFill>
+                <a:latin typeface="Sarabun"/>
+              </a:defRPr>
+            </a:pPr>
+            <a:r>
+              <a:t>• คนขับและเจ้าหน้าที่ไม่ทราบจำนวนผู้โดยสารที่รอในสถานีถัดไป</a:t>
+            </a:r>
+          </a:p>
+          <a:p>
+            <a:pPr>
+              <a:spcAft>
+                <a:spcPts val="800"/>
+              </a:spcAft>
+              <a:defRPr sz="1300">
+                <a:solidFill>
+                  <a:srgbClr val="E2E8F0"/>
+                </a:solidFill>
+                <a:latin typeface="Sarabun"/>
+              </a:defRPr>
+            </a:pPr>
+            <a:r>
+              <a:t>• การจัดคิวขึ้นรถยังเป็นแบบดั้งเดิม ขาดความเป็นระเบียบและโปร่งใส</a:t>
+            </a:r>
+          </a:p>
+        </p:txBody>
+      </p:sp>
+      <p:sp>
+        <p:nvSpPr>
+          <p:cNvPr id="7" name="Rounded Rectangle 6"/>
+          <p:cNvSpPr/>
+          <p:nvPr/>
+        </p:nvSpPr>
+        <p:spPr>
+          <a:xfrm>
+            <a:off x="8046720" y="1691640"/>
+            <a:ext cx="3429000" cy="4480560"/>
+          </a:xfrm>
+          <a:prstGeom prst="roundRect">
+            <a:avLst/>
+          </a:prstGeom>
+          <a:solidFill>
+            <a:srgbClr val="0E261C"/>
+          </a:solidFill>
+          <a:ln w="19050">
+            <a:solidFill>
+              <a:srgbClr val="F59E0B"/>
+            </a:solidFill>
+          </a:ln>
+        </p:spPr>
+        <p:style>
+          <a:lnRef idx="1">
+            <a:schemeClr val="accent1"/>
+          </a:lnRef>
+          <a:fillRef idx="3">
+            <a:schemeClr val="accent1"/>
+          </a:fillRef>
+          <a:effectRef idx="2">
+            <a:schemeClr val="accent1"/>
+          </a:effectRef>
+          <a:fontRef idx="minor">
+            <a:schemeClr val="lt1"/>
+          </a:fontRef>
+        </p:style>
+        <p:txBody>
+          <a:bodyPr rtlCol="0" anchor="ctr" wrap="square" lIns="256032" rIns="256032" tIns="256032"/>
+          <a:lstStyle/>
+          <a:p>
+            <a:pPr algn="ctr">
+              <a:spcAft>
+                <a:spcPts val="400"/>
+              </a:spcAft>
+              <a:defRPr sz="2800" b="1">
+                <a:solidFill>
+                  <a:srgbClr val="F59E0B"/>
+                </a:solidFill>
+                <a:latin typeface="Prompt"/>
+              </a:defRPr>
+            </a:pPr>
+            <a:r>
+              <a:t>03</a:t>
+            </a:r>
+          </a:p>
+          <a:p>
+            <a:pPr>
+              <a:defRPr sz="1800" b="1">
+                <a:solidFill>
+                  <a:srgbClr val="FFFFFF"/>
+                </a:solidFill>
+                <a:latin typeface="Prompt"/>
+              </a:defRPr>
+            </a:pPr>
+            <a:r>
+              <a:t>ขาดข้อมูลสถิติเพื่อวางแผน</a:t>
+            </a:r>
+          </a:p>
+          <a:p>
+            <a:pPr>
+              <a:spcAft>
+                <a:spcPts val="1200"/>
+              </a:spcAft>
+              <a:defRPr sz="1050">
+                <a:solidFill>
+                  <a:srgbClr val="6EE7B7"/>
+                </a:solidFill>
+                <a:latin typeface="Prompt"/>
+              </a:defRPr>
+            </a:pPr>
+            <a:r>
+              <a:t>NO DATA-DRIVEN ANALYTICS</a:t>
+            </a:r>
+          </a:p>
+          <a:p>
+            <a:pPr>
+              <a:spcAft>
+                <a:spcPts val="800"/>
+              </a:spcAft>
+              <a:defRPr sz="1300">
+                <a:solidFill>
+                  <a:srgbClr val="E2E8F0"/>
+                </a:solidFill>
+                <a:latin typeface="Sarabun"/>
+              </a:defRPr>
+            </a:pPr>
+            <a:r>
+              <a:t>• ขาดระบบจัดเก็บข้อมูลการใช้บริการแบบดิจิทัล</a:t>
+            </a:r>
+          </a:p>
+          <a:p>
+            <a:pPr>
+              <a:spcAft>
+                <a:spcPts val="800"/>
+              </a:spcAft>
+              <a:defRPr sz="1300">
+                <a:solidFill>
+                  <a:srgbClr val="E2E8F0"/>
+                </a:solidFill>
+                <a:latin typeface="Sarabun"/>
+              </a:defRPr>
+            </a:pPr>
+            <a:r>
+              <a:t>• ไม่มีข้อมูลเชิงพื้นที่ (Spatial Data) ว่าจุดใดมีความหนาแน่นสูงสุดในแต่ละช่วงเวลา</a:t>
+            </a:r>
+          </a:p>
+          <a:p>
+            <a:pPr>
+              <a:spcAft>
+                <a:spcPts val="800"/>
+              </a:spcAft>
+              <a:defRPr sz="1300">
+                <a:solidFill>
+                  <a:srgbClr val="E2E8F0"/>
+                </a:solidFill>
+                <a:latin typeface="Sarabun"/>
+              </a:defRPr>
+            </a:pPr>
+            <a:r>
+              <a:t>• ผู้บริหารไม่สามารถนำข้อมูลมาวิเคราะห์เพื่อจัดสรรทรัพยากรได้อย่างตรงจุด</a:t>
+            </a:r>
+          </a:p>
+          <a:p>
+            <a:pPr>
+              <a:spcAft>
+                <a:spcPts val="800"/>
+              </a:spcAft>
+              <a:defRPr sz="1300">
+                <a:solidFill>
+                  <a:srgbClr val="E2E8F0"/>
+                </a:solidFill>
+                <a:latin typeface="Sarabun"/>
+              </a:defRPr>
+            </a:pPr>
+            <a:r>
+              <a:t>• ระบบตั๋วและการตรวจสอบยังไม่เชื่อมโยงกับระบบหลังบ้าน</a:t>
+            </a:r>
+          </a:p>
+        </p:txBody>
+      </p:sp>
     </p:spTree>
   </p:cSld>
   <p:clrMapOvr>
@@ -4780,7 +7408,7 @@
 </p:sld>
 </file>
 
-<file path=ppt/slides/slide4.xml><?xml version="1.0" encoding="utf-8"?>
+<file path=ppt/slides/slide3.xml><?xml version="1.0" encoding="utf-8"?>
 <p:sld xmlns:a="http://schemas.openxmlformats.org/drawingml/2006/main" xmlns:p="http://schemas.openxmlformats.org/presentationml/2006/main" xmlns:r="http://schemas.openxmlformats.org/officeDocument/2006/relationships">
   <p:cSld>
     <p:spTree>
@@ -4792,7 +7420,7 @@
       <p:grpSpPr/>
       <p:pic>
         <p:nvPicPr>
-          <p:cNvPr id="2" name="Picture 1" descr="slide_04.jpg"/>
+          <p:cNvPr id="2" name="Picture 1" descr="dark_topographic_bg.jpg"/>
           <p:cNvPicPr>
             <a:picLocks noChangeAspect="1"/>
           </p:cNvPicPr>
@@ -4814,6 +7442,491 @@
           </a:prstGeom>
         </p:spPr>
       </p:pic>
+      <p:sp>
+        <p:nvSpPr>
+          <p:cNvPr id="3" name="Rounded Rectangle 2"/>
+          <p:cNvSpPr/>
+          <p:nvPr/>
+        </p:nvSpPr>
+        <p:spPr>
+          <a:xfrm>
+            <a:off x="731520" y="365760"/>
+            <a:ext cx="3200400" cy="320040"/>
+          </a:xfrm>
+          <a:prstGeom prst="roundRect">
+            <a:avLst/>
+          </a:prstGeom>
+          <a:solidFill>
+            <a:srgbClr val="123024"/>
+          </a:solidFill>
+          <a:ln w="12700">
+            <a:solidFill>
+              <a:srgbClr val="52B788"/>
+            </a:solidFill>
+          </a:ln>
+        </p:spPr>
+        <p:style>
+          <a:lnRef idx="1">
+            <a:schemeClr val="accent1"/>
+          </a:lnRef>
+          <a:fillRef idx="3">
+            <a:schemeClr val="accent1"/>
+          </a:fillRef>
+          <a:effectRef idx="2">
+            <a:schemeClr val="accent1"/>
+          </a:effectRef>
+          <a:fontRef idx="minor">
+            <a:schemeClr val="lt1"/>
+          </a:fontRef>
+        </p:style>
+        <p:txBody>
+          <a:bodyPr rtlCol="0" anchor="ctr" wrap="square" lIns="0" rIns="0" tIns="0" bIns="0"/>
+          <a:lstStyle/>
+          <a:p>
+            <a:pPr algn="ctr">
+              <a:defRPr sz="1100" b="1">
+                <a:solidFill>
+                  <a:srgbClr val="6EE7B7"/>
+                </a:solidFill>
+                <a:latin typeface="Prompt"/>
+              </a:defRPr>
+            </a:pPr>
+            <a:r>
+              <a:t>STRATEGY &amp; VISION</a:t>
+            </a:r>
+          </a:p>
+        </p:txBody>
+      </p:sp>
+      <p:sp>
+        <p:nvSpPr>
+          <p:cNvPr id="4" name="TextBox 3"/>
+          <p:cNvSpPr txBox="1"/>
+          <p:nvPr/>
+        </p:nvSpPr>
+        <p:spPr>
+          <a:xfrm>
+            <a:off x="731520" y="685800"/>
+            <a:ext cx="10728655" cy="868680"/>
+          </a:xfrm>
+          <a:prstGeom prst="rect">
+            <a:avLst/>
+          </a:prstGeom>
+          <a:noFill/>
+        </p:spPr>
+        <p:txBody>
+          <a:bodyPr wrap="square" lIns="0" rIns="0" tIns="0" bIns="0">
+            <a:spAutoFit/>
+          </a:bodyPr>
+          <a:lstStyle/>
+          <a:p>
+            <a:pPr>
+              <a:spcAft>
+                <a:spcPts val="300"/>
+              </a:spcAft>
+              <a:defRPr sz="2600" b="1">
+                <a:solidFill>
+                  <a:srgbClr val="FFFFFF"/>
+                </a:solidFill>
+                <a:latin typeface="Prompt"/>
+              </a:defRPr>
+            </a:pPr>
+            <a:r>
+              <a:t>วิสัยทัศน์และวัตถุประสงค์โครงการ</a:t>
+            </a:r>
+          </a:p>
+          <a:p>
+            <a:pPr>
+              <a:defRPr sz="1400">
+                <a:solidFill>
+                  <a:srgbClr val="A7F3D0"/>
+                </a:solidFill>
+                <a:latin typeface="Sarabun"/>
+              </a:defRPr>
+            </a:pPr>
+            <a:r>
+              <a:t>มุ่งสู่สวนพฤกษศาสตร์อัจฉริยะ เป็นมิตรกับสิ่งแวดล้อม และยั่งยืน</a:t>
+            </a:r>
+          </a:p>
+        </p:txBody>
+      </p:sp>
+      <p:sp>
+        <p:nvSpPr>
+          <p:cNvPr id="5" name="Rounded Rectangle 4"/>
+          <p:cNvSpPr/>
+          <p:nvPr/>
+        </p:nvSpPr>
+        <p:spPr>
+          <a:xfrm>
+            <a:off x="731520" y="1691640"/>
+            <a:ext cx="5486400" cy="4480560"/>
+          </a:xfrm>
+          <a:prstGeom prst="roundRect">
+            <a:avLst/>
+          </a:prstGeom>
+          <a:solidFill>
+            <a:srgbClr val="0E261C"/>
+          </a:solidFill>
+          <a:ln w="19050">
+            <a:solidFill>
+              <a:srgbClr val="52B788"/>
+            </a:solidFill>
+          </a:ln>
+        </p:spPr>
+        <p:style>
+          <a:lnRef idx="1">
+            <a:schemeClr val="accent1"/>
+          </a:lnRef>
+          <a:fillRef idx="3">
+            <a:schemeClr val="accent1"/>
+          </a:fillRef>
+          <a:effectRef idx="2">
+            <a:schemeClr val="accent1"/>
+          </a:effectRef>
+          <a:fontRef idx="minor">
+            <a:schemeClr val="lt1"/>
+          </a:fontRef>
+        </p:style>
+        <p:txBody>
+          <a:bodyPr rtlCol="0" anchor="ctr" wrap="square" lIns="320040" rIns="320040" tIns="320040"/>
+          <a:lstStyle/>
+          <a:p>
+            <a:pPr algn="ctr">
+              <a:spcAft>
+                <a:spcPts val="1600"/>
+              </a:spcAft>
+              <a:defRPr sz="2000" b="1">
+                <a:solidFill>
+                  <a:srgbClr val="6EE7B7"/>
+                </a:solidFill>
+                <a:latin typeface="Prompt"/>
+              </a:defRPr>
+            </a:pPr>
+            <a:r>
+              <a:t>วัตถุประสงค์หลัก (Core Objectives)</a:t>
+            </a:r>
+          </a:p>
+          <a:p>
+            <a:pPr>
+              <a:spcAft>
+                <a:spcPts val="200"/>
+              </a:spcAft>
+              <a:defRPr sz="1600" b="1">
+                <a:solidFill>
+                  <a:srgbClr val="FFFFFF"/>
+                </a:solidFill>
+                <a:latin typeface="Prompt"/>
+              </a:defRPr>
+            </a:pPr>
+            <a:r>
+              <a:t>1. ศึกษาวิเคราะห์และออกแบบระบบสารสนเทศ</a:t>
+            </a:r>
+          </a:p>
+          <a:p>
+            <a:pPr>
+              <a:spcAft>
+                <a:spcPts val="1400"/>
+              </a:spcAft>
+              <a:defRPr sz="1300">
+                <a:solidFill>
+                  <a:srgbClr val="E2E8F0"/>
+                </a:solidFill>
+                <a:latin typeface="Sarabun"/>
+              </a:defRPr>
+            </a:pPr>
+            <a:r>
+              <a:t>วิเคราะห์ ออกแบบระบบฐานข้อมูล และสถาปัตยกรรมสารสนเทศรถนำเที่ยวไฟฟ้าเพื่อการบริหารจัดการที่มีประสิทธิภาพสูงสุด</a:t>
+            </a:r>
+          </a:p>
+          <a:p>
+            <a:pPr>
+              <a:spcAft>
+                <a:spcPts val="200"/>
+              </a:spcAft>
+              <a:defRPr sz="1600" b="1">
+                <a:solidFill>
+                  <a:srgbClr val="FFFFFF"/>
+                </a:solidFill>
+                <a:latin typeface="Prompt"/>
+              </a:defRPr>
+            </a:pPr>
+            <a:r>
+              <a:t>2. พัฒนาแอปพลิเคชันจัดการรถนำเที่ยวครบวงจร</a:t>
+            </a:r>
+          </a:p>
+          <a:p>
+            <a:pPr>
+              <a:spcAft>
+                <a:spcPts val="1400"/>
+              </a:spcAft>
+              <a:defRPr sz="1300">
+                <a:solidFill>
+                  <a:srgbClr val="E2E8F0"/>
+                </a:solidFill>
+                <a:latin typeface="Sarabun"/>
+              </a:defRPr>
+            </a:pPr>
+            <a:r>
+              <a:t>ครอบคลุมทั้งนักท่องเที่ยว (Web/Mobile App), คนขับรถ (Driver App), จุดบริการ (Kiosk) และผู้บริหาร (Dashboard)</a:t>
+            </a:r>
+          </a:p>
+          <a:p>
+            <a:pPr>
+              <a:spcAft>
+                <a:spcPts val="200"/>
+              </a:spcAft>
+              <a:defRPr sz="1600" b="1">
+                <a:solidFill>
+                  <a:srgbClr val="FFFFFF"/>
+                </a:solidFill>
+                <a:latin typeface="Prompt"/>
+              </a:defRPr>
+            </a:pPr>
+            <a:r>
+              <a:t>3. บูรณาการข้อมูลการท่องเที่ยวเชิงพื้นที่</a:t>
+            </a:r>
+          </a:p>
+          <a:p>
+            <a:pPr>
+              <a:spcAft>
+                <a:spcPts val="1400"/>
+              </a:spcAft>
+              <a:defRPr sz="1300">
+                <a:solidFill>
+                  <a:srgbClr val="E2E8F0"/>
+                </a:solidFill>
+                <a:latin typeface="Sarabun"/>
+              </a:defRPr>
+            </a:pPr>
+            <a:r>
+              <a:t>เชื่อมโยงเส้นทาง จุดท่องเที่ยว แนะนำพรรณไม้แบบ Geofences และจัดทำรายงานวิเคราะห์แบบเรียลไทม์</a:t>
+            </a:r>
+          </a:p>
+        </p:txBody>
+      </p:sp>
+      <p:sp>
+        <p:nvSpPr>
+          <p:cNvPr id="6" name="Rounded Rectangle 5"/>
+          <p:cNvSpPr/>
+          <p:nvPr/>
+        </p:nvSpPr>
+        <p:spPr>
+          <a:xfrm>
+            <a:off x="6400800" y="1691640"/>
+            <a:ext cx="5059375" cy="2057400"/>
+          </a:xfrm>
+          <a:prstGeom prst="roundRect">
+            <a:avLst/>
+          </a:prstGeom>
+          <a:solidFill>
+            <a:srgbClr val="0E261C"/>
+          </a:solidFill>
+          <a:ln w="19050">
+            <a:solidFill>
+              <a:srgbClr val="52B788"/>
+            </a:solidFill>
+          </a:ln>
+        </p:spPr>
+        <p:style>
+          <a:lnRef idx="1">
+            <a:schemeClr val="accent1"/>
+          </a:lnRef>
+          <a:fillRef idx="3">
+            <a:schemeClr val="accent1"/>
+          </a:fillRef>
+          <a:effectRef idx="2">
+            <a:schemeClr val="accent1"/>
+          </a:effectRef>
+          <a:fontRef idx="minor">
+            <a:schemeClr val="lt1"/>
+          </a:fontRef>
+        </p:style>
+        <p:txBody>
+          <a:bodyPr rtlCol="0" anchor="ctr"/>
+          <a:lstStyle/>
+          <a:p>
+            <a:pPr algn="ctr"/>
+          </a:p>
+        </p:txBody>
+      </p:sp>
+      <p:pic>
+        <p:nvPicPr>
+          <p:cNvPr id="7" name="Picture 6" descr="ev_cart_side.jpg"/>
+          <p:cNvPicPr>
+            <a:picLocks noChangeAspect="1"/>
+          </p:cNvPicPr>
+          <p:nvPr/>
+        </p:nvPicPr>
+        <p:blipFill>
+          <a:blip r:embed="rId3"/>
+          <a:stretch>
+            <a:fillRect/>
+          </a:stretch>
+        </p:blipFill>
+        <p:spPr>
+          <a:xfrm>
+            <a:off x="6537960" y="1783080"/>
+            <a:ext cx="2286000" cy="1874519"/>
+          </a:xfrm>
+          <a:prstGeom prst="rect">
+            <a:avLst/>
+          </a:prstGeom>
+        </p:spPr>
+      </p:pic>
+      <p:sp>
+        <p:nvSpPr>
+          <p:cNvPr id="8" name="TextBox 7"/>
+          <p:cNvSpPr txBox="1"/>
+          <p:nvPr/>
+        </p:nvSpPr>
+        <p:spPr>
+          <a:xfrm>
+            <a:off x="8961120" y="1783080"/>
+            <a:ext cx="2377440" cy="1828800"/>
+          </a:xfrm>
+          <a:prstGeom prst="rect">
+            <a:avLst/>
+          </a:prstGeom>
+          <a:noFill/>
+        </p:spPr>
+        <p:txBody>
+          <a:bodyPr wrap="square" lIns="0" rIns="0" tIns="0" bIns="0">
+            <a:spAutoFit/>
+          </a:bodyPr>
+          <a:lstStyle/>
+          <a:p>
+            <a:pPr>
+              <a:defRPr sz="1600" b="1">
+                <a:solidFill>
+                  <a:srgbClr val="FFFFFF"/>
+                </a:solidFill>
+                <a:latin typeface="Prompt"/>
+              </a:defRPr>
+            </a:pPr>
+            <a:r>
+              <a:t>รถนำเที่ยวไฟฟ้าจริง</a:t>
+            </a:r>
+          </a:p>
+          <a:p>
+            <a:pPr>
+              <a:defRPr sz="1200">
+                <a:solidFill>
+                  <a:srgbClr val="E2E8F0"/>
+                </a:solidFill>
+                <a:latin typeface="Sarabun"/>
+              </a:defRPr>
+            </a:pPr>
+            <a:r>
+              <a:t>ขับเคลื่อนด้วยพลังงานสะอาด 100% ไร้เสียง ไร้ควัน เป็นมิตรต่อพรรณไม้ พร้อมเชื่อมต่อแท็บเล็ตดิจิทัล</a:t>
+            </a:r>
+          </a:p>
+        </p:txBody>
+      </p:sp>
+      <p:sp>
+        <p:nvSpPr>
+          <p:cNvPr id="9" name="Rounded Rectangle 8"/>
+          <p:cNvSpPr/>
+          <p:nvPr/>
+        </p:nvSpPr>
+        <p:spPr>
+          <a:xfrm>
+            <a:off x="6400800" y="3931920"/>
+            <a:ext cx="5059375" cy="2240280"/>
+          </a:xfrm>
+          <a:prstGeom prst="roundRect">
+            <a:avLst/>
+          </a:prstGeom>
+          <a:solidFill>
+            <a:srgbClr val="0E261C"/>
+          </a:solidFill>
+          <a:ln w="19050">
+            <a:solidFill>
+              <a:srgbClr val="52B788"/>
+            </a:solidFill>
+          </a:ln>
+        </p:spPr>
+        <p:style>
+          <a:lnRef idx="1">
+            <a:schemeClr val="accent1"/>
+          </a:lnRef>
+          <a:fillRef idx="3">
+            <a:schemeClr val="accent1"/>
+          </a:fillRef>
+          <a:effectRef idx="2">
+            <a:schemeClr val="accent1"/>
+          </a:effectRef>
+          <a:fontRef idx="minor">
+            <a:schemeClr val="lt1"/>
+          </a:fontRef>
+        </p:style>
+        <p:txBody>
+          <a:bodyPr rtlCol="0" anchor="ctr" wrap="square" lIns="274320" rIns="274320" tIns="201168"/>
+          <a:lstStyle/>
+          <a:p>
+            <a:pPr algn="ctr">
+              <a:spcAft>
+                <a:spcPts val="800"/>
+              </a:spcAft>
+              <a:defRPr sz="1700" b="1">
+                <a:solidFill>
+                  <a:srgbClr val="6EE7B7"/>
+                </a:solidFill>
+                <a:latin typeface="Prompt"/>
+              </a:defRPr>
+            </a:pPr>
+            <a:r>
+              <a:t>เป้าหมายเชิงยุทธศาสตร์และความยั่งยืน</a:t>
+            </a:r>
+          </a:p>
+          <a:p>
+            <a:pPr>
+              <a:spcAft>
+                <a:spcPts val="600"/>
+              </a:spcAft>
+              <a:defRPr sz="1250">
+                <a:solidFill>
+                  <a:srgbClr val="E2E8F0"/>
+                </a:solidFill>
+                <a:latin typeface="Sarabun"/>
+              </a:defRPr>
+            </a:pPr>
+            <a:r>
+              <a:t>1. Green EV Transition (Zero Emission): ปรับเปลี่ยนสู่รถพลังงานไฟฟ้า 100% รักษาระบบนิเวศพฤกษศาสตร์</a:t>
+            </a:r>
+          </a:p>
+          <a:p>
+            <a:pPr>
+              <a:spcAft>
+                <a:spcPts val="600"/>
+              </a:spcAft>
+              <a:defRPr sz="1250">
+                <a:solidFill>
+                  <a:srgbClr val="E2E8F0"/>
+                </a:solidFill>
+                <a:latin typeface="Sarabun"/>
+              </a:defRPr>
+            </a:pPr>
+            <a:r>
+              <a:t>2. Smart Digital Tourism Experience: นักท่องเที่ยวเข้าถึงข้อมูลสะดวกรวดเร็วผ่าน e-Ticket, Live Tracking</a:t>
+            </a:r>
+          </a:p>
+          <a:p>
+            <a:pPr>
+              <a:spcAft>
+                <a:spcPts val="600"/>
+              </a:spcAft>
+              <a:defRPr sz="1250">
+                <a:solidFill>
+                  <a:srgbClr val="E2E8F0"/>
+                </a:solidFill>
+                <a:latin typeface="Sarabun"/>
+              </a:defRPr>
+            </a:pPr>
+            <a:r>
+              <a:t>3. Data-Driven Spatial Management: ผู้บริหารมี Real-time Dashboard วางแผนพัฒนาเชิงพื้นที่ได้อย่างแม่นยำ</a:t>
+            </a:r>
+          </a:p>
+        </p:txBody>
+      </p:sp>
     </p:spTree>
   </p:cSld>
   <p:clrMapOvr>
@@ -4822,7 +7935,7 @@
 </p:sld>
 </file>
 
-<file path=ppt/slides/slide5.xml><?xml version="1.0" encoding="utf-8"?>
+<file path=ppt/slides/slide4.xml><?xml version="1.0" encoding="utf-8"?>
 <p:sld xmlns:a="http://schemas.openxmlformats.org/drawingml/2006/main" xmlns:p="http://schemas.openxmlformats.org/presentationml/2006/main" xmlns:r="http://schemas.openxmlformats.org/officeDocument/2006/relationships">
   <p:cSld>
     <p:spTree>
@@ -4834,7 +7947,7 @@
       <p:grpSpPr/>
       <p:pic>
         <p:nvPicPr>
-          <p:cNvPr id="2" name="Picture 1" descr="slide_05.jpg"/>
+          <p:cNvPr id="2" name="Picture 1" descr="dark_topographic_bg.jpg"/>
           <p:cNvPicPr>
             <a:picLocks noChangeAspect="1"/>
           </p:cNvPicPr>
@@ -4856,6 +7969,397 @@
           </a:prstGeom>
         </p:spPr>
       </p:pic>
+      <p:sp>
+        <p:nvSpPr>
+          <p:cNvPr id="3" name="Rounded Rectangle 2"/>
+          <p:cNvSpPr/>
+          <p:nvPr/>
+        </p:nvSpPr>
+        <p:spPr>
+          <a:xfrm>
+            <a:off x="731520" y="365760"/>
+            <a:ext cx="3200400" cy="320040"/>
+          </a:xfrm>
+          <a:prstGeom prst="roundRect">
+            <a:avLst/>
+          </a:prstGeom>
+          <a:solidFill>
+            <a:srgbClr val="123024"/>
+          </a:solidFill>
+          <a:ln w="12700">
+            <a:solidFill>
+              <a:srgbClr val="52B788"/>
+            </a:solidFill>
+          </a:ln>
+        </p:spPr>
+        <p:style>
+          <a:lnRef idx="1">
+            <a:schemeClr val="accent1"/>
+          </a:lnRef>
+          <a:fillRef idx="3">
+            <a:schemeClr val="accent1"/>
+          </a:fillRef>
+          <a:effectRef idx="2">
+            <a:schemeClr val="accent1"/>
+          </a:effectRef>
+          <a:fontRef idx="minor">
+            <a:schemeClr val="lt1"/>
+          </a:fontRef>
+        </p:style>
+        <p:txBody>
+          <a:bodyPr rtlCol="0" anchor="ctr" wrap="square" lIns="0" rIns="0" tIns="0" bIns="0"/>
+          <a:lstStyle/>
+          <a:p>
+            <a:pPr algn="ctr">
+              <a:defRPr sz="1100" b="1">
+                <a:solidFill>
+                  <a:srgbClr val="6EE7B7"/>
+                </a:solidFill>
+                <a:latin typeface="Prompt"/>
+              </a:defRPr>
+            </a:pPr>
+            <a:r>
+              <a:t>ARCHITECTURE</a:t>
+            </a:r>
+          </a:p>
+        </p:txBody>
+      </p:sp>
+      <p:sp>
+        <p:nvSpPr>
+          <p:cNvPr id="4" name="TextBox 3"/>
+          <p:cNvSpPr txBox="1"/>
+          <p:nvPr/>
+        </p:nvSpPr>
+        <p:spPr>
+          <a:xfrm>
+            <a:off x="731520" y="685800"/>
+            <a:ext cx="10728655" cy="868680"/>
+          </a:xfrm>
+          <a:prstGeom prst="rect">
+            <a:avLst/>
+          </a:prstGeom>
+          <a:noFill/>
+        </p:spPr>
+        <p:txBody>
+          <a:bodyPr wrap="square" lIns="0" rIns="0" tIns="0" bIns="0">
+            <a:spAutoFit/>
+          </a:bodyPr>
+          <a:lstStyle/>
+          <a:p>
+            <a:pPr>
+              <a:spcAft>
+                <a:spcPts val="300"/>
+              </a:spcAft>
+              <a:defRPr sz="2600" b="1">
+                <a:solidFill>
+                  <a:srgbClr val="FFFFFF"/>
+                </a:solidFill>
+                <a:latin typeface="Prompt"/>
+              </a:defRPr>
+            </a:pPr>
+            <a:r>
+              <a:t>สถาปัตยกรรมระบบโดยรวม (4-Tier Architecture)</a:t>
+            </a:r>
+          </a:p>
+          <a:p>
+            <a:pPr>
+              <a:defRPr sz="1400">
+                <a:solidFill>
+                  <a:srgbClr val="A7F3D0"/>
+                </a:solidFill>
+                <a:latin typeface="Sarabun"/>
+              </a:defRPr>
+            </a:pPr>
+            <a:r>
+              <a:t>โครงสร้างระบบเชื่อมโยงระหว่างผู้ใช้ ระบบประมวลผล IoT และฐานข้อมูลอย่างมีเสถียรภาพ</a:t>
+            </a:r>
+          </a:p>
+        </p:txBody>
+      </p:sp>
+      <p:sp>
+        <p:nvSpPr>
+          <p:cNvPr id="5" name="Rounded Rectangle 4"/>
+          <p:cNvSpPr/>
+          <p:nvPr/>
+        </p:nvSpPr>
+        <p:spPr>
+          <a:xfrm>
+            <a:off x="731520" y="1691640"/>
+            <a:ext cx="10728655" cy="1051560"/>
+          </a:xfrm>
+          <a:prstGeom prst="roundRect">
+            <a:avLst/>
+          </a:prstGeom>
+          <a:solidFill>
+            <a:srgbClr val="0E261C"/>
+          </a:solidFill>
+          <a:ln w="19050">
+            <a:solidFill>
+              <a:srgbClr val="38BDF8"/>
+            </a:solidFill>
+          </a:ln>
+        </p:spPr>
+        <p:style>
+          <a:lnRef idx="1">
+            <a:schemeClr val="accent1"/>
+          </a:lnRef>
+          <a:fillRef idx="3">
+            <a:schemeClr val="accent1"/>
+          </a:fillRef>
+          <a:effectRef idx="2">
+            <a:schemeClr val="accent1"/>
+          </a:effectRef>
+          <a:fontRef idx="minor">
+            <a:schemeClr val="lt1"/>
+          </a:fontRef>
+        </p:style>
+        <p:txBody>
+          <a:bodyPr rtlCol="0" anchor="ctr" wrap="square" lIns="274320" rIns="274320" tIns="109728"/>
+          <a:lstStyle/>
+          <a:p>
+            <a:pPr algn="ctr">
+              <a:spcAft>
+                <a:spcPts val="300"/>
+              </a:spcAft>
+              <a:defRPr sz="1500" b="1">
+                <a:solidFill>
+                  <a:srgbClr val="38BDF8"/>
+                </a:solidFill>
+                <a:latin typeface="Prompt"/>
+              </a:defRPr>
+            </a:pPr>
+            <a:r>
+              <a:t>LAYER 1: Frontend Channels (Omnichannel)</a:t>
+            </a:r>
+          </a:p>
+          <a:p>
+            <a:pPr>
+              <a:defRPr sz="1250">
+                <a:solidFill>
+                  <a:srgbClr val="E2E8F0"/>
+                </a:solidFill>
+                <a:latin typeface="Sarabun"/>
+              </a:defRPr>
+            </a:pPr>
+            <a:r>
+              <a:t>Web App (จองตั๋วออนไลน์ล่วงหน้า)   •   Mobile App (iOS / Android สำหรับนักท่องเที่ยว)   •   Kiosk Touchscreen (ตู้ซื้อตั๋วหน้าสถานี)   •   Driver App (แอปคนขับบน Tablet ประจำรถ)</a:t>
+            </a:r>
+          </a:p>
+        </p:txBody>
+      </p:sp>
+      <p:sp>
+        <p:nvSpPr>
+          <p:cNvPr id="6" name="Rounded Rectangle 5"/>
+          <p:cNvSpPr/>
+          <p:nvPr/>
+        </p:nvSpPr>
+        <p:spPr>
+          <a:xfrm>
+            <a:off x="731520" y="2834640"/>
+            <a:ext cx="10728655" cy="1051560"/>
+          </a:xfrm>
+          <a:prstGeom prst="roundRect">
+            <a:avLst/>
+          </a:prstGeom>
+          <a:solidFill>
+            <a:srgbClr val="0E261C"/>
+          </a:solidFill>
+          <a:ln w="19050">
+            <a:solidFill>
+              <a:srgbClr val="52B788"/>
+            </a:solidFill>
+          </a:ln>
+        </p:spPr>
+        <p:style>
+          <a:lnRef idx="1">
+            <a:schemeClr val="accent1"/>
+          </a:lnRef>
+          <a:fillRef idx="3">
+            <a:schemeClr val="accent1"/>
+          </a:fillRef>
+          <a:effectRef idx="2">
+            <a:schemeClr val="accent1"/>
+          </a:effectRef>
+          <a:fontRef idx="minor">
+            <a:schemeClr val="lt1"/>
+          </a:fontRef>
+        </p:style>
+        <p:txBody>
+          <a:bodyPr rtlCol="0" anchor="ctr" wrap="square" lIns="274320" rIns="274320" tIns="109728"/>
+          <a:lstStyle/>
+          <a:p>
+            <a:pPr algn="ctr">
+              <a:spcAft>
+                <a:spcPts val="300"/>
+              </a:spcAft>
+              <a:defRPr sz="1500" b="1">
+                <a:solidFill>
+                  <a:srgbClr val="52B788"/>
+                </a:solidFill>
+                <a:latin typeface="Prompt"/>
+              </a:defRPr>
+            </a:pPr>
+            <a:r>
+              <a:t>LAYER 2: API Gateway &amp; Backend Services (Core Logic)</a:t>
+            </a:r>
+          </a:p>
+          <a:p>
+            <a:pPr>
+              <a:defRPr sz="1250">
+                <a:solidFill>
+                  <a:srgbClr val="E2E8F0"/>
+                </a:solidFill>
+                <a:latin typeface="Sarabun"/>
+              </a:defRPr>
+            </a:pPr>
+            <a:r>
+              <a:t>API Gateway: Authentication, Request Routing, Rate Limiting   •   Ticket Service (ระบบจำหน่ายตั๋วและ e-Ticket)   •   Bus Tracking Service (คำนวณตำแหน่งและ Dynamic ETA)   •   Station Service (จัดการ 6 สถานี)  |  Payment Service (เชื่อมต่อ Gateway)</a:t>
+            </a:r>
+          </a:p>
+        </p:txBody>
+      </p:sp>
+      <p:sp>
+        <p:nvSpPr>
+          <p:cNvPr id="7" name="Rounded Rectangle 6"/>
+          <p:cNvSpPr/>
+          <p:nvPr/>
+        </p:nvSpPr>
+        <p:spPr>
+          <a:xfrm>
+            <a:off x="731520" y="3977639"/>
+            <a:ext cx="10728655" cy="1051560"/>
+          </a:xfrm>
+          <a:prstGeom prst="roundRect">
+            <a:avLst/>
+          </a:prstGeom>
+          <a:solidFill>
+            <a:srgbClr val="0E261C"/>
+          </a:solidFill>
+          <a:ln w="19050">
+            <a:solidFill>
+              <a:srgbClr val="6EE7B7"/>
+            </a:solidFill>
+          </a:ln>
+        </p:spPr>
+        <p:style>
+          <a:lnRef idx="1">
+            <a:schemeClr val="accent1"/>
+          </a:lnRef>
+          <a:fillRef idx="3">
+            <a:schemeClr val="accent1"/>
+          </a:fillRef>
+          <a:effectRef idx="2">
+            <a:schemeClr val="accent1"/>
+          </a:effectRef>
+          <a:fontRef idx="minor">
+            <a:schemeClr val="lt1"/>
+          </a:fontRef>
+        </p:style>
+        <p:txBody>
+          <a:bodyPr rtlCol="0" anchor="ctr" wrap="square" lIns="274320" rIns="274320" tIns="109728"/>
+          <a:lstStyle/>
+          <a:p>
+            <a:pPr algn="ctr">
+              <a:spcAft>
+                <a:spcPts val="300"/>
+              </a:spcAft>
+              <a:defRPr sz="1500" b="1">
+                <a:solidFill>
+                  <a:srgbClr val="6EE7B7"/>
+                </a:solidFill>
+                <a:latin typeface="Prompt"/>
+              </a:defRPr>
+            </a:pPr>
+            <a:r>
+              <a:t>LAYER 3: Realtime &amp; IoT Layer (Live Streaming)</a:t>
+            </a:r>
+          </a:p>
+          <a:p>
+            <a:pPr>
+              <a:defRPr sz="1250">
+                <a:solidFill>
+                  <a:srgbClr val="E2E8F0"/>
+                </a:solidFill>
+                <a:latin typeface="Sarabun"/>
+              </a:defRPr>
+            </a:pPr>
+            <a:r>
+              <a:t>GPS Units บนรถ 3 คัน: สตรีมพิกัดตำแหน่ง Real-time ทุกๆ 5 วินาที ผ่าน 4G   •   QR / RFID Scanner: สแกนตรวจตั๋ว Check-in ขึ้นรถทันทีภายใน 1 วินาที   •   WebSocket Server: กระจายพิกัดและสถานะคิวแบบ Two-way Streaming สดๆ</a:t>
+            </a:r>
+          </a:p>
+        </p:txBody>
+      </p:sp>
+      <p:sp>
+        <p:nvSpPr>
+          <p:cNvPr id="8" name="Rounded Rectangle 7"/>
+          <p:cNvSpPr/>
+          <p:nvPr/>
+        </p:nvSpPr>
+        <p:spPr>
+          <a:xfrm>
+            <a:off x="731520" y="5120640"/>
+            <a:ext cx="10728655" cy="1051560"/>
+          </a:xfrm>
+          <a:prstGeom prst="roundRect">
+            <a:avLst/>
+          </a:prstGeom>
+          <a:solidFill>
+            <a:srgbClr val="0E261C"/>
+          </a:solidFill>
+          <a:ln w="19050">
+            <a:solidFill>
+              <a:srgbClr val="F59E0B"/>
+            </a:solidFill>
+          </a:ln>
+        </p:spPr>
+        <p:style>
+          <a:lnRef idx="1">
+            <a:schemeClr val="accent1"/>
+          </a:lnRef>
+          <a:fillRef idx="3">
+            <a:schemeClr val="accent1"/>
+          </a:fillRef>
+          <a:effectRef idx="2">
+            <a:schemeClr val="accent1"/>
+          </a:effectRef>
+          <a:fontRef idx="minor">
+            <a:schemeClr val="lt1"/>
+          </a:fontRef>
+        </p:style>
+        <p:txBody>
+          <a:bodyPr rtlCol="0" anchor="ctr" wrap="square" lIns="274320" rIns="274320" tIns="109728"/>
+          <a:lstStyle/>
+          <a:p>
+            <a:pPr algn="ctr">
+              <a:spcAft>
+                <a:spcPts val="300"/>
+              </a:spcAft>
+              <a:defRPr sz="1500" b="1">
+                <a:solidFill>
+                  <a:srgbClr val="F59E0B"/>
+                </a:solidFill>
+                <a:latin typeface="Prompt"/>
+              </a:defRPr>
+            </a:pPr>
+            <a:r>
+              <a:t>LAYER 4: Database &amp; Storage (High Reliability)</a:t>
+            </a:r>
+          </a:p>
+          <a:p>
+            <a:pPr>
+              <a:defRPr sz="1250">
+                <a:solidFill>
+                  <a:srgbClr val="E2E8F0"/>
+                </a:solidFill>
+                <a:latin typeface="Sarabun"/>
+              </a:defRPr>
+            </a:pPr>
+            <a:r>
+              <a:t>PostgreSQL: ฐานข้อมูลหลัก จัดเก็บข้อมูลผู้ใช้, สิทธิ์ตั๋ว, รายได้ และธุรกรรม   •   Redis: In-memory Cache สำหรับแคชคิวรถและสถานะตั๋วความเร็วสูง   •   TimescaleDB: Time-series DB บันทึกพิกัด GPS นับล้านเรคคอร์ดโดยไม่หน่วง   •   Cloud File Storage: จัดเก็บภาพนิ่ง เอกสาร และไฟล์สำรองระบบ</a:t>
+            </a:r>
+          </a:p>
+        </p:txBody>
+      </p:sp>
     </p:spTree>
   </p:cSld>
   <p:clrMapOvr>
@@ -4864,7 +8368,7 @@
 </p:sld>
 </file>
 
-<file path=ppt/slides/slide6.xml><?xml version="1.0" encoding="utf-8"?>
+<file path=ppt/slides/slide5.xml><?xml version="1.0" encoding="utf-8"?>
 <p:sld xmlns:a="http://schemas.openxmlformats.org/drawingml/2006/main" xmlns:p="http://schemas.openxmlformats.org/presentationml/2006/main" xmlns:r="http://schemas.openxmlformats.org/officeDocument/2006/relationships">
   <p:cSld>
     <p:spTree>
@@ -4876,7 +8380,7 @@
       <p:grpSpPr/>
       <p:pic>
         <p:nvPicPr>
-          <p:cNvPr id="2" name="Picture 1" descr="slide_06.jpg"/>
+          <p:cNvPr id="2" name="Picture 1" descr="dark_topographic_bg.jpg"/>
           <p:cNvPicPr>
             <a:picLocks noChangeAspect="1"/>
           </p:cNvPicPr>
@@ -4898,6 +8402,688 @@
           </a:prstGeom>
         </p:spPr>
       </p:pic>
+      <p:sp>
+        <p:nvSpPr>
+          <p:cNvPr id="3" name="Rounded Rectangle 2"/>
+          <p:cNvSpPr/>
+          <p:nvPr/>
+        </p:nvSpPr>
+        <p:spPr>
+          <a:xfrm>
+            <a:off x="731520" y="365760"/>
+            <a:ext cx="3200400" cy="320040"/>
+          </a:xfrm>
+          <a:prstGeom prst="roundRect">
+            <a:avLst/>
+          </a:prstGeom>
+          <a:solidFill>
+            <a:srgbClr val="123024"/>
+          </a:solidFill>
+          <a:ln w="12700">
+            <a:solidFill>
+              <a:srgbClr val="52B788"/>
+            </a:solidFill>
+          </a:ln>
+        </p:spPr>
+        <p:style>
+          <a:lnRef idx="1">
+            <a:schemeClr val="accent1"/>
+          </a:lnRef>
+          <a:fillRef idx="3">
+            <a:schemeClr val="accent1"/>
+          </a:fillRef>
+          <a:effectRef idx="2">
+            <a:schemeClr val="accent1"/>
+          </a:effectRef>
+          <a:fontRef idx="minor">
+            <a:schemeClr val="lt1"/>
+          </a:fontRef>
+        </p:style>
+        <p:txBody>
+          <a:bodyPr rtlCol="0" anchor="ctr" wrap="square" lIns="0" rIns="0" tIns="0" bIns="0"/>
+          <a:lstStyle/>
+          <a:p>
+            <a:pPr algn="ctr">
+              <a:defRPr sz="1100" b="1">
+                <a:solidFill>
+                  <a:srgbClr val="6EE7B7"/>
+                </a:solidFill>
+                <a:latin typeface="Prompt"/>
+              </a:defRPr>
+            </a:pPr>
+            <a:r>
+              <a:t>E-TICKET FLOW</a:t>
+            </a:r>
+          </a:p>
+        </p:txBody>
+      </p:sp>
+      <p:sp>
+        <p:nvSpPr>
+          <p:cNvPr id="4" name="TextBox 3"/>
+          <p:cNvSpPr txBox="1"/>
+          <p:nvPr/>
+        </p:nvSpPr>
+        <p:spPr>
+          <a:xfrm>
+            <a:off x="731520" y="685800"/>
+            <a:ext cx="10728655" cy="868680"/>
+          </a:xfrm>
+          <a:prstGeom prst="rect">
+            <a:avLst/>
+          </a:prstGeom>
+          <a:noFill/>
+        </p:spPr>
+        <p:txBody>
+          <a:bodyPr wrap="square" lIns="0" rIns="0" tIns="0" bIns="0">
+            <a:spAutoFit/>
+          </a:bodyPr>
+          <a:lstStyle/>
+          <a:p>
+            <a:pPr>
+              <a:spcAft>
+                <a:spcPts val="300"/>
+              </a:spcAft>
+              <a:defRPr sz="2600" b="1">
+                <a:solidFill>
+                  <a:srgbClr val="FFFFFF"/>
+                </a:solidFill>
+                <a:latin typeface="Prompt"/>
+              </a:defRPr>
+            </a:pPr>
+            <a:r>
+              <a:t>e-Ticket Flow — กระบวนการตั้งแต่เลือกซื้อจนขึ้นรถ</a:t>
+            </a:r>
+          </a:p>
+          <a:p>
+            <a:pPr>
+              <a:defRPr sz="1400">
+                <a:solidFill>
+                  <a:srgbClr val="A7F3D0"/>
+                </a:solidFill>
+                <a:latin typeface="Sarabun"/>
+              </a:defRPr>
+            </a:pPr>
+            <a:r>
+              <a:t>กระบวนการจำหน่ายตั๋ว ออกตั๋ว และการตรวจตั๋วขึ้นรถ 5 ขั้นตอนแบบไร้รอยต่อ</a:t>
+            </a:r>
+          </a:p>
+        </p:txBody>
+      </p:sp>
+      <p:sp>
+        <p:nvSpPr>
+          <p:cNvPr id="5" name="Rounded Rectangle 4"/>
+          <p:cNvSpPr/>
+          <p:nvPr/>
+        </p:nvSpPr>
+        <p:spPr>
+          <a:xfrm>
+            <a:off x="731520" y="1691640"/>
+            <a:ext cx="2057400" cy="3108960"/>
+          </a:xfrm>
+          <a:prstGeom prst="roundRect">
+            <a:avLst/>
+          </a:prstGeom>
+          <a:solidFill>
+            <a:srgbClr val="0E261C"/>
+          </a:solidFill>
+          <a:ln w="19050">
+            <a:solidFill>
+              <a:srgbClr val="52B788"/>
+            </a:solidFill>
+          </a:ln>
+        </p:spPr>
+        <p:style>
+          <a:lnRef idx="1">
+            <a:schemeClr val="accent1"/>
+          </a:lnRef>
+          <a:fillRef idx="3">
+            <a:schemeClr val="accent1"/>
+          </a:fillRef>
+          <a:effectRef idx="2">
+            <a:schemeClr val="accent1"/>
+          </a:effectRef>
+          <a:fontRef idx="minor">
+            <a:schemeClr val="lt1"/>
+          </a:fontRef>
+        </p:style>
+        <p:txBody>
+          <a:bodyPr rtlCol="0" anchor="ctr" wrap="square" lIns="164592" rIns="164592" tIns="182880"/>
+          <a:lstStyle/>
+          <a:p>
+            <a:pPr algn="ctr">
+              <a:spcAft>
+                <a:spcPts val="600"/>
+              </a:spcAft>
+              <a:defRPr sz="1300" b="1">
+                <a:solidFill>
+                  <a:srgbClr val="6EE7B7"/>
+                </a:solidFill>
+                <a:latin typeface="Prompt"/>
+              </a:defRPr>
+            </a:pPr>
+            <a:r>
+              <a:t>STEP 01</a:t>
+            </a:r>
+          </a:p>
+          <a:p>
+            <a:pPr>
+              <a:defRPr sz="1700" b="1">
+                <a:solidFill>
+                  <a:srgbClr val="FFFFFF"/>
+                </a:solidFill>
+                <a:latin typeface="Prompt"/>
+              </a:defRPr>
+            </a:pPr>
+            <a:r>
+              <a:t>เลือกซื้อตั๋ว</a:t>
+            </a:r>
+          </a:p>
+          <a:p>
+            <a:pPr>
+              <a:spcAft>
+                <a:spcPts val="1000"/>
+              </a:spcAft>
+              <a:defRPr sz="950">
+                <a:solidFill>
+                  <a:srgbClr val="A7F3D0"/>
+                </a:solidFill>
+                <a:latin typeface="Prompt"/>
+              </a:defRPr>
+            </a:pPr>
+            <a:r>
+              <a:t>OMNICHANNEL SELECTION</a:t>
+            </a:r>
+          </a:p>
+          <a:p>
+            <a:pPr>
+              <a:defRPr sz="1200">
+                <a:solidFill>
+                  <a:srgbClr val="E2E8F0"/>
+                </a:solidFill>
+                <a:latin typeface="Sarabun"/>
+              </a:defRPr>
+            </a:pPr>
+            <a:r>
+              <a:t>ซื้อผ่าน Mobile App, เว็บไซต์ล่วงหน้า หรือตู้ Kiosk หน้าสถานี</a:t>
+            </a:r>
+          </a:p>
+        </p:txBody>
+      </p:sp>
+      <p:sp>
+        <p:nvSpPr>
+          <p:cNvPr id="6" name="Rounded Rectangle 5"/>
+          <p:cNvSpPr/>
+          <p:nvPr/>
+        </p:nvSpPr>
+        <p:spPr>
+          <a:xfrm>
+            <a:off x="2926080" y="1691640"/>
+            <a:ext cx="2057400" cy="3108960"/>
+          </a:xfrm>
+          <a:prstGeom prst="roundRect">
+            <a:avLst/>
+          </a:prstGeom>
+          <a:solidFill>
+            <a:srgbClr val="0E261C"/>
+          </a:solidFill>
+          <a:ln w="19050">
+            <a:solidFill>
+              <a:srgbClr val="52B788"/>
+            </a:solidFill>
+          </a:ln>
+        </p:spPr>
+        <p:style>
+          <a:lnRef idx="1">
+            <a:schemeClr val="accent1"/>
+          </a:lnRef>
+          <a:fillRef idx="3">
+            <a:schemeClr val="accent1"/>
+          </a:fillRef>
+          <a:effectRef idx="2">
+            <a:schemeClr val="accent1"/>
+          </a:effectRef>
+          <a:fontRef idx="minor">
+            <a:schemeClr val="lt1"/>
+          </a:fontRef>
+        </p:style>
+        <p:txBody>
+          <a:bodyPr rtlCol="0" anchor="ctr" wrap="square" lIns="164592" rIns="164592" tIns="182880"/>
+          <a:lstStyle/>
+          <a:p>
+            <a:pPr algn="ctr">
+              <a:spcAft>
+                <a:spcPts val="600"/>
+              </a:spcAft>
+              <a:defRPr sz="1300" b="1">
+                <a:solidFill>
+                  <a:srgbClr val="6EE7B7"/>
+                </a:solidFill>
+                <a:latin typeface="Prompt"/>
+              </a:defRPr>
+            </a:pPr>
+            <a:r>
+              <a:t>STEP 02</a:t>
+            </a:r>
+          </a:p>
+          <a:p>
+            <a:pPr>
+              <a:defRPr sz="1700" b="1">
+                <a:solidFill>
+                  <a:srgbClr val="FFFFFF"/>
+                </a:solidFill>
+                <a:latin typeface="Prompt"/>
+              </a:defRPr>
+            </a:pPr>
+            <a:r>
+              <a:t>ชำระเงิน</a:t>
+            </a:r>
+          </a:p>
+          <a:p>
+            <a:pPr>
+              <a:spcAft>
+                <a:spcPts val="1000"/>
+              </a:spcAft>
+              <a:defRPr sz="950">
+                <a:solidFill>
+                  <a:srgbClr val="A7F3D0"/>
+                </a:solidFill>
+                <a:latin typeface="Prompt"/>
+              </a:defRPr>
+            </a:pPr>
+            <a:r>
+              <a:t>CONTACTLESS PAYMENT</a:t>
+            </a:r>
+          </a:p>
+          <a:p>
+            <a:pPr>
+              <a:defRPr sz="1200">
+                <a:solidFill>
+                  <a:srgbClr val="E2E8F0"/>
+                </a:solidFill>
+                <a:latin typeface="Sarabun"/>
+              </a:defRPr>
+            </a:pPr>
+            <a:r>
+              <a:t>สแกน PromptPay QR EMVCo ทุกธนาคาร, บัตร หรือเงินสดที่ Kiosk</a:t>
+            </a:r>
+          </a:p>
+        </p:txBody>
+      </p:sp>
+      <p:sp>
+        <p:nvSpPr>
+          <p:cNvPr id="7" name="Rounded Rectangle 6"/>
+          <p:cNvSpPr/>
+          <p:nvPr/>
+        </p:nvSpPr>
+        <p:spPr>
+          <a:xfrm>
+            <a:off x="5120640" y="1691640"/>
+            <a:ext cx="2057400" cy="3108960"/>
+          </a:xfrm>
+          <a:prstGeom prst="roundRect">
+            <a:avLst/>
+          </a:prstGeom>
+          <a:solidFill>
+            <a:srgbClr val="0E261C"/>
+          </a:solidFill>
+          <a:ln w="19050">
+            <a:solidFill>
+              <a:srgbClr val="52B788"/>
+            </a:solidFill>
+          </a:ln>
+        </p:spPr>
+        <p:style>
+          <a:lnRef idx="1">
+            <a:schemeClr val="accent1"/>
+          </a:lnRef>
+          <a:fillRef idx="3">
+            <a:schemeClr val="accent1"/>
+          </a:fillRef>
+          <a:effectRef idx="2">
+            <a:schemeClr val="accent1"/>
+          </a:effectRef>
+          <a:fontRef idx="minor">
+            <a:schemeClr val="lt1"/>
+          </a:fontRef>
+        </p:style>
+        <p:txBody>
+          <a:bodyPr rtlCol="0" anchor="ctr" wrap="square" lIns="164592" rIns="164592" tIns="182880"/>
+          <a:lstStyle/>
+          <a:p>
+            <a:pPr algn="ctr">
+              <a:spcAft>
+                <a:spcPts val="600"/>
+              </a:spcAft>
+              <a:defRPr sz="1300" b="1">
+                <a:solidFill>
+                  <a:srgbClr val="6EE7B7"/>
+                </a:solidFill>
+                <a:latin typeface="Prompt"/>
+              </a:defRPr>
+            </a:pPr>
+            <a:r>
+              <a:t>STEP 03</a:t>
+            </a:r>
+          </a:p>
+          <a:p>
+            <a:pPr>
+              <a:defRPr sz="1700" b="1">
+                <a:solidFill>
+                  <a:srgbClr val="FFFFFF"/>
+                </a:solidFill>
+                <a:latin typeface="Prompt"/>
+              </a:defRPr>
+            </a:pPr>
+            <a:r>
+              <a:t>สร้าง e-Ticket</a:t>
+            </a:r>
+          </a:p>
+          <a:p>
+            <a:pPr>
+              <a:spcAft>
+                <a:spcPts val="1000"/>
+              </a:spcAft>
+              <a:defRPr sz="950">
+                <a:solidFill>
+                  <a:srgbClr val="A7F3D0"/>
+                </a:solidFill>
+                <a:latin typeface="Prompt"/>
+              </a:defRPr>
+            </a:pPr>
+            <a:r>
+              <a:t>DYNAMIC QR GENERATOR</a:t>
+            </a:r>
+          </a:p>
+          <a:p>
+            <a:pPr>
+              <a:defRPr sz="1200">
+                <a:solidFill>
+                  <a:srgbClr val="E2E8F0"/>
+                </a:solidFill>
+                <a:latin typeface="Sarabun"/>
+              </a:defRPr>
+            </a:pPr>
+            <a:r>
+              <a:t>สร้าง Dynamic One-Time QR พร้อมบันทึกลง Database ทันที</a:t>
+            </a:r>
+          </a:p>
+        </p:txBody>
+      </p:sp>
+      <p:sp>
+        <p:nvSpPr>
+          <p:cNvPr id="8" name="Rounded Rectangle 7"/>
+          <p:cNvSpPr/>
+          <p:nvPr/>
+        </p:nvSpPr>
+        <p:spPr>
+          <a:xfrm>
+            <a:off x="7315199" y="1691640"/>
+            <a:ext cx="2057400" cy="3108960"/>
+          </a:xfrm>
+          <a:prstGeom prst="roundRect">
+            <a:avLst/>
+          </a:prstGeom>
+          <a:solidFill>
+            <a:srgbClr val="0E261C"/>
+          </a:solidFill>
+          <a:ln w="19050">
+            <a:solidFill>
+              <a:srgbClr val="52B788"/>
+            </a:solidFill>
+          </a:ln>
+        </p:spPr>
+        <p:style>
+          <a:lnRef idx="1">
+            <a:schemeClr val="accent1"/>
+          </a:lnRef>
+          <a:fillRef idx="3">
+            <a:schemeClr val="accent1"/>
+          </a:fillRef>
+          <a:effectRef idx="2">
+            <a:schemeClr val="accent1"/>
+          </a:effectRef>
+          <a:fontRef idx="minor">
+            <a:schemeClr val="lt1"/>
+          </a:fontRef>
+        </p:style>
+        <p:txBody>
+          <a:bodyPr rtlCol="0" anchor="ctr" wrap="square" lIns="164592" rIns="164592" tIns="182880"/>
+          <a:lstStyle/>
+          <a:p>
+            <a:pPr algn="ctr">
+              <a:spcAft>
+                <a:spcPts val="600"/>
+              </a:spcAft>
+              <a:defRPr sz="1300" b="1">
+                <a:solidFill>
+                  <a:srgbClr val="6EE7B7"/>
+                </a:solidFill>
+                <a:latin typeface="Prompt"/>
+              </a:defRPr>
+            </a:pPr>
+            <a:r>
+              <a:t>STEP 04</a:t>
+            </a:r>
+          </a:p>
+          <a:p>
+            <a:pPr>
+              <a:defRPr sz="1700" b="1">
+                <a:solidFill>
+                  <a:srgbClr val="FFFFFF"/>
+                </a:solidFill>
+                <a:latin typeface="Prompt"/>
+              </a:defRPr>
+            </a:pPr>
+            <a:r>
+              <a:t>แสดงตั๋ว</a:t>
+            </a:r>
+          </a:p>
+          <a:p>
+            <a:pPr>
+              <a:spcAft>
+                <a:spcPts val="1000"/>
+              </a:spcAft>
+              <a:defRPr sz="950">
+                <a:solidFill>
+                  <a:srgbClr val="A7F3D0"/>
+                </a:solidFill>
+                <a:latin typeface="Prompt"/>
+              </a:defRPr>
+            </a:pPr>
+            <a:r>
+              <a:t>PASSENGER DISPLAY</a:t>
+            </a:r>
+          </a:p>
+          <a:p>
+            <a:pPr>
+              <a:defRPr sz="1200">
+                <a:solidFill>
+                  <a:srgbClr val="E2E8F0"/>
+                </a:solidFill>
+                <a:latin typeface="Sarabun"/>
+              </a:defRPr>
+            </a:pPr>
+            <a:r>
+              <a:t>แสดง QR บนมือถือ, Wallet หรือพิมพ์สลิปจากตู้ Kiosk</a:t>
+            </a:r>
+          </a:p>
+        </p:txBody>
+      </p:sp>
+      <p:sp>
+        <p:nvSpPr>
+          <p:cNvPr id="9" name="Rounded Rectangle 8"/>
+          <p:cNvSpPr/>
+          <p:nvPr/>
+        </p:nvSpPr>
+        <p:spPr>
+          <a:xfrm>
+            <a:off x="9509760" y="1691640"/>
+            <a:ext cx="2057400" cy="3108960"/>
+          </a:xfrm>
+          <a:prstGeom prst="roundRect">
+            <a:avLst/>
+          </a:prstGeom>
+          <a:solidFill>
+            <a:srgbClr val="0E261C"/>
+          </a:solidFill>
+          <a:ln w="19050">
+            <a:solidFill>
+              <a:srgbClr val="52B788"/>
+            </a:solidFill>
+          </a:ln>
+        </p:spPr>
+        <p:style>
+          <a:lnRef idx="1">
+            <a:schemeClr val="accent1"/>
+          </a:lnRef>
+          <a:fillRef idx="3">
+            <a:schemeClr val="accent1"/>
+          </a:fillRef>
+          <a:effectRef idx="2">
+            <a:schemeClr val="accent1"/>
+          </a:effectRef>
+          <a:fontRef idx="minor">
+            <a:schemeClr val="lt1"/>
+          </a:fontRef>
+        </p:style>
+        <p:txBody>
+          <a:bodyPr rtlCol="0" anchor="ctr" wrap="square" lIns="164592" rIns="164592" tIns="182880"/>
+          <a:lstStyle/>
+          <a:p>
+            <a:pPr algn="ctr">
+              <a:spcAft>
+                <a:spcPts val="600"/>
+              </a:spcAft>
+              <a:defRPr sz="1300" b="1">
+                <a:solidFill>
+                  <a:srgbClr val="6EE7B7"/>
+                </a:solidFill>
+                <a:latin typeface="Prompt"/>
+              </a:defRPr>
+            </a:pPr>
+            <a:r>
+              <a:t>STEP 05</a:t>
+            </a:r>
+          </a:p>
+          <a:p>
+            <a:pPr>
+              <a:defRPr sz="1700" b="1">
+                <a:solidFill>
+                  <a:srgbClr val="FFFFFF"/>
+                </a:solidFill>
+                <a:latin typeface="Prompt"/>
+              </a:defRPr>
+            </a:pPr>
+            <a:r>
+              <a:t>สแกน Check-in</a:t>
+            </a:r>
+          </a:p>
+          <a:p>
+            <a:pPr>
+              <a:spcAft>
+                <a:spcPts val="1000"/>
+              </a:spcAft>
+              <a:defRPr sz="950">
+                <a:solidFill>
+                  <a:srgbClr val="A7F3D0"/>
+                </a:solidFill>
+                <a:latin typeface="Prompt"/>
+              </a:defRPr>
+            </a:pPr>
+            <a:r>
+              <a:t>DRIVER TABLET SCAN</a:t>
+            </a:r>
+          </a:p>
+          <a:p>
+            <a:pPr>
+              <a:defRPr sz="1200">
+                <a:solidFill>
+                  <a:srgbClr val="E2E8F0"/>
+                </a:solidFill>
+                <a:latin typeface="Sarabun"/>
+              </a:defRPr>
+            </a:pPr>
+            <a:r>
+              <a:t>คนขับสแกนตรวจตั๋ว ตัดสิทธิ์ทันที ป้องกันใช้ซ้ำ อัปเดตคิว Real-time</a:t>
+            </a:r>
+          </a:p>
+        </p:txBody>
+      </p:sp>
+      <p:sp>
+        <p:nvSpPr>
+          <p:cNvPr id="10" name="Rounded Rectangle 9"/>
+          <p:cNvSpPr/>
+          <p:nvPr/>
+        </p:nvSpPr>
+        <p:spPr>
+          <a:xfrm>
+            <a:off x="731520" y="5029200"/>
+            <a:ext cx="10728655" cy="1188720"/>
+          </a:xfrm>
+          <a:prstGeom prst="roundRect">
+            <a:avLst/>
+          </a:prstGeom>
+          <a:solidFill>
+            <a:srgbClr val="0E261C"/>
+          </a:solidFill>
+          <a:ln w="19050">
+            <a:solidFill>
+              <a:srgbClr val="F59E0B"/>
+            </a:solidFill>
+          </a:ln>
+        </p:spPr>
+        <p:style>
+          <a:lnRef idx="1">
+            <a:schemeClr val="accent1"/>
+          </a:lnRef>
+          <a:fillRef idx="3">
+            <a:schemeClr val="accent1"/>
+          </a:fillRef>
+          <a:effectRef idx="2">
+            <a:schemeClr val="accent1"/>
+          </a:effectRef>
+          <a:fontRef idx="minor">
+            <a:schemeClr val="lt1"/>
+          </a:fontRef>
+        </p:style>
+        <p:txBody>
+          <a:bodyPr rtlCol="0" anchor="ctr" wrap="square" lIns="274320" rIns="274320" tIns="164592"/>
+          <a:lstStyle/>
+          <a:p>
+            <a:pPr algn="ctr">
+              <a:spcAft>
+                <a:spcPts val="300"/>
+              </a:spcAft>
+              <a:defRPr sz="1400" b="1">
+                <a:solidFill>
+                  <a:srgbClr val="F59E0B"/>
+                </a:solidFill>
+                <a:latin typeface="Prompt"/>
+              </a:defRPr>
+            </a:pPr>
+            <a:r>
+              <a:t>กฎการใช้งาน One-Time QR Code และการรักษาความปลอดภัย:</a:t>
+            </a:r>
+          </a:p>
+          <a:p>
+            <a:pPr>
+              <a:defRPr sz="1250">
+                <a:solidFill>
+                  <a:srgbClr val="E2E8F0"/>
+                </a:solidFill>
+                <a:latin typeface="Sarabun"/>
+              </a:defRPr>
+            </a:pPr>
+            <a:r>
+              <a:t>• ตั๋ว 1 ใบ = สิทธิ์เดินทาง 1 ครั้ง เมื่อสแกนแล้วสถานะจะปรับเป็น 'USED' ในฐานข้อมูลทันที ป้องกันการถ่ายภาพส่งต่อหรือนำกลับมาใช้ซ้ำ 100%</a:t>
+            </a:r>
+            <a:br/>
+            <a:r>
+              <a:t>• อัปเดตข้อมูลผู้โดยสารขึ้นรถแบบสดๆ เข้าสู่ Smart Queue Balancing เพื่อตัดโควตาที่นั่งว่างของรถคันนั้นแบบ Real-time</a:t>
+            </a:r>
+          </a:p>
+        </p:txBody>
+      </p:sp>
     </p:spTree>
   </p:cSld>
   <p:clrMapOvr>
@@ -4906,7 +9092,7 @@
 </p:sld>
 </file>
 
-<file path=ppt/slides/slide7.xml><?xml version="1.0" encoding="utf-8"?>
+<file path=ppt/slides/slide6.xml><?xml version="1.0" encoding="utf-8"?>
 <p:sld xmlns:a="http://schemas.openxmlformats.org/drawingml/2006/main" xmlns:p="http://schemas.openxmlformats.org/presentationml/2006/main" xmlns:r="http://schemas.openxmlformats.org/officeDocument/2006/relationships">
   <p:cSld>
     <p:spTree>
@@ -4918,7 +9104,7 @@
       <p:grpSpPr/>
       <p:pic>
         <p:nvPicPr>
-          <p:cNvPr id="2" name="Picture 1" descr="slide_07.jpg"/>
+          <p:cNvPr id="2" name="Picture 1" descr="dark_topographic_bg.jpg"/>
           <p:cNvPicPr>
             <a:picLocks noChangeAspect="1"/>
           </p:cNvPicPr>
@@ -4940,6 +9126,688 @@
           </a:prstGeom>
         </p:spPr>
       </p:pic>
+      <p:sp>
+        <p:nvSpPr>
+          <p:cNvPr id="3" name="Rounded Rectangle 2"/>
+          <p:cNvSpPr/>
+          <p:nvPr/>
+        </p:nvSpPr>
+        <p:spPr>
+          <a:xfrm>
+            <a:off x="731520" y="365760"/>
+            <a:ext cx="3200400" cy="320040"/>
+          </a:xfrm>
+          <a:prstGeom prst="roundRect">
+            <a:avLst/>
+          </a:prstGeom>
+          <a:solidFill>
+            <a:srgbClr val="123024"/>
+          </a:solidFill>
+          <a:ln w="12700">
+            <a:solidFill>
+              <a:srgbClr val="52B788"/>
+            </a:solidFill>
+          </a:ln>
+        </p:spPr>
+        <p:style>
+          <a:lnRef idx="1">
+            <a:schemeClr val="accent1"/>
+          </a:lnRef>
+          <a:fillRef idx="3">
+            <a:schemeClr val="accent1"/>
+          </a:fillRef>
+          <a:effectRef idx="2">
+            <a:schemeClr val="accent1"/>
+          </a:effectRef>
+          <a:fontRef idx="minor">
+            <a:schemeClr val="lt1"/>
+          </a:fontRef>
+        </p:style>
+        <p:txBody>
+          <a:bodyPr rtlCol="0" anchor="ctr" wrap="square" lIns="0" rIns="0" tIns="0" bIns="0"/>
+          <a:lstStyle/>
+          <a:p>
+            <a:pPr algn="ctr">
+              <a:defRPr sz="1100" b="1">
+                <a:solidFill>
+                  <a:srgbClr val="6EE7B7"/>
+                </a:solidFill>
+                <a:latin typeface="Prompt"/>
+              </a:defRPr>
+            </a:pPr>
+            <a:r>
+              <a:t>PAYMENT ARCHITECTURE</a:t>
+            </a:r>
+          </a:p>
+        </p:txBody>
+      </p:sp>
+      <p:sp>
+        <p:nvSpPr>
+          <p:cNvPr id="4" name="TextBox 3"/>
+          <p:cNvSpPr txBox="1"/>
+          <p:nvPr/>
+        </p:nvSpPr>
+        <p:spPr>
+          <a:xfrm>
+            <a:off x="731520" y="685800"/>
+            <a:ext cx="10728655" cy="868680"/>
+          </a:xfrm>
+          <a:prstGeom prst="rect">
+            <a:avLst/>
+          </a:prstGeom>
+          <a:noFill/>
+        </p:spPr>
+        <p:txBody>
+          <a:bodyPr wrap="square" lIns="0" rIns="0" tIns="0" bIns="0">
+            <a:spAutoFit/>
+          </a:bodyPr>
+          <a:lstStyle/>
+          <a:p>
+            <a:pPr>
+              <a:spcAft>
+                <a:spcPts val="300"/>
+              </a:spcAft>
+              <a:defRPr sz="2600" b="1">
+                <a:solidFill>
+                  <a:srgbClr val="FFFFFF"/>
+                </a:solidFill>
+                <a:latin typeface="Prompt"/>
+              </a:defRPr>
+            </a:pPr>
+            <a:r>
+              <a:t>Payment Gateway Integration Flow — สถาปัตยกรรมระบบชำระเงิน</a:t>
+            </a:r>
+          </a:p>
+          <a:p>
+            <a:pPr>
+              <a:defRPr sz="1400">
+                <a:solidFill>
+                  <a:srgbClr val="A7F3D0"/>
+                </a:solidFill>
+                <a:latin typeface="Sarabun"/>
+              </a:defRPr>
+            </a:pPr>
+            <a:r>
+              <a:t>การเชื่อมต่อระบบการเงิน ตรวจสอบความถูกต้องผ่าน Webhook Callback และความปลอดภัย</a:t>
+            </a:r>
+          </a:p>
+        </p:txBody>
+      </p:sp>
+      <p:sp>
+        <p:nvSpPr>
+          <p:cNvPr id="5" name="Rounded Rectangle 4"/>
+          <p:cNvSpPr/>
+          <p:nvPr/>
+        </p:nvSpPr>
+        <p:spPr>
+          <a:xfrm>
+            <a:off x="731520" y="1691640"/>
+            <a:ext cx="2057400" cy="3108960"/>
+          </a:xfrm>
+          <a:prstGeom prst="roundRect">
+            <a:avLst/>
+          </a:prstGeom>
+          <a:solidFill>
+            <a:srgbClr val="0E261C"/>
+          </a:solidFill>
+          <a:ln w="19050">
+            <a:solidFill>
+              <a:srgbClr val="38BDF8"/>
+            </a:solidFill>
+          </a:ln>
+        </p:spPr>
+        <p:style>
+          <a:lnRef idx="1">
+            <a:schemeClr val="accent1"/>
+          </a:lnRef>
+          <a:fillRef idx="3">
+            <a:schemeClr val="accent1"/>
+          </a:fillRef>
+          <a:effectRef idx="2">
+            <a:schemeClr val="accent1"/>
+          </a:effectRef>
+          <a:fontRef idx="minor">
+            <a:schemeClr val="lt1"/>
+          </a:fontRef>
+        </p:style>
+        <p:txBody>
+          <a:bodyPr rtlCol="0" anchor="ctr" wrap="square" lIns="164592" rIns="164592" tIns="182880"/>
+          <a:lstStyle/>
+          <a:p>
+            <a:pPr algn="ctr">
+              <a:spcAft>
+                <a:spcPts val="600"/>
+              </a:spcAft>
+              <a:defRPr sz="1300" b="1">
+                <a:solidFill>
+                  <a:srgbClr val="38BDF8"/>
+                </a:solidFill>
+                <a:latin typeface="Prompt"/>
+              </a:defRPr>
+            </a:pPr>
+            <a:r>
+              <a:t>STEP 1</a:t>
+            </a:r>
+          </a:p>
+          <a:p>
+            <a:pPr>
+              <a:defRPr sz="1700" b="1">
+                <a:solidFill>
+                  <a:srgbClr val="FFFFFF"/>
+                </a:solidFill>
+                <a:latin typeface="Prompt"/>
+              </a:defRPr>
+            </a:pPr>
+            <a:r>
+              <a:t>สั่งซื้อตั๋ว</a:t>
+            </a:r>
+          </a:p>
+          <a:p>
+            <a:pPr>
+              <a:spcAft>
+                <a:spcPts val="1000"/>
+              </a:spcAft>
+              <a:defRPr sz="950">
+                <a:solidFill>
+                  <a:srgbClr val="A7F3D0"/>
+                </a:solidFill>
+                <a:latin typeface="Prompt"/>
+              </a:defRPr>
+            </a:pPr>
+            <a:r>
+              <a:t>MOBILE / KIOSK</a:t>
+            </a:r>
+          </a:p>
+          <a:p>
+            <a:pPr>
+              <a:defRPr sz="1200">
+                <a:solidFill>
+                  <a:srgbClr val="E2E8F0"/>
+                </a:solidFill>
+                <a:latin typeface="Sarabun"/>
+              </a:defRPr>
+            </a:pPr>
+            <a:r>
+              <a:t>ผู้ใช้เลือกตั๋ว -&gt; ส่งคำขอผ่าน API Gateway เข้าสู่ Payment Service</a:t>
+            </a:r>
+          </a:p>
+        </p:txBody>
+      </p:sp>
+      <p:sp>
+        <p:nvSpPr>
+          <p:cNvPr id="6" name="Rounded Rectangle 5"/>
+          <p:cNvSpPr/>
+          <p:nvPr/>
+        </p:nvSpPr>
+        <p:spPr>
+          <a:xfrm>
+            <a:off x="2926080" y="1691640"/>
+            <a:ext cx="2057400" cy="3108960"/>
+          </a:xfrm>
+          <a:prstGeom prst="roundRect">
+            <a:avLst/>
+          </a:prstGeom>
+          <a:solidFill>
+            <a:srgbClr val="0E261C"/>
+          </a:solidFill>
+          <a:ln w="19050">
+            <a:solidFill>
+              <a:srgbClr val="38BDF8"/>
+            </a:solidFill>
+          </a:ln>
+        </p:spPr>
+        <p:style>
+          <a:lnRef idx="1">
+            <a:schemeClr val="accent1"/>
+          </a:lnRef>
+          <a:fillRef idx="3">
+            <a:schemeClr val="accent1"/>
+          </a:fillRef>
+          <a:effectRef idx="2">
+            <a:schemeClr val="accent1"/>
+          </a:effectRef>
+          <a:fontRef idx="minor">
+            <a:schemeClr val="lt1"/>
+          </a:fontRef>
+        </p:style>
+        <p:txBody>
+          <a:bodyPr rtlCol="0" anchor="ctr" wrap="square" lIns="164592" rIns="164592" tIns="182880"/>
+          <a:lstStyle/>
+          <a:p>
+            <a:pPr algn="ctr">
+              <a:spcAft>
+                <a:spcPts val="600"/>
+              </a:spcAft>
+              <a:defRPr sz="1300" b="1">
+                <a:solidFill>
+                  <a:srgbClr val="38BDF8"/>
+                </a:solidFill>
+                <a:latin typeface="Prompt"/>
+              </a:defRPr>
+            </a:pPr>
+            <a:r>
+              <a:t>STEP 2</a:t>
+            </a:r>
+          </a:p>
+          <a:p>
+            <a:pPr>
+              <a:defRPr sz="1700" b="1">
+                <a:solidFill>
+                  <a:srgbClr val="FFFFFF"/>
+                </a:solidFill>
+                <a:latin typeface="Prompt"/>
+              </a:defRPr>
+            </a:pPr>
+            <a:r>
+              <a:t>สร้าง QR Code</a:t>
+            </a:r>
+          </a:p>
+          <a:p>
+            <a:pPr>
+              <a:spcAft>
+                <a:spcPts val="1000"/>
+              </a:spcAft>
+              <a:defRPr sz="950">
+                <a:solidFill>
+                  <a:srgbClr val="A7F3D0"/>
+                </a:solidFill>
+                <a:latin typeface="Prompt"/>
+              </a:defRPr>
+            </a:pPr>
+            <a:r>
+              <a:t>GATEWAY API</a:t>
+            </a:r>
+          </a:p>
+          <a:p>
+            <a:pPr>
+              <a:defRPr sz="1200">
+                <a:solidFill>
+                  <a:srgbClr val="E2E8F0"/>
+                </a:solidFill>
+                <a:latin typeface="Sarabun"/>
+              </a:defRPr>
+            </a:pPr>
+            <a:r>
+              <a:t>เชื่อมต่อ Omise / 2C2P เพื่อสร้าง QR PromptPay ตามมาตรฐาน EMVCo</a:t>
+            </a:r>
+          </a:p>
+        </p:txBody>
+      </p:sp>
+      <p:sp>
+        <p:nvSpPr>
+          <p:cNvPr id="7" name="Rounded Rectangle 6"/>
+          <p:cNvSpPr/>
+          <p:nvPr/>
+        </p:nvSpPr>
+        <p:spPr>
+          <a:xfrm>
+            <a:off x="5120640" y="1691640"/>
+            <a:ext cx="2057400" cy="3108960"/>
+          </a:xfrm>
+          <a:prstGeom prst="roundRect">
+            <a:avLst/>
+          </a:prstGeom>
+          <a:solidFill>
+            <a:srgbClr val="0E261C"/>
+          </a:solidFill>
+          <a:ln w="19050">
+            <a:solidFill>
+              <a:srgbClr val="38BDF8"/>
+            </a:solidFill>
+          </a:ln>
+        </p:spPr>
+        <p:style>
+          <a:lnRef idx="1">
+            <a:schemeClr val="accent1"/>
+          </a:lnRef>
+          <a:fillRef idx="3">
+            <a:schemeClr val="accent1"/>
+          </a:fillRef>
+          <a:effectRef idx="2">
+            <a:schemeClr val="accent1"/>
+          </a:effectRef>
+          <a:fontRef idx="minor">
+            <a:schemeClr val="lt1"/>
+          </a:fontRef>
+        </p:style>
+        <p:txBody>
+          <a:bodyPr rtlCol="0" anchor="ctr" wrap="square" lIns="164592" rIns="164592" tIns="182880"/>
+          <a:lstStyle/>
+          <a:p>
+            <a:pPr algn="ctr">
+              <a:spcAft>
+                <a:spcPts val="600"/>
+              </a:spcAft>
+              <a:defRPr sz="1300" b="1">
+                <a:solidFill>
+                  <a:srgbClr val="38BDF8"/>
+                </a:solidFill>
+                <a:latin typeface="Prompt"/>
+              </a:defRPr>
+            </a:pPr>
+            <a:r>
+              <a:t>STEP 3</a:t>
+            </a:r>
+          </a:p>
+          <a:p>
+            <a:pPr>
+              <a:defRPr sz="1700" b="1">
+                <a:solidFill>
+                  <a:srgbClr val="FFFFFF"/>
+                </a:solidFill>
+                <a:latin typeface="Prompt"/>
+              </a:defRPr>
+            </a:pPr>
+            <a:r>
+              <a:t>ชำระเงิน</a:t>
+            </a:r>
+          </a:p>
+          <a:p>
+            <a:pPr>
+              <a:spcAft>
+                <a:spcPts val="1000"/>
+              </a:spcAft>
+              <a:defRPr sz="950">
+                <a:solidFill>
+                  <a:srgbClr val="A7F3D0"/>
+                </a:solidFill>
+                <a:latin typeface="Prompt"/>
+              </a:defRPr>
+            </a:pPr>
+            <a:r>
+              <a:t>MOBILE BANKING</a:t>
+            </a:r>
+          </a:p>
+          <a:p>
+            <a:pPr>
+              <a:defRPr sz="1200">
+                <a:solidFill>
+                  <a:srgbClr val="E2E8F0"/>
+                </a:solidFill>
+                <a:latin typeface="Sarabun"/>
+              </a:defRPr>
+            </a:pPr>
+            <a:r>
+              <a:t>นักท่องเที่ยวสแกนจ่าย -&gt; ธนาคารตัดยอดและยืนยันสถานะการโอนเงินสำเร็จ</a:t>
+            </a:r>
+          </a:p>
+        </p:txBody>
+      </p:sp>
+      <p:sp>
+        <p:nvSpPr>
+          <p:cNvPr id="8" name="Rounded Rectangle 7"/>
+          <p:cNvSpPr/>
+          <p:nvPr/>
+        </p:nvSpPr>
+        <p:spPr>
+          <a:xfrm>
+            <a:off x="7315199" y="1691640"/>
+            <a:ext cx="2057400" cy="3108960"/>
+          </a:xfrm>
+          <a:prstGeom prst="roundRect">
+            <a:avLst/>
+          </a:prstGeom>
+          <a:solidFill>
+            <a:srgbClr val="0E261C"/>
+          </a:solidFill>
+          <a:ln w="19050">
+            <a:solidFill>
+              <a:srgbClr val="38BDF8"/>
+            </a:solidFill>
+          </a:ln>
+        </p:spPr>
+        <p:style>
+          <a:lnRef idx="1">
+            <a:schemeClr val="accent1"/>
+          </a:lnRef>
+          <a:fillRef idx="3">
+            <a:schemeClr val="accent1"/>
+          </a:fillRef>
+          <a:effectRef idx="2">
+            <a:schemeClr val="accent1"/>
+          </a:effectRef>
+          <a:fontRef idx="minor">
+            <a:schemeClr val="lt1"/>
+          </a:fontRef>
+        </p:style>
+        <p:txBody>
+          <a:bodyPr rtlCol="0" anchor="ctr" wrap="square" lIns="164592" rIns="164592" tIns="182880"/>
+          <a:lstStyle/>
+          <a:p>
+            <a:pPr algn="ctr">
+              <a:spcAft>
+                <a:spcPts val="600"/>
+              </a:spcAft>
+              <a:defRPr sz="1300" b="1">
+                <a:solidFill>
+                  <a:srgbClr val="38BDF8"/>
+                </a:solidFill>
+                <a:latin typeface="Prompt"/>
+              </a:defRPr>
+            </a:pPr>
+            <a:r>
+              <a:t>STEP 4</a:t>
+            </a:r>
+          </a:p>
+          <a:p>
+            <a:pPr>
+              <a:defRPr sz="1700" b="1">
+                <a:solidFill>
+                  <a:srgbClr val="FFFFFF"/>
+                </a:solidFill>
+                <a:latin typeface="Prompt"/>
+              </a:defRPr>
+            </a:pPr>
+            <a:r>
+              <a:t>Webhook</a:t>
+            </a:r>
+          </a:p>
+          <a:p>
+            <a:pPr>
+              <a:spcAft>
+                <a:spcPts val="1000"/>
+              </a:spcAft>
+              <a:defRPr sz="950">
+                <a:solidFill>
+                  <a:srgbClr val="A7F3D0"/>
+                </a:solidFill>
+                <a:latin typeface="Prompt"/>
+              </a:defRPr>
+            </a:pPr>
+            <a:r>
+              <a:t>SIGNATURE VERIFY</a:t>
+            </a:r>
+          </a:p>
+          <a:p>
+            <a:pPr>
+              <a:defRPr sz="1200">
+                <a:solidFill>
+                  <a:srgbClr val="E2E8F0"/>
+                </a:solidFill>
+                <a:latin typeface="Sarabun"/>
+              </a:defRPr>
+            </a:pPr>
+            <a:r>
+              <a:t>Gateway ส่งผลกลับมา -&gt; ตรวจสอบ Digital Signature ป้องกัน Fake Order</a:t>
+            </a:r>
+          </a:p>
+        </p:txBody>
+      </p:sp>
+      <p:sp>
+        <p:nvSpPr>
+          <p:cNvPr id="9" name="Rounded Rectangle 8"/>
+          <p:cNvSpPr/>
+          <p:nvPr/>
+        </p:nvSpPr>
+        <p:spPr>
+          <a:xfrm>
+            <a:off x="9509760" y="1691640"/>
+            <a:ext cx="2057400" cy="3108960"/>
+          </a:xfrm>
+          <a:prstGeom prst="roundRect">
+            <a:avLst/>
+          </a:prstGeom>
+          <a:solidFill>
+            <a:srgbClr val="0E261C"/>
+          </a:solidFill>
+          <a:ln w="19050">
+            <a:solidFill>
+              <a:srgbClr val="38BDF8"/>
+            </a:solidFill>
+          </a:ln>
+        </p:spPr>
+        <p:style>
+          <a:lnRef idx="1">
+            <a:schemeClr val="accent1"/>
+          </a:lnRef>
+          <a:fillRef idx="3">
+            <a:schemeClr val="accent1"/>
+          </a:fillRef>
+          <a:effectRef idx="2">
+            <a:schemeClr val="accent1"/>
+          </a:effectRef>
+          <a:fontRef idx="minor">
+            <a:schemeClr val="lt1"/>
+          </a:fontRef>
+        </p:style>
+        <p:txBody>
+          <a:bodyPr rtlCol="0" anchor="ctr" wrap="square" lIns="164592" rIns="164592" tIns="182880"/>
+          <a:lstStyle/>
+          <a:p>
+            <a:pPr algn="ctr">
+              <a:spcAft>
+                <a:spcPts val="600"/>
+              </a:spcAft>
+              <a:defRPr sz="1300" b="1">
+                <a:solidFill>
+                  <a:srgbClr val="38BDF8"/>
+                </a:solidFill>
+                <a:latin typeface="Prompt"/>
+              </a:defRPr>
+            </a:pPr>
+            <a:r>
+              <a:t>STEP 5</a:t>
+            </a:r>
+          </a:p>
+          <a:p>
+            <a:pPr>
+              <a:defRPr sz="1700" b="1">
+                <a:solidFill>
+                  <a:srgbClr val="FFFFFF"/>
+                </a:solidFill>
+                <a:latin typeface="Prompt"/>
+              </a:defRPr>
+            </a:pPr>
+            <a:r>
+              <a:t>ออกตั๋วทันที</a:t>
+            </a:r>
+          </a:p>
+          <a:p>
+            <a:pPr>
+              <a:spcAft>
+                <a:spcPts val="1000"/>
+              </a:spcAft>
+              <a:defRPr sz="950">
+                <a:solidFill>
+                  <a:srgbClr val="A7F3D0"/>
+                </a:solidFill>
+                <a:latin typeface="Prompt"/>
+              </a:defRPr>
+            </a:pPr>
+            <a:r>
+              <a:t>DATABASE &amp; NOTIFY</a:t>
+            </a:r>
+          </a:p>
+          <a:p>
+            <a:pPr>
+              <a:defRPr sz="1200">
+                <a:solidFill>
+                  <a:srgbClr val="E2E8F0"/>
+                </a:solidFill>
+                <a:latin typeface="Sarabun"/>
+              </a:defRPr>
+            </a:pPr>
+            <a:r>
+              <a:t>บันทึกสถานะ PAID ออก Dynamic One-Time QR และส่ง Push Notification</a:t>
+            </a:r>
+          </a:p>
+        </p:txBody>
+      </p:sp>
+      <p:sp>
+        <p:nvSpPr>
+          <p:cNvPr id="10" name="Rounded Rectangle 9"/>
+          <p:cNvSpPr/>
+          <p:nvPr/>
+        </p:nvSpPr>
+        <p:spPr>
+          <a:xfrm>
+            <a:off x="731520" y="5029200"/>
+            <a:ext cx="10728655" cy="1188720"/>
+          </a:xfrm>
+          <a:prstGeom prst="roundRect">
+            <a:avLst/>
+          </a:prstGeom>
+          <a:solidFill>
+            <a:srgbClr val="0E261C"/>
+          </a:solidFill>
+          <a:ln w="19050">
+            <a:solidFill>
+              <a:srgbClr val="F59E0B"/>
+            </a:solidFill>
+          </a:ln>
+        </p:spPr>
+        <p:style>
+          <a:lnRef idx="1">
+            <a:schemeClr val="accent1"/>
+          </a:lnRef>
+          <a:fillRef idx="3">
+            <a:schemeClr val="accent1"/>
+          </a:fillRef>
+          <a:effectRef idx="2">
+            <a:schemeClr val="accent1"/>
+          </a:effectRef>
+          <a:fontRef idx="minor">
+            <a:schemeClr val="lt1"/>
+          </a:fontRef>
+        </p:style>
+        <p:txBody>
+          <a:bodyPr rtlCol="0" anchor="ctr" wrap="square" lIns="274320" rIns="274320" tIns="164592"/>
+          <a:lstStyle/>
+          <a:p>
+            <a:pPr algn="ctr">
+              <a:spcAft>
+                <a:spcPts val="300"/>
+              </a:spcAft>
+              <a:defRPr sz="1400" b="1">
+                <a:solidFill>
+                  <a:srgbClr val="F59E0B"/>
+                </a:solidFill>
+                <a:latin typeface="Prompt"/>
+              </a:defRPr>
+            </a:pPr>
+            <a:r>
+              <a:t>นโยบายการยกเลิกอัตโนมัติ (10-Minute Auto-Expiry Rule):</a:t>
+            </a:r>
+          </a:p>
+          <a:p>
+            <a:pPr>
+              <a:defRPr sz="1250">
+                <a:solidFill>
+                  <a:srgbClr val="E2E8F0"/>
+                </a:solidFill>
+                <a:latin typeface="Sarabun"/>
+              </a:defRPr>
+            </a:pPr>
+            <a:r>
+              <a:t>• หากไม่มีการชำระเงินภายใน 10 นาที นับตั้งแต่สร้างรายการ ระบบจะทำการ Auto-Expire ยกเลิกคำสั่งซื้อและ QR Code ทันที</a:t>
+            </a:r>
+            <a:br/>
+            <a:r>
+              <a:t>• ปลดล็อกและคืนโควตาที่นั่งกลับเข้าสู่ระบบส่วนกลาง เพื่อป้องกันการกักตั๋ว และเปิดโอกาสให้นักท่องเที่ยวท่านอื่นสามารถจองได้</a:t>
+            </a:r>
+          </a:p>
+        </p:txBody>
+      </p:sp>
     </p:spTree>
   </p:cSld>
   <p:clrMapOvr>
@@ -4948,7 +9816,7 @@
 </p:sld>
 </file>
 
-<file path=ppt/slides/slide8.xml><?xml version="1.0" encoding="utf-8"?>
+<file path=ppt/slides/slide7.xml><?xml version="1.0" encoding="utf-8"?>
 <p:sld xmlns:a="http://schemas.openxmlformats.org/drawingml/2006/main" xmlns:p="http://schemas.openxmlformats.org/presentationml/2006/main" xmlns:r="http://schemas.openxmlformats.org/officeDocument/2006/relationships">
   <p:cSld>
     <p:spTree>
@@ -4960,7 +9828,7 @@
       <p:grpSpPr/>
       <p:pic>
         <p:nvPicPr>
-          <p:cNvPr id="2" name="Picture 1" descr="slide_08.jpg"/>
+          <p:cNvPr id="2" name="Picture 1" descr="dark_topographic_bg.jpg"/>
           <p:cNvPicPr>
             <a:picLocks noChangeAspect="1"/>
           </p:cNvPicPr>
@@ -4982,6 +9850,650 @@
           </a:prstGeom>
         </p:spPr>
       </p:pic>
+      <p:sp>
+        <p:nvSpPr>
+          <p:cNvPr id="3" name="Rounded Rectangle 2"/>
+          <p:cNvSpPr/>
+          <p:nvPr/>
+        </p:nvSpPr>
+        <p:spPr>
+          <a:xfrm>
+            <a:off x="731520" y="365760"/>
+            <a:ext cx="3200400" cy="320040"/>
+          </a:xfrm>
+          <a:prstGeom prst="roundRect">
+            <a:avLst/>
+          </a:prstGeom>
+          <a:solidFill>
+            <a:srgbClr val="123024"/>
+          </a:solidFill>
+          <a:ln w="12700">
+            <a:solidFill>
+              <a:srgbClr val="52B788"/>
+            </a:solidFill>
+          </a:ln>
+        </p:spPr>
+        <p:style>
+          <a:lnRef idx="1">
+            <a:schemeClr val="accent1"/>
+          </a:lnRef>
+          <a:fillRef idx="3">
+            <a:schemeClr val="accent1"/>
+          </a:fillRef>
+          <a:effectRef idx="2">
+            <a:schemeClr val="accent1"/>
+          </a:effectRef>
+          <a:fontRef idx="minor">
+            <a:schemeClr val="lt1"/>
+          </a:fontRef>
+        </p:style>
+        <p:txBody>
+          <a:bodyPr rtlCol="0" anchor="ctr" wrap="square" lIns="0" rIns="0" tIns="0" bIns="0"/>
+          <a:lstStyle/>
+          <a:p>
+            <a:pPr algn="ctr">
+              <a:defRPr sz="1100" b="1">
+                <a:solidFill>
+                  <a:srgbClr val="6EE7B7"/>
+                </a:solidFill>
+                <a:latin typeface="Prompt"/>
+              </a:defRPr>
+            </a:pPr>
+            <a:r>
+              <a:t>FLEET TRACKING &amp; OPERATIONS</a:t>
+            </a:r>
+          </a:p>
+        </p:txBody>
+      </p:sp>
+      <p:sp>
+        <p:nvSpPr>
+          <p:cNvPr id="4" name="TextBox 3"/>
+          <p:cNvSpPr txBox="1"/>
+          <p:nvPr/>
+        </p:nvSpPr>
+        <p:spPr>
+          <a:xfrm>
+            <a:off x="731520" y="685800"/>
+            <a:ext cx="10728655" cy="868680"/>
+          </a:xfrm>
+          <a:prstGeom prst="rect">
+            <a:avLst/>
+          </a:prstGeom>
+          <a:noFill/>
+        </p:spPr>
+        <p:txBody>
+          <a:bodyPr wrap="square" lIns="0" rIns="0" tIns="0" bIns="0">
+            <a:spAutoFit/>
+          </a:bodyPr>
+          <a:lstStyle/>
+          <a:p>
+            <a:pPr>
+              <a:spcAft>
+                <a:spcPts val="300"/>
+              </a:spcAft>
+              <a:defRPr sz="2600" b="1">
+                <a:solidFill>
+                  <a:srgbClr val="FFFFFF"/>
+                </a:solidFill>
+                <a:latin typeface="Prompt"/>
+              </a:defRPr>
+            </a:pPr>
+            <a:r>
+              <a:t>ระบบติดตามรถและสถานีวนลูป (Loop 6 สถานี)</a:t>
+            </a:r>
+          </a:p>
+          <a:p>
+            <a:pPr>
+              <a:defRPr sz="1400">
+                <a:solidFill>
+                  <a:srgbClr val="A7F3D0"/>
+                </a:solidFill>
+                <a:latin typeface="Sarabun"/>
+              </a:defRPr>
+            </a:pPr>
+            <a:r>
+              <a:t>การติดตามพิกัด GPS อัตโนมัติ พร้อมการคำนวณเวลาถึงสถานีแบบ Dynamic ETA</a:t>
+            </a:r>
+          </a:p>
+        </p:txBody>
+      </p:sp>
+      <p:sp>
+        <p:nvSpPr>
+          <p:cNvPr id="5" name="Rounded Rectangle 4"/>
+          <p:cNvSpPr/>
+          <p:nvPr/>
+        </p:nvSpPr>
+        <p:spPr>
+          <a:xfrm>
+            <a:off x="731520" y="1691640"/>
+            <a:ext cx="3474720" cy="4480560"/>
+          </a:xfrm>
+          <a:prstGeom prst="roundRect">
+            <a:avLst/>
+          </a:prstGeom>
+          <a:solidFill>
+            <a:srgbClr val="0E261C"/>
+          </a:solidFill>
+          <a:ln w="19050">
+            <a:solidFill>
+              <a:srgbClr val="52B788"/>
+            </a:solidFill>
+          </a:ln>
+        </p:spPr>
+        <p:style>
+          <a:lnRef idx="1">
+            <a:schemeClr val="accent1"/>
+          </a:lnRef>
+          <a:fillRef idx="3">
+            <a:schemeClr val="accent1"/>
+          </a:fillRef>
+          <a:effectRef idx="2">
+            <a:schemeClr val="accent1"/>
+          </a:effectRef>
+          <a:fontRef idx="minor">
+            <a:schemeClr val="lt1"/>
+          </a:fontRef>
+        </p:style>
+        <p:txBody>
+          <a:bodyPr rtlCol="0" anchor="ctr" wrap="square" lIns="256032" rIns="256032" tIns="256032"/>
+          <a:lstStyle/>
+          <a:p>
+            <a:pPr algn="ctr">
+              <a:spcAft>
+                <a:spcPts val="1400"/>
+              </a:spcAft>
+              <a:defRPr sz="1800" b="1">
+                <a:solidFill>
+                  <a:srgbClr val="6EE7B7"/>
+                </a:solidFill>
+                <a:latin typeface="Prompt"/>
+              </a:defRPr>
+            </a:pPr>
+            <a:r>
+              <a:t>กลไกการทำงานของระบบติดตาม</a:t>
+            </a:r>
+          </a:p>
+          <a:p>
+            <a:pPr>
+              <a:defRPr sz="1400" b="1">
+                <a:solidFill>
+                  <a:srgbClr val="FFFFFF"/>
+                </a:solidFill>
+                <a:latin typeface="Prompt"/>
+              </a:defRPr>
+            </a:pPr>
+            <a:r>
+              <a:t>• Tablet ประจำรถ 3 คัน:</a:t>
+            </a:r>
+          </a:p>
+          <a:p>
+            <a:pPr>
+              <a:spcAft>
+                <a:spcPts val="800"/>
+              </a:spcAft>
+              <a:defRPr sz="1200">
+                <a:solidFill>
+                  <a:srgbClr val="E2E8F0"/>
+                </a:solidFill>
+                <a:latin typeface="Sarabun"/>
+              </a:defRPr>
+            </a:pPr>
+            <a:r>
+              <a:t>  ส่งพิกัด GPS แม่นยำทุกๆ 5 วินาที ผ่านเครือข่าย 4G/Cellular เข้าสู่เซิร์ฟเวอร์</a:t>
+            </a:r>
+          </a:p>
+          <a:p>
+            <a:pPr>
+              <a:defRPr sz="1400" b="1">
+                <a:solidFill>
+                  <a:srgbClr val="FFFFFF"/>
+                </a:solidFill>
+                <a:latin typeface="Prompt"/>
+              </a:defRPr>
+            </a:pPr>
+            <a:r>
+              <a:t>• Geofencing Engine:</a:t>
+            </a:r>
+          </a:p>
+          <a:p>
+            <a:pPr>
+              <a:spcAft>
+                <a:spcPts val="800"/>
+              </a:spcAft>
+              <a:defRPr sz="1200">
+                <a:solidFill>
+                  <a:srgbClr val="E2E8F0"/>
+                </a:solidFill>
+                <a:latin typeface="Sarabun"/>
+              </a:defRPr>
+            </a:pPr>
+            <a:r>
+              <a:t>  ตรวจจับการเข้า-ออกจากแต่ละสถานีอัตโนมัติด้วยรั้วพิกัดเสมือน</a:t>
+            </a:r>
+          </a:p>
+          <a:p>
+            <a:pPr>
+              <a:defRPr sz="1400" b="1">
+                <a:solidFill>
+                  <a:srgbClr val="FFFFFF"/>
+                </a:solidFill>
+                <a:latin typeface="Prompt"/>
+              </a:defRPr>
+            </a:pPr>
+            <a:r>
+              <a:t>• Dynamic ETA Calculator:</a:t>
+            </a:r>
+          </a:p>
+          <a:p>
+            <a:pPr>
+              <a:spcAft>
+                <a:spcPts val="800"/>
+              </a:spcAft>
+              <a:defRPr sz="1200">
+                <a:solidFill>
+                  <a:srgbClr val="E2E8F0"/>
+                </a:solidFill>
+                <a:latin typeface="Sarabun"/>
+              </a:defRPr>
+            </a:pPr>
+            <a:r>
+              <a:t>  คำนวณความเร็วและระยะทาง ประเมินเวลารถจะมาถึงแต่ละสถานีแบบเรียลไทม์</a:t>
+            </a:r>
+          </a:p>
+          <a:p>
+            <a:pPr>
+              <a:defRPr sz="1400" b="1">
+                <a:solidFill>
+                  <a:srgbClr val="FFFFFF"/>
+                </a:solidFill>
+                <a:latin typeface="Prompt"/>
+              </a:defRPr>
+            </a:pPr>
+            <a:r>
+              <a:t>• Driver App:</a:t>
+            </a:r>
+          </a:p>
+          <a:p>
+            <a:pPr>
+              <a:spcAft>
+                <a:spcPts val="800"/>
+              </a:spcAft>
+              <a:defRPr sz="1200">
+                <a:solidFill>
+                  <a:srgbClr val="E2E8F0"/>
+                </a:solidFill>
+                <a:latin typeface="Sarabun"/>
+              </a:defRPr>
+            </a:pPr>
+            <a:r>
+              <a:t>  คนขับดูจำนวนผู้โดยสารและคิวรอในสถานีถัดไปได้ทันทีผ่านหน้าจอแท็บเล็ต</a:t>
+            </a:r>
+          </a:p>
+        </p:txBody>
+      </p:sp>
+      <p:sp>
+        <p:nvSpPr>
+          <p:cNvPr id="6" name="Rounded Rectangle 5"/>
+          <p:cNvSpPr/>
+          <p:nvPr/>
+        </p:nvSpPr>
+        <p:spPr>
+          <a:xfrm>
+            <a:off x="4389120" y="1691640"/>
+            <a:ext cx="3474720" cy="4480560"/>
+          </a:xfrm>
+          <a:prstGeom prst="roundRect">
+            <a:avLst/>
+          </a:prstGeom>
+          <a:solidFill>
+            <a:srgbClr val="0E261C"/>
+          </a:solidFill>
+          <a:ln w="19050">
+            <a:solidFill>
+              <a:srgbClr val="52B788"/>
+            </a:solidFill>
+          </a:ln>
+        </p:spPr>
+        <p:style>
+          <a:lnRef idx="1">
+            <a:schemeClr val="accent1"/>
+          </a:lnRef>
+          <a:fillRef idx="3">
+            <a:schemeClr val="accent1"/>
+          </a:fillRef>
+          <a:effectRef idx="2">
+            <a:schemeClr val="accent1"/>
+          </a:effectRef>
+          <a:fontRef idx="minor">
+            <a:schemeClr val="lt1"/>
+          </a:fontRef>
+        </p:style>
+        <p:txBody>
+          <a:bodyPr rtlCol="0" anchor="ctr" wrap="square" lIns="256032" rIns="256032" tIns="256032"/>
+          <a:lstStyle/>
+          <a:p>
+            <a:pPr algn="ctr">
+              <a:spcAft>
+                <a:spcPts val="1400"/>
+              </a:spcAft>
+              <a:defRPr sz="1800" b="1">
+                <a:solidFill>
+                  <a:srgbClr val="6EE7B7"/>
+                </a:solidFill>
+                <a:latin typeface="Prompt"/>
+              </a:defRPr>
+            </a:pPr>
+            <a:r>
+              <a:t>การเดินรถวนลูป 6 สถานี</a:t>
+            </a:r>
+          </a:p>
+          <a:p>
+            <a:pPr>
+              <a:defRPr sz="1300" b="1">
+                <a:solidFill>
+                  <a:srgbClr val="FFFFFF"/>
+                </a:solidFill>
+                <a:latin typeface="Prompt"/>
+              </a:defRPr>
+            </a:pPr>
+            <a:r>
+              <a:t>สถานี 1: จุดบริการต้อนรับ</a:t>
+            </a:r>
+          </a:p>
+          <a:p>
+            <a:pPr>
+              <a:spcAft>
+                <a:spcPts val="600"/>
+              </a:spcAft>
+              <a:defRPr sz="1200">
+                <a:solidFill>
+                  <a:srgbClr val="A7F3D0"/>
+                </a:solidFill>
+                <a:latin typeface="Sarabun"/>
+              </a:defRPr>
+            </a:pPr>
+            <a:r>
+              <a:t>  -&gt; กำหนดเวลาโดยประมาณ: ETA 3 นาที</a:t>
+            </a:r>
+          </a:p>
+          <a:p>
+            <a:pPr>
+              <a:defRPr sz="1300" b="1">
+                <a:solidFill>
+                  <a:srgbClr val="FFFFFF"/>
+                </a:solidFill>
+                <a:latin typeface="Prompt"/>
+              </a:defRPr>
+            </a:pPr>
+            <a:r>
+              <a:t>สถานี 2: พิพิธภัณฑ์ธรรมชาติวิทยา</a:t>
+            </a:r>
+          </a:p>
+          <a:p>
+            <a:pPr>
+              <a:spcAft>
+                <a:spcPts val="600"/>
+              </a:spcAft>
+              <a:defRPr sz="1200">
+                <a:solidFill>
+                  <a:srgbClr val="A7F3D0"/>
+                </a:solidFill>
+                <a:latin typeface="Sarabun"/>
+              </a:defRPr>
+            </a:pPr>
+            <a:r>
+              <a:t>  -&gt; กำหนดเวลาโดยประมาณ: ETA 8 นาที</a:t>
+            </a:r>
+          </a:p>
+          <a:p>
+            <a:pPr>
+              <a:defRPr sz="1300" b="1">
+                <a:solidFill>
+                  <a:srgbClr val="FFFFFF"/>
+                </a:solidFill>
+                <a:latin typeface="Prompt"/>
+              </a:defRPr>
+            </a:pPr>
+            <a:r>
+              <a:t>สถานี 3: ทางเดินเรือนยอดไม้ (Canopy)</a:t>
+            </a:r>
+          </a:p>
+          <a:p>
+            <a:pPr>
+              <a:spcAft>
+                <a:spcPts val="600"/>
+              </a:spcAft>
+              <a:defRPr sz="1200">
+                <a:solidFill>
+                  <a:srgbClr val="A7F3D0"/>
+                </a:solidFill>
+                <a:latin typeface="Sarabun"/>
+              </a:defRPr>
+            </a:pPr>
+            <a:r>
+              <a:t>  -&gt; กำหนดเวลาโดยประมาณ: ETA 14 นาที</a:t>
+            </a:r>
+          </a:p>
+          <a:p>
+            <a:pPr>
+              <a:defRPr sz="1300" b="1">
+                <a:solidFill>
+                  <a:srgbClr val="FFFFFF"/>
+                </a:solidFill>
+                <a:latin typeface="Prompt"/>
+              </a:defRPr>
+            </a:pPr>
+            <a:r>
+              <a:t>สถานี 4: กลุ่มเรือนกระจกเฉลิมพระเกียรติ</a:t>
+            </a:r>
+          </a:p>
+          <a:p>
+            <a:pPr>
+              <a:spcAft>
+                <a:spcPts val="600"/>
+              </a:spcAft>
+              <a:defRPr sz="1200">
+                <a:solidFill>
+                  <a:srgbClr val="A7F3D0"/>
+                </a:solidFill>
+                <a:latin typeface="Sarabun"/>
+              </a:defRPr>
+            </a:pPr>
+            <a:r>
+              <a:t>  -&gt; กำหนดเวลาโดยประมาณ: ETA 19 นาที</a:t>
+            </a:r>
+          </a:p>
+          <a:p>
+            <a:pPr>
+              <a:defRPr sz="1300" b="1">
+                <a:solidFill>
+                  <a:srgbClr val="FFFFFF"/>
+                </a:solidFill>
+                <a:latin typeface="Prompt"/>
+              </a:defRPr>
+            </a:pPr>
+            <a:r>
+              <a:t>สถานี 5: สวนกล้วยไม้และพืชเขตร้อน</a:t>
+            </a:r>
+          </a:p>
+          <a:p>
+            <a:pPr>
+              <a:spcAft>
+                <a:spcPts val="600"/>
+              </a:spcAft>
+              <a:defRPr sz="1200">
+                <a:solidFill>
+                  <a:srgbClr val="A7F3D0"/>
+                </a:solidFill>
+                <a:latin typeface="Sarabun"/>
+              </a:defRPr>
+            </a:pPr>
+            <a:r>
+              <a:t>  -&gt; กำหนดเวลาโดยประมาณ: ETA 24 นาที</a:t>
+            </a:r>
+          </a:p>
+          <a:p>
+            <a:pPr>
+              <a:defRPr sz="1300" b="1">
+                <a:solidFill>
+                  <a:srgbClr val="FFFFFF"/>
+                </a:solidFill>
+                <a:latin typeface="Prompt"/>
+              </a:defRPr>
+            </a:pPr>
+            <a:r>
+              <a:t>สถานี 6: จุดชมวิวธรรมชาติ ดอยแม่ริม</a:t>
+            </a:r>
+          </a:p>
+          <a:p>
+            <a:pPr>
+              <a:spcAft>
+                <a:spcPts val="600"/>
+              </a:spcAft>
+              <a:defRPr sz="1200">
+                <a:solidFill>
+                  <a:srgbClr val="A7F3D0"/>
+                </a:solidFill>
+                <a:latin typeface="Sarabun"/>
+              </a:defRPr>
+            </a:pPr>
+            <a:r>
+              <a:t>  -&gt; กำหนดเวลาโดยประมาณ: ETA 30 นาที</a:t>
+            </a:r>
+          </a:p>
+          <a:p>
+            <a:pPr>
+              <a:defRPr sz="1200" b="1">
+                <a:solidFill>
+                  <a:srgbClr val="F59E0B"/>
+                </a:solidFill>
+                <a:latin typeface="Prompt"/>
+              </a:defRPr>
+            </a:pPr>
+            <a:r>
+              <a:t>รถวิ่งวนลูปต่อเนื่อง ปรับความถี่อัตโนมัติตามปริมาณคิวรอ</a:t>
+            </a:r>
+          </a:p>
+        </p:txBody>
+      </p:sp>
+      <p:sp>
+        <p:nvSpPr>
+          <p:cNvPr id="7" name="Rounded Rectangle 6"/>
+          <p:cNvSpPr/>
+          <p:nvPr/>
+        </p:nvSpPr>
+        <p:spPr>
+          <a:xfrm>
+            <a:off x="8046720" y="1691640"/>
+            <a:ext cx="3413455" cy="4480560"/>
+          </a:xfrm>
+          <a:prstGeom prst="roundRect">
+            <a:avLst/>
+          </a:prstGeom>
+          <a:solidFill>
+            <a:srgbClr val="0E261C"/>
+          </a:solidFill>
+          <a:ln w="19050">
+            <a:solidFill>
+              <a:srgbClr val="52B788"/>
+            </a:solidFill>
+          </a:ln>
+        </p:spPr>
+        <p:style>
+          <a:lnRef idx="1">
+            <a:schemeClr val="accent1"/>
+          </a:lnRef>
+          <a:fillRef idx="3">
+            <a:schemeClr val="accent1"/>
+          </a:fillRef>
+          <a:effectRef idx="2">
+            <a:schemeClr val="accent1"/>
+          </a:effectRef>
+          <a:fontRef idx="minor">
+            <a:schemeClr val="lt1"/>
+          </a:fontRef>
+        </p:style>
+        <p:txBody>
+          <a:bodyPr rtlCol="0" anchor="ctr"/>
+          <a:lstStyle/>
+          <a:p>
+            <a:pPr algn="ctr"/>
+          </a:p>
+        </p:txBody>
+      </p:sp>
+      <p:pic>
+        <p:nvPicPr>
+          <p:cNvPr id="8" name="Picture 7" descr="ev_cart_cockpit_tablet.jpg"/>
+          <p:cNvPicPr>
+            <a:picLocks noChangeAspect="1"/>
+          </p:cNvPicPr>
+          <p:nvPr/>
+        </p:nvPicPr>
+        <p:blipFill>
+          <a:blip r:embed="rId3"/>
+          <a:stretch>
+            <a:fillRect/>
+          </a:stretch>
+        </p:blipFill>
+        <p:spPr>
+          <a:xfrm>
+            <a:off x="8229600" y="1874519"/>
+            <a:ext cx="3047695" cy="3383280"/>
+          </a:xfrm>
+          <a:prstGeom prst="rect">
+            <a:avLst/>
+          </a:prstGeom>
+        </p:spPr>
+      </p:pic>
+      <p:sp>
+        <p:nvSpPr>
+          <p:cNvPr id="9" name="TextBox 8"/>
+          <p:cNvSpPr txBox="1"/>
+          <p:nvPr/>
+        </p:nvSpPr>
+        <p:spPr>
+          <a:xfrm>
+            <a:off x="8229600" y="5394960"/>
+            <a:ext cx="3047695" cy="685800"/>
+          </a:xfrm>
+          <a:prstGeom prst="rect">
+            <a:avLst/>
+          </a:prstGeom>
+          <a:noFill/>
+        </p:spPr>
+        <p:txBody>
+          <a:bodyPr wrap="square" lIns="0" rIns="0" tIns="0" bIns="0">
+            <a:spAutoFit/>
+          </a:bodyPr>
+          <a:lstStyle/>
+          <a:p>
+            <a:pPr>
+              <a:defRPr sz="1300" b="1">
+                <a:solidFill>
+                  <a:srgbClr val="6EE7B7"/>
+                </a:solidFill>
+                <a:latin typeface="Prompt"/>
+              </a:defRPr>
+            </a:pPr>
+            <a:r>
+              <a:t>ภาพจริง: แท็บเล็ตประจำรถ EV</a:t>
+            </a:r>
+          </a:p>
+          <a:p>
+            <a:pPr>
+              <a:defRPr sz="1150">
+                <a:solidFill>
+                  <a:srgbClr val="E2E8F0"/>
+                </a:solidFill>
+                <a:latin typeface="Sarabun"/>
+              </a:defRPr>
+            </a:pPr>
+            <a:r>
+              <a:t>ติดตั้งในห้องโดยสารคนขับ ส่งพิกัด GPS ทุก 5 วิ และใช้สแกนตรวจตั๋ว Check-in</a:t>
+            </a:r>
+          </a:p>
+        </p:txBody>
+      </p:sp>
     </p:spTree>
   </p:cSld>
   <p:clrMapOvr>
@@ -4990,7 +10502,7 @@
 </p:sld>
 </file>
 
-<file path=ppt/slides/slide9.xml><?xml version="1.0" encoding="utf-8"?>
+<file path=ppt/slides/slide8.xml><?xml version="1.0" encoding="utf-8"?>
 <p:sld xmlns:a="http://schemas.openxmlformats.org/drawingml/2006/main" xmlns:p="http://schemas.openxmlformats.org/presentationml/2006/main" xmlns:r="http://schemas.openxmlformats.org/officeDocument/2006/relationships">
   <p:cSld>
     <p:spTree>
@@ -5002,7 +10514,7 @@
       <p:grpSpPr/>
       <p:pic>
         <p:nvPicPr>
-          <p:cNvPr id="2" name="Picture 1" descr="slide_09.jpg"/>
+          <p:cNvPr id="2" name="Picture 1" descr="dark_topographic_bg.jpg"/>
           <p:cNvPicPr>
             <a:picLocks noChangeAspect="1"/>
           </p:cNvPicPr>
@@ -5024,6 +10536,1015 @@
           </a:prstGeom>
         </p:spPr>
       </p:pic>
+      <p:sp>
+        <p:nvSpPr>
+          <p:cNvPr id="3" name="Rounded Rectangle 2"/>
+          <p:cNvSpPr/>
+          <p:nvPr/>
+        </p:nvSpPr>
+        <p:spPr>
+          <a:xfrm>
+            <a:off x="731520" y="365760"/>
+            <a:ext cx="3200400" cy="320040"/>
+          </a:xfrm>
+          <a:prstGeom prst="roundRect">
+            <a:avLst/>
+          </a:prstGeom>
+          <a:solidFill>
+            <a:srgbClr val="123024"/>
+          </a:solidFill>
+          <a:ln w="12700">
+            <a:solidFill>
+              <a:srgbClr val="52B788"/>
+            </a:solidFill>
+          </a:ln>
+        </p:spPr>
+        <p:style>
+          <a:lnRef idx="1">
+            <a:schemeClr val="accent1"/>
+          </a:lnRef>
+          <a:fillRef idx="3">
+            <a:schemeClr val="accent1"/>
+          </a:fillRef>
+          <a:effectRef idx="2">
+            <a:schemeClr val="accent1"/>
+          </a:effectRef>
+          <a:fontRef idx="minor">
+            <a:schemeClr val="lt1"/>
+          </a:fontRef>
+        </p:style>
+        <p:txBody>
+          <a:bodyPr rtlCol="0" anchor="ctr" wrap="square" lIns="0" rIns="0" tIns="0" bIns="0"/>
+          <a:lstStyle/>
+          <a:p>
+            <a:pPr algn="ctr">
+              <a:defRPr sz="1100" b="1">
+                <a:solidFill>
+                  <a:srgbClr val="6EE7B7"/>
+                </a:solidFill>
+                <a:latin typeface="Prompt"/>
+              </a:defRPr>
+            </a:pPr>
+            <a:r>
+              <a:t>QUEUE &amp; NOTIFICATIONS</a:t>
+            </a:r>
+          </a:p>
+        </p:txBody>
+      </p:sp>
+      <p:sp>
+        <p:nvSpPr>
+          <p:cNvPr id="4" name="TextBox 3"/>
+          <p:cNvSpPr txBox="1"/>
+          <p:nvPr/>
+        </p:nvSpPr>
+        <p:spPr>
+          <a:xfrm>
+            <a:off x="731520" y="685800"/>
+            <a:ext cx="10728655" cy="868680"/>
+          </a:xfrm>
+          <a:prstGeom prst="rect">
+            <a:avLst/>
+          </a:prstGeom>
+          <a:noFill/>
+        </p:spPr>
+        <p:txBody>
+          <a:bodyPr wrap="square" lIns="0" rIns="0" tIns="0" bIns="0">
+            <a:spAutoFit/>
+          </a:bodyPr>
+          <a:lstStyle/>
+          <a:p>
+            <a:pPr>
+              <a:spcAft>
+                <a:spcPts val="300"/>
+              </a:spcAft>
+              <a:defRPr sz="2600" b="1">
+                <a:solidFill>
+                  <a:srgbClr val="FFFFFF"/>
+                </a:solidFill>
+                <a:latin typeface="Prompt"/>
+              </a:defRPr>
+            </a:pPr>
+            <a:r>
+              <a:t>การบริหารคิวอัจฉริยะและการแจ้งเตือน</a:t>
+            </a:r>
+          </a:p>
+          <a:p>
+            <a:pPr>
+              <a:defRPr sz="1400">
+                <a:solidFill>
+                  <a:srgbClr val="A7F3D0"/>
+                </a:solidFill>
+                <a:latin typeface="Sarabun"/>
+              </a:defRPr>
+            </a:pPr>
+            <a:r>
+              <a:t>Smart Queue Balancing ลดความแออัด พร้อมระบบแจ้งเตือนแบบเรียลไทม์</a:t>
+            </a:r>
+          </a:p>
+        </p:txBody>
+      </p:sp>
+      <p:sp>
+        <p:nvSpPr>
+          <p:cNvPr id="5" name="Rounded Rectangle 4"/>
+          <p:cNvSpPr/>
+          <p:nvPr/>
+        </p:nvSpPr>
+        <p:spPr>
+          <a:xfrm>
+            <a:off x="731520" y="1691640"/>
+            <a:ext cx="3429000" cy="4480560"/>
+          </a:xfrm>
+          <a:prstGeom prst="roundRect">
+            <a:avLst/>
+          </a:prstGeom>
+          <a:solidFill>
+            <a:srgbClr val="0E261C"/>
+          </a:solidFill>
+          <a:ln w="19050">
+            <a:solidFill>
+              <a:srgbClr val="52B788"/>
+            </a:solidFill>
+          </a:ln>
+        </p:spPr>
+        <p:style>
+          <a:lnRef idx="1">
+            <a:schemeClr val="accent1"/>
+          </a:lnRef>
+          <a:fillRef idx="3">
+            <a:schemeClr val="accent1"/>
+          </a:fillRef>
+          <a:effectRef idx="2">
+            <a:schemeClr val="accent1"/>
+          </a:effectRef>
+          <a:fontRef idx="minor">
+            <a:schemeClr val="lt1"/>
+          </a:fontRef>
+        </p:style>
+        <p:txBody>
+          <a:bodyPr rtlCol="0" anchor="ctr" wrap="square" lIns="256032" rIns="256032" tIns="256032"/>
+          <a:lstStyle/>
+          <a:p>
+            <a:pPr algn="ctr">
+              <a:defRPr sz="1900" b="1">
+                <a:solidFill>
+                  <a:srgbClr val="FFFFFF"/>
+                </a:solidFill>
+                <a:latin typeface="Prompt"/>
+              </a:defRPr>
+            </a:pPr>
+            <a:r>
+              <a:t>Smart Queue Balancing</a:t>
+            </a:r>
+          </a:p>
+          <a:p>
+            <a:pPr>
+              <a:spcAft>
+                <a:spcPts val="1400"/>
+              </a:spcAft>
+              <a:defRPr sz="1100">
+                <a:solidFill>
+                  <a:srgbClr val="52B788"/>
+                </a:solidFill>
+                <a:latin typeface="Prompt"/>
+              </a:defRPr>
+            </a:pPr>
+            <a:r>
+              <a:t>การกระจายผู้โดยสารอัจฉริยะ</a:t>
+            </a:r>
+          </a:p>
+          <a:p>
+            <a:pPr>
+              <a:spcAft>
+                <a:spcPts val="800"/>
+              </a:spcAft>
+              <a:defRPr sz="1300">
+                <a:solidFill>
+                  <a:srgbClr val="E2E8F0"/>
+                </a:solidFill>
+                <a:latin typeface="Sarabun"/>
+              </a:defRPr>
+            </a:pPr>
+            <a:r>
+              <a:t>• คำนวณความจุที่นั่งว่างจริง (Seat Capacity) บนรถเทียบกับคิวรอแต่ละสถานี</a:t>
+            </a:r>
+          </a:p>
+          <a:p>
+            <a:pPr>
+              <a:spcAft>
+                <a:spcPts val="800"/>
+              </a:spcAft>
+              <a:defRPr sz="1300">
+                <a:solidFill>
+                  <a:srgbClr val="E2E8F0"/>
+                </a:solidFill>
+                <a:latin typeface="Sarabun"/>
+              </a:defRPr>
+            </a:pPr>
+            <a:r>
+              <a:t>• หากสถานีใดมีผู้โดยสารสะสมหนาแน่น ระบบจะแจ้งเตือนให้จัดรถเสริมไปรับทันที</a:t>
+            </a:r>
+          </a:p>
+          <a:p>
+            <a:pPr>
+              <a:spcAft>
+                <a:spcPts val="800"/>
+              </a:spcAft>
+              <a:defRPr sz="1300">
+                <a:solidFill>
+                  <a:srgbClr val="E2E8F0"/>
+                </a:solidFill>
+                <a:latin typeface="Sarabun"/>
+              </a:defRPr>
+            </a:pPr>
+            <a:r>
+              <a:t>• ลดปัญหาคอขวดที่สถานียอดนิยม เช่น Canopy Walkway หรือกลุ่มเรือนกระจก</a:t>
+            </a:r>
+          </a:p>
+          <a:p>
+            <a:pPr>
+              <a:spcAft>
+                <a:spcPts val="800"/>
+              </a:spcAft>
+              <a:defRPr sz="1300">
+                <a:solidFill>
+                  <a:srgbClr val="E2E8F0"/>
+                </a:solidFill>
+                <a:latin typeface="Sarabun"/>
+              </a:defRPr>
+            </a:pPr>
+            <a:r>
+              <a:t>• กระจายโหลดการเดินรถให้เกิดประสิทธิภาพสูงสุด</a:t>
+            </a:r>
+          </a:p>
+        </p:txBody>
+      </p:sp>
+      <p:sp>
+        <p:nvSpPr>
+          <p:cNvPr id="6" name="Rounded Rectangle 5"/>
+          <p:cNvSpPr/>
+          <p:nvPr/>
+        </p:nvSpPr>
+        <p:spPr>
+          <a:xfrm>
+            <a:off x="4389120" y="1691640"/>
+            <a:ext cx="3429000" cy="4480560"/>
+          </a:xfrm>
+          <a:prstGeom prst="roundRect">
+            <a:avLst/>
+          </a:prstGeom>
+          <a:solidFill>
+            <a:srgbClr val="0E261C"/>
+          </a:solidFill>
+          <a:ln w="19050">
+            <a:solidFill>
+              <a:srgbClr val="38BDF8"/>
+            </a:solidFill>
+          </a:ln>
+        </p:spPr>
+        <p:style>
+          <a:lnRef idx="1">
+            <a:schemeClr val="accent1"/>
+          </a:lnRef>
+          <a:fillRef idx="3">
+            <a:schemeClr val="accent1"/>
+          </a:fillRef>
+          <a:effectRef idx="2">
+            <a:schemeClr val="accent1"/>
+          </a:effectRef>
+          <a:fontRef idx="minor">
+            <a:schemeClr val="lt1"/>
+          </a:fontRef>
+        </p:style>
+        <p:txBody>
+          <a:bodyPr rtlCol="0" anchor="ctr" wrap="square" lIns="256032" rIns="256032" tIns="256032"/>
+          <a:lstStyle/>
+          <a:p>
+            <a:pPr algn="ctr">
+              <a:defRPr sz="1900" b="1">
+                <a:solidFill>
+                  <a:srgbClr val="FFFFFF"/>
+                </a:solidFill>
+                <a:latin typeface="Prompt"/>
+              </a:defRPr>
+            </a:pPr>
+            <a:r>
+              <a:t>Omnichannel Display</a:t>
+            </a:r>
+          </a:p>
+          <a:p>
+            <a:pPr>
+              <a:spcAft>
+                <a:spcPts val="1400"/>
+              </a:spcAft>
+              <a:defRPr sz="1100">
+                <a:solidFill>
+                  <a:srgbClr val="38BDF8"/>
+                </a:solidFill>
+                <a:latin typeface="Prompt"/>
+              </a:defRPr>
+            </a:pPr>
+            <a:r>
+              <a:t>การแสดงผลสดรอบด้าน</a:t>
+            </a:r>
+          </a:p>
+          <a:p>
+            <a:pPr>
+              <a:spcAft>
+                <a:spcPts val="800"/>
+              </a:spcAft>
+              <a:defRPr sz="1300">
+                <a:solidFill>
+                  <a:srgbClr val="E2E8F0"/>
+                </a:solidFill>
+                <a:latin typeface="Sarabun"/>
+              </a:defRPr>
+            </a:pPr>
+            <a:r>
+              <a:t>• Live Map: เห็นตำแหน่งรถเคลื่อนที่สดๆ บนแผนที่ในแอปพลิเคชัน</a:t>
+            </a:r>
+          </a:p>
+          <a:p>
+            <a:pPr>
+              <a:spcAft>
+                <a:spcPts val="800"/>
+              </a:spcAft>
+              <a:defRPr sz="1300">
+                <a:solidFill>
+                  <a:srgbClr val="E2E8F0"/>
+                </a:solidFill>
+                <a:latin typeface="Sarabun"/>
+              </a:defRPr>
+            </a:pPr>
+            <a:r>
+              <a:t>• Station Display: หน้าจอมอนิเตอร์ประจำสถานีบอกเวลารถมาถึงและจำนวนคิวรอ</a:t>
+            </a:r>
+          </a:p>
+          <a:p>
+            <a:pPr>
+              <a:spcAft>
+                <a:spcPts val="800"/>
+              </a:spcAft>
+              <a:defRPr sz="1300">
+                <a:solidFill>
+                  <a:srgbClr val="E2E8F0"/>
+                </a:solidFill>
+                <a:latin typeface="Sarabun"/>
+              </a:defRPr>
+            </a:pPr>
+            <a:r>
+              <a:t>• Kiosk: ตรวจสอบคิวและสิทธิ์ตั๋วได้ตลอดเวลา</a:t>
+            </a:r>
+          </a:p>
+          <a:p>
+            <a:pPr>
+              <a:spcAft>
+                <a:spcPts val="800"/>
+              </a:spcAft>
+              <a:defRPr sz="1300">
+                <a:solidFill>
+                  <a:srgbClr val="E2E8F0"/>
+                </a:solidFill>
+                <a:latin typeface="Sarabun"/>
+              </a:defRPr>
+            </a:pPr>
+            <a:r>
+              <a:t>• ข้อมูลโปร่งใส เข้าถึงง่ายสำหรับนักท่องเที่ยวทุกคน</a:t>
+            </a:r>
+          </a:p>
+        </p:txBody>
+      </p:sp>
+      <p:sp>
+        <p:nvSpPr>
+          <p:cNvPr id="7" name="Rounded Rectangle 6"/>
+          <p:cNvSpPr/>
+          <p:nvPr/>
+        </p:nvSpPr>
+        <p:spPr>
+          <a:xfrm>
+            <a:off x="8046720" y="1691640"/>
+            <a:ext cx="3429000" cy="4480560"/>
+          </a:xfrm>
+          <a:prstGeom prst="roundRect">
+            <a:avLst/>
+          </a:prstGeom>
+          <a:solidFill>
+            <a:srgbClr val="0E261C"/>
+          </a:solidFill>
+          <a:ln w="19050">
+            <a:solidFill>
+              <a:srgbClr val="F59E0B"/>
+            </a:solidFill>
+          </a:ln>
+        </p:spPr>
+        <p:style>
+          <a:lnRef idx="1">
+            <a:schemeClr val="accent1"/>
+          </a:lnRef>
+          <a:fillRef idx="3">
+            <a:schemeClr val="accent1"/>
+          </a:fillRef>
+          <a:effectRef idx="2">
+            <a:schemeClr val="accent1"/>
+          </a:effectRef>
+          <a:fontRef idx="minor">
+            <a:schemeClr val="lt1"/>
+          </a:fontRef>
+        </p:style>
+        <p:txBody>
+          <a:bodyPr rtlCol="0" anchor="ctr" wrap="square" lIns="256032" rIns="256032" tIns="256032"/>
+          <a:lstStyle/>
+          <a:p>
+            <a:pPr algn="ctr">
+              <a:defRPr sz="1900" b="1">
+                <a:solidFill>
+                  <a:srgbClr val="FFFFFF"/>
+                </a:solidFill>
+                <a:latin typeface="Prompt"/>
+              </a:defRPr>
+            </a:pPr>
+            <a:r>
+              <a:t>Proactive Push Notification</a:t>
+            </a:r>
+          </a:p>
+          <a:p>
+            <a:pPr>
+              <a:spcAft>
+                <a:spcPts val="1400"/>
+              </a:spcAft>
+              <a:defRPr sz="1100">
+                <a:solidFill>
+                  <a:srgbClr val="F59E0B"/>
+                </a:solidFill>
+                <a:latin typeface="Prompt"/>
+              </a:defRPr>
+            </a:pPr>
+            <a:r>
+              <a:t>การแจ้งเตือนล่วงหน้า</a:t>
+            </a:r>
+          </a:p>
+          <a:p>
+            <a:pPr>
+              <a:spcAft>
+                <a:spcPts val="800"/>
+              </a:spcAft>
+              <a:defRPr sz="1300">
+                <a:solidFill>
+                  <a:srgbClr val="E2E8F0"/>
+                </a:solidFill>
+                <a:latin typeface="Sarabun"/>
+              </a:defRPr>
+            </a:pPr>
+            <a:r>
+              <a:t>• ส่ง Push Notification ผ่าน Mobile App หรือ LINE เมื่อรถใกล้ถึงในระยะ 3 นาที หรือ 500 เมตร</a:t>
+            </a:r>
+          </a:p>
+          <a:p>
+            <a:pPr>
+              <a:spcAft>
+                <a:spcPts val="800"/>
+              </a:spcAft>
+              <a:defRPr sz="1300">
+                <a:solidFill>
+                  <a:srgbClr val="E2E8F0"/>
+                </a:solidFill>
+                <a:latin typeface="Sarabun"/>
+              </a:defRPr>
+            </a:pPr>
+            <a:r>
+              <a:t>• นักท่องเที่ยวไม่ต้องยืนตากแดดรอที่สถานี สามารถเดินถ่ายรูปหรือจิบกาแฟได้อย่างสบายใจ</a:t>
+            </a:r>
+          </a:p>
+          <a:p>
+            <a:pPr>
+              <a:spcAft>
+                <a:spcPts val="800"/>
+              </a:spcAft>
+              <a:defRPr sz="1300">
+                <a:solidFill>
+                  <a:srgbClr val="E2E8F0"/>
+                </a:solidFill>
+                <a:latin typeface="Sarabun"/>
+              </a:defRPr>
+            </a:pPr>
+            <a:r>
+              <a:t>• แจ้งเตือนเปลี่ยนสถานะคิวเมื่อถึงคิวขึ้นรถ</a:t>
+            </a:r>
+          </a:p>
+          <a:p>
+            <a:pPr>
+              <a:spcAft>
+                <a:spcPts val="800"/>
+              </a:spcAft>
+              <a:defRPr sz="1300">
+                <a:solidFill>
+                  <a:srgbClr val="E2E8F0"/>
+                </a:solidFill>
+                <a:latin typeface="Sarabun"/>
+              </a:defRPr>
+            </a:pPr>
+            <a:r>
+              <a:t>• ระบบแจ้งเตือนฉุกเฉินกรณีสภาพอากาศหรือการปรับรอบรถ</a:t>
+            </a:r>
+          </a:p>
+        </p:txBody>
+      </p:sp>
+    </p:spTree>
+  </p:cSld>
+  <p:clrMapOvr>
+    <a:masterClrMapping/>
+  </p:clrMapOvr>
+</p:sld>
+</file>
+
+<file path=ppt/slides/slide9.xml><?xml version="1.0" encoding="utf-8"?>
+<p:sld xmlns:a="http://schemas.openxmlformats.org/drawingml/2006/main" xmlns:p="http://schemas.openxmlformats.org/presentationml/2006/main" xmlns:r="http://schemas.openxmlformats.org/officeDocument/2006/relationships">
+  <p:cSld>
+    <p:spTree>
+      <p:nvGrpSpPr>
+        <p:cNvPr id="1" name=""/>
+        <p:cNvGrpSpPr/>
+        <p:nvPr/>
+      </p:nvGrpSpPr>
+      <p:grpSpPr/>
+      <p:pic>
+        <p:nvPicPr>
+          <p:cNvPr id="2" name="Picture 1" descr="dark_topographic_bg.jpg"/>
+          <p:cNvPicPr>
+            <a:picLocks noChangeAspect="1"/>
+          </p:cNvPicPr>
+          <p:nvPr/>
+        </p:nvPicPr>
+        <p:blipFill>
+          <a:blip r:embed="rId2"/>
+          <a:stretch>
+            <a:fillRect/>
+          </a:stretch>
+        </p:blipFill>
+        <p:spPr>
+          <a:xfrm>
+            <a:off x="0" y="0"/>
+            <a:ext cx="12191695" cy="6858000"/>
+          </a:xfrm>
+          <a:prstGeom prst="rect">
+            <a:avLst/>
+          </a:prstGeom>
+        </p:spPr>
+      </p:pic>
+      <p:sp>
+        <p:nvSpPr>
+          <p:cNvPr id="3" name="Rounded Rectangle 2"/>
+          <p:cNvSpPr/>
+          <p:nvPr/>
+        </p:nvSpPr>
+        <p:spPr>
+          <a:xfrm>
+            <a:off x="731520" y="365760"/>
+            <a:ext cx="3200400" cy="320040"/>
+          </a:xfrm>
+          <a:prstGeom prst="roundRect">
+            <a:avLst/>
+          </a:prstGeom>
+          <a:solidFill>
+            <a:srgbClr val="123024"/>
+          </a:solidFill>
+          <a:ln w="12700">
+            <a:solidFill>
+              <a:srgbClr val="52B788"/>
+            </a:solidFill>
+          </a:ln>
+        </p:spPr>
+        <p:style>
+          <a:lnRef idx="1">
+            <a:schemeClr val="accent1"/>
+          </a:lnRef>
+          <a:fillRef idx="3">
+            <a:schemeClr val="accent1"/>
+          </a:fillRef>
+          <a:effectRef idx="2">
+            <a:schemeClr val="accent1"/>
+          </a:effectRef>
+          <a:fontRef idx="minor">
+            <a:schemeClr val="lt1"/>
+          </a:fontRef>
+        </p:style>
+        <p:txBody>
+          <a:bodyPr rtlCol="0" anchor="ctr" wrap="square" lIns="0" rIns="0" tIns="0" bIns="0"/>
+          <a:lstStyle/>
+          <a:p>
+            <a:pPr algn="ctr">
+              <a:defRPr sz="1100" b="1">
+                <a:solidFill>
+                  <a:srgbClr val="6EE7B7"/>
+                </a:solidFill>
+                <a:latin typeface="Prompt"/>
+              </a:defRPr>
+            </a:pPr>
+            <a:r>
+              <a:t>SMART GUIDE</a:t>
+            </a:r>
+          </a:p>
+        </p:txBody>
+      </p:sp>
+      <p:sp>
+        <p:nvSpPr>
+          <p:cNvPr id="4" name="TextBox 3"/>
+          <p:cNvSpPr txBox="1"/>
+          <p:nvPr/>
+        </p:nvSpPr>
+        <p:spPr>
+          <a:xfrm>
+            <a:off x="731520" y="685800"/>
+            <a:ext cx="10728655" cy="868680"/>
+          </a:xfrm>
+          <a:prstGeom prst="rect">
+            <a:avLst/>
+          </a:prstGeom>
+          <a:noFill/>
+        </p:spPr>
+        <p:txBody>
+          <a:bodyPr wrap="square" lIns="0" rIns="0" tIns="0" bIns="0">
+            <a:spAutoFit/>
+          </a:bodyPr>
+          <a:lstStyle/>
+          <a:p>
+            <a:pPr>
+              <a:spcAft>
+                <a:spcPts val="300"/>
+              </a:spcAft>
+              <a:defRPr sz="2600" b="1">
+                <a:solidFill>
+                  <a:srgbClr val="FFFFFF"/>
+                </a:solidFill>
+                <a:latin typeface="Prompt"/>
+              </a:defRPr>
+            </a:pPr>
+            <a:r>
+              <a:t>ระบบแนะนำแหล่งท่องเที่ยวตามพิกัดภูมิศาสตร์</a:t>
+            </a:r>
+          </a:p>
+          <a:p>
+            <a:pPr>
+              <a:defRPr sz="1400">
+                <a:solidFill>
+                  <a:srgbClr val="A7F3D0"/>
+                </a:solidFill>
+                <a:latin typeface="Sarabun"/>
+              </a:defRPr>
+            </a:pPr>
+            <a:r>
+              <a:t>ยกระดับการท่องเที่ยวเชิงเรียนรู้ด้วย Geofence Virtual Beacon Technology</a:t>
+            </a:r>
+          </a:p>
+        </p:txBody>
+      </p:sp>
+      <p:sp>
+        <p:nvSpPr>
+          <p:cNvPr id="5" name="Rounded Rectangle 4"/>
+          <p:cNvSpPr/>
+          <p:nvPr/>
+        </p:nvSpPr>
+        <p:spPr>
+          <a:xfrm>
+            <a:off x="731520" y="1691640"/>
+            <a:ext cx="5257800" cy="4480560"/>
+          </a:xfrm>
+          <a:prstGeom prst="roundRect">
+            <a:avLst/>
+          </a:prstGeom>
+          <a:solidFill>
+            <a:srgbClr val="0E261C"/>
+          </a:solidFill>
+          <a:ln w="19050">
+            <a:solidFill>
+              <a:srgbClr val="52B788"/>
+            </a:solidFill>
+          </a:ln>
+        </p:spPr>
+        <p:style>
+          <a:lnRef idx="1">
+            <a:schemeClr val="accent1"/>
+          </a:lnRef>
+          <a:fillRef idx="3">
+            <a:schemeClr val="accent1"/>
+          </a:fillRef>
+          <a:effectRef idx="2">
+            <a:schemeClr val="accent1"/>
+          </a:effectRef>
+          <a:fontRef idx="minor">
+            <a:schemeClr val="lt1"/>
+          </a:fontRef>
+        </p:style>
+        <p:txBody>
+          <a:bodyPr rtlCol="0" anchor="ctr" wrap="square" lIns="320040" rIns="320040" tIns="320040"/>
+          <a:lstStyle/>
+          <a:p>
+            <a:pPr algn="ctr">
+              <a:spcAft>
+                <a:spcPts val="1600"/>
+              </a:spcAft>
+              <a:defRPr sz="2000" b="1">
+                <a:solidFill>
+                  <a:srgbClr val="6EE7B7"/>
+                </a:solidFill>
+                <a:latin typeface="Prompt"/>
+              </a:defRPr>
+            </a:pPr>
+            <a:r>
+              <a:t>เทคโนโลยี Geofences ในพื้นที่ 6,500 ไร่</a:t>
+            </a:r>
+          </a:p>
+          <a:p>
+            <a:pPr>
+              <a:defRPr sz="1450" b="1">
+                <a:solidFill>
+                  <a:srgbClr val="FFFFFF"/>
+                </a:solidFill>
+                <a:latin typeface="Prompt"/>
+              </a:defRPr>
+            </a:pPr>
+            <a:r>
+              <a:t>• รั้วพิกัดเสมือน (Virtual Geofence Zones):</a:t>
+            </a:r>
+          </a:p>
+          <a:p>
+            <a:pPr>
+              <a:spcAft>
+                <a:spcPts val="1000"/>
+              </a:spcAft>
+              <a:defRPr sz="1300">
+                <a:solidFill>
+                  <a:srgbClr val="E2E8F0"/>
+                </a:solidFill>
+                <a:latin typeface="Sarabun"/>
+              </a:defRPr>
+            </a:pPr>
+            <a:r>
+              <a:t>  กำหนดพื้นที่จำลองรอบจุดแลนด์มาร์ก ตรวจจับเมื่อรถหรือนักท่องเที่ยวเข้าสู่พื้นที่โดยอัตโนมัติ</a:t>
+            </a:r>
+          </a:p>
+          <a:p>
+            <a:pPr>
+              <a:defRPr sz="1450" b="1">
+                <a:solidFill>
+                  <a:srgbClr val="FFFFFF"/>
+                </a:solidFill>
+                <a:latin typeface="Prompt"/>
+              </a:defRPr>
+            </a:pPr>
+            <a:r>
+              <a:t>• Context-Aware Multimedia Guide:</a:t>
+            </a:r>
+          </a:p>
+          <a:p>
+            <a:pPr>
+              <a:spcAft>
+                <a:spcPts val="1000"/>
+              </a:spcAft>
+              <a:defRPr sz="1300">
+                <a:solidFill>
+                  <a:srgbClr val="E2E8F0"/>
+                </a:solidFill>
+                <a:latin typeface="Sarabun"/>
+              </a:defRPr>
+            </a:pPr>
+            <a:r>
+              <a:t>  เด้งข้อมูลความรู้ แนะนำพันธุ์ไม้เด่น ประวัติความเป็นมา และคลิปวิดีโอสั้นบนจอมือถือตามจุดที่ยืนอยู่</a:t>
+            </a:r>
+          </a:p>
+          <a:p>
+            <a:pPr>
+              <a:defRPr sz="1450" b="1">
+                <a:solidFill>
+                  <a:srgbClr val="FFFFFF"/>
+                </a:solidFill>
+                <a:latin typeface="Prompt"/>
+              </a:defRPr>
+            </a:pPr>
+            <a:r>
+              <a:t>• Immersive Audio Guide:</a:t>
+            </a:r>
+          </a:p>
+          <a:p>
+            <a:pPr>
+              <a:spcAft>
+                <a:spcPts val="1000"/>
+              </a:spcAft>
+              <a:defRPr sz="1300">
+                <a:solidFill>
+                  <a:srgbClr val="E2E8F0"/>
+                </a:solidFill>
+                <a:latin typeface="Sarabun"/>
+              </a:defRPr>
+            </a:pPr>
+            <a:r>
+              <a:t>  เปิดเสียงบรรยายแนะนำให้นักท่องเที่ยวรับฟังอย่างกลมกลืนกับธรรมชาติรอบตัว เสมือนมีมัคคุเทศก์ส่วนตัว</a:t>
+            </a:r>
+          </a:p>
+          <a:p>
+            <a:pPr>
+              <a:defRPr sz="1450" b="1">
+                <a:solidFill>
+                  <a:srgbClr val="FFFFFF"/>
+                </a:solidFill>
+                <a:latin typeface="Prompt"/>
+              </a:defRPr>
+            </a:pPr>
+            <a:r>
+              <a:t>• Smart Route Suggestions:</a:t>
+            </a:r>
+          </a:p>
+          <a:p>
+            <a:pPr>
+              <a:spcAft>
+                <a:spcPts val="1000"/>
+              </a:spcAft>
+              <a:defRPr sz="1300">
+                <a:solidFill>
+                  <a:srgbClr val="E2E8F0"/>
+                </a:solidFill>
+                <a:latin typeface="Sarabun"/>
+              </a:defRPr>
+            </a:pPr>
+            <a:r>
+              <a:t>  แนะนำเส้นทางตามเวลา เช่น ทริปสั้น 1 ชม. หรือทริปเจาะลึก 3 ชม. สำหรับผู้รักธรรมชาติ</a:t>
+            </a:r>
+          </a:p>
+        </p:txBody>
+      </p:sp>
+      <p:sp>
+        <p:nvSpPr>
+          <p:cNvPr id="6" name="Rounded Rectangle 5"/>
+          <p:cNvSpPr/>
+          <p:nvPr/>
+        </p:nvSpPr>
+        <p:spPr>
+          <a:xfrm>
+            <a:off x="6199632" y="1691640"/>
+            <a:ext cx="5257800" cy="4480560"/>
+          </a:xfrm>
+          <a:prstGeom prst="roundRect">
+            <a:avLst/>
+          </a:prstGeom>
+          <a:solidFill>
+            <a:srgbClr val="0E261C"/>
+          </a:solidFill>
+          <a:ln w="19050">
+            <a:solidFill>
+              <a:srgbClr val="52B788"/>
+            </a:solidFill>
+          </a:ln>
+        </p:spPr>
+        <p:style>
+          <a:lnRef idx="1">
+            <a:schemeClr val="accent1"/>
+          </a:lnRef>
+          <a:fillRef idx="3">
+            <a:schemeClr val="accent1"/>
+          </a:fillRef>
+          <a:effectRef idx="2">
+            <a:schemeClr val="accent1"/>
+          </a:effectRef>
+          <a:fontRef idx="minor">
+            <a:schemeClr val="lt1"/>
+          </a:fontRef>
+        </p:style>
+        <p:txBody>
+          <a:bodyPr rtlCol="0" anchor="ctr" wrap="square" lIns="320040" rIns="320040" tIns="320040"/>
+          <a:lstStyle/>
+          <a:p>
+            <a:pPr algn="ctr">
+              <a:spcAft>
+                <a:spcPts val="1600"/>
+              </a:spcAft>
+              <a:defRPr sz="2000" b="1">
+                <a:solidFill>
+                  <a:srgbClr val="6EE7B7"/>
+                </a:solidFill>
+                <a:latin typeface="Prompt"/>
+              </a:defRPr>
+            </a:pPr>
+            <a:r>
+              <a:t>ไฮไลต์แลนด์มาร์กสำคัญที่เชื่อมต่อในระบบ</a:t>
+            </a:r>
+          </a:p>
+          <a:p>
+            <a:pPr>
+              <a:defRPr sz="1450" b="1">
+                <a:solidFill>
+                  <a:srgbClr val="FFFFFF"/>
+                </a:solidFill>
+                <a:latin typeface="Prompt"/>
+              </a:defRPr>
+            </a:pPr>
+            <a:r>
+              <a:t>1. Canopy Walkway (ทางเดินเรือนยอดไม้):</a:t>
+            </a:r>
+          </a:p>
+          <a:p>
+            <a:pPr>
+              <a:spcAft>
+                <a:spcPts val="1000"/>
+              </a:spcAft>
+              <a:defRPr sz="1300">
+                <a:solidFill>
+                  <a:srgbClr val="E2E8F0"/>
+                </a:solidFill>
+                <a:latin typeface="Sarabun"/>
+              </a:defRPr>
+            </a:pPr>
+            <a:r>
+              <a:t>ทางเดินลอยฟ้าเหนือเรือนยอดไม้ที่ยาวที่สุดในประเทศไทย แนะนำพันธุ์ไม้เรือนยอด พืชอิงอาศัย และทิวทัศน์ยอดดอย</a:t>
+            </a:r>
+          </a:p>
+          <a:p>
+            <a:pPr>
+              <a:defRPr sz="1450" b="1">
+                <a:solidFill>
+                  <a:srgbClr val="FFFFFF"/>
+                </a:solidFill>
+                <a:latin typeface="Prompt"/>
+              </a:defRPr>
+            </a:pPr>
+            <a:r>
+              <a:t>2. กลุ่มเรือนกระจกเฉลิมพระเกียรติ (Glasshouses):</a:t>
+            </a:r>
+          </a:p>
+          <a:p>
+            <a:pPr>
+              <a:spcAft>
+                <a:spcPts val="1000"/>
+              </a:spcAft>
+              <a:defRPr sz="1300">
+                <a:solidFill>
+                  <a:srgbClr val="E2E8F0"/>
+                </a:solidFill>
+                <a:latin typeface="Sarabun"/>
+              </a:defRPr>
+            </a:pPr>
+            <a:r>
+              <a:t>รวบรวมพืชทนแล้ง พืชป่าดงดิบ พืชกินแมลง และบัวนานาพันธุ์ จัดแสดงพืชหายากระดับโลก</a:t>
+            </a:r>
+          </a:p>
+          <a:p>
+            <a:pPr>
+              <a:defRPr sz="1450" b="1">
+                <a:solidFill>
+                  <a:srgbClr val="FFFFFF"/>
+                </a:solidFill>
+                <a:latin typeface="Prompt"/>
+              </a:defRPr>
+            </a:pPr>
+            <a:r>
+              <a:t>3. พิพิธภัณฑ์ธรรมชาติวิทยา (Natural History):</a:t>
+            </a:r>
+          </a:p>
+          <a:p>
+            <a:pPr>
+              <a:spcAft>
+                <a:spcPts val="1000"/>
+              </a:spcAft>
+              <a:defRPr sz="1300">
+                <a:solidFill>
+                  <a:srgbClr val="E2E8F0"/>
+                </a:solidFill>
+                <a:latin typeface="Sarabun"/>
+              </a:defRPr>
+            </a:pPr>
+            <a:r>
+              <a:t>นิทรรศการถาวรความหลากหลายทางชีวภาพ ธรณีวิทยา และการอนุรักษ์พันธุกรรมพืช</a:t>
+            </a:r>
+          </a:p>
+          <a:p>
+            <a:pPr>
+              <a:defRPr sz="1450" b="1">
+                <a:solidFill>
+                  <a:srgbClr val="FFFFFF"/>
+                </a:solidFill>
+                <a:latin typeface="Prompt"/>
+              </a:defRPr>
+            </a:pPr>
+            <a:r>
+              <a:t>4. สวนกล้วยไม้และลานธรรมชาติ:</a:t>
+            </a:r>
+          </a:p>
+          <a:p>
+            <a:pPr>
+              <a:spcAft>
+                <a:spcPts val="1000"/>
+              </a:spcAft>
+              <a:defRPr sz="1300">
+                <a:solidFill>
+                  <a:srgbClr val="E2E8F0"/>
+                </a:solidFill>
+                <a:latin typeface="Sarabun"/>
+              </a:defRPr>
+            </a:pPr>
+            <a:r>
+              <a:t>ศูนย์อนุรักษ์กล้วยไม้ไทยและสายพันธุ์ผสม สัมผัสอากาศบริสุทธิ์ของดอยแม่ริม</a:t>
+            </a:r>
+          </a:p>
+        </p:txBody>
+      </p:sp>
     </p:spTree>
   </p:cSld>
   <p:clrMapOvr>
